--- a/docs/free-rwe-resources/train-the-trainer/training/day-03-cohort-definitions/kit/Instructor-Deck-with-Notes.pptx
+++ b/docs/free-rwe-resources/train-the-trainer/training/day-03-cohort-definitions/kit/Instructor-Deck-with-Notes.pptx
@@ -9,17 +9,23 @@
     <p:sldId id="257" r:id="rId8"/>
     <p:sldId id="258" r:id="rId9"/>
     <p:sldId id="259" r:id="rId10"/>
-    <p:sldId id="260" r:id="rId12"/>
-    <p:sldId id="261" r:id="rId13"/>
-    <p:sldId id="262" r:id="rId14"/>
-    <p:sldId id="263" r:id="rId15"/>
-    <p:sldId id="264" r:id="rId16"/>
+    <p:sldId id="260" r:id="rId11"/>
+    <p:sldId id="261" r:id="rId12"/>
+    <p:sldId id="262" r:id="rId13"/>
+    <p:sldId id="263" r:id="rId14"/>
+    <p:sldId id="264" r:id="rId15"/>
     <p:sldId id="265" r:id="rId17"/>
     <p:sldId id="266" r:id="rId18"/>
     <p:sldId id="267" r:id="rId19"/>
     <p:sldId id="268" r:id="rId20"/>
     <p:sldId id="269" r:id="rId21"/>
     <p:sldId id="270" r:id="rId22"/>
+    <p:sldId id="271" r:id="rId23"/>
+    <p:sldId id="272" r:id="rId24"/>
+    <p:sldId id="273" r:id="rId25"/>
+    <p:sldId id="274" r:id="rId26"/>
+    <p:sldId id="275" r:id="rId27"/>
+    <p:sldId id="276" r:id="rId28"/>
   </p:sldIdLst>
   <p:sldSz cx="12188952" cy="6858000" type="screen4x3"/>
   <p:notesSz cx="6858000" cy="9144000"/>
@@ -3887,7 +3893,7 @@
             <a:avLst/>
           </a:prstGeom>
           <a:solidFill>
-            <a:srgbClr val="4B2682"/>
+            <a:srgbClr val="20425A"/>
           </a:solidFill>
           <a:ln>
             <a:noFill/>
@@ -3930,7 +3936,7 @@
             <a:avLst/>
           </a:prstGeom>
           <a:solidFill>
-            <a:srgbClr val="7B4FA8"/>
+            <a:srgbClr val="904199"/>
           </a:solidFill>
           <a:ln>
             <a:noFill/>
@@ -3973,7 +3979,7 @@
             <a:avLst/>
           </a:prstGeom>
           <a:solidFill>
-            <a:srgbClr val="7B4FA8"/>
+            <a:srgbClr val="904199"/>
           </a:solidFill>
           <a:ln>
             <a:noFill/>
@@ -4016,7 +4022,7 @@
             <a:avLst/>
           </a:prstGeom>
           <a:solidFill>
-            <a:srgbClr val="7B4FA8"/>
+            <a:srgbClr val="904199"/>
           </a:solidFill>
           <a:ln>
             <a:noFill/>
@@ -4072,6 +4078,7 @@
                 <a:solidFill>
                   <a:srgbClr val="FFFFFF"/>
                 </a:solidFill>
+                <a:latin typeface="Gotham Narrow"/>
               </a:rPr>
               <a:t>DAY 3</a:t>
             </a:r>
@@ -4106,6 +4113,7 @@
                 <a:solidFill>
                   <a:srgbClr val="FFFFFF"/>
                 </a:solidFill>
+                <a:latin typeface="Gotham Narrow"/>
               </a:rPr>
               <a:t>Cohort Definition
 and Characterization</a:t>
@@ -4139,8 +4147,9 @@
             <a:r>
               <a:rPr sz="2200" b="0" i="0">
                 <a:solidFill>
-                  <a:srgbClr val="C8B4E6"/>
-                </a:solidFill>
+                  <a:srgbClr val="D9C4E6"/>
+                </a:solidFill>
+                <a:latin typeface="Arial"/>
               </a:rPr>
               <a:t>Building new-user cohorts in ATLAS · temporal logic · characterization</a:t>
             </a:r>
@@ -4173,8 +4182,9 @@
             <a:r>
               <a:rPr sz="1300" b="0" i="0">
                 <a:solidFill>
-                  <a:srgbClr val="AA96CD"/>
-                </a:solidFill>
+                  <a:srgbClr val="AEC4D2"/>
+                </a:solidFill>
+                <a:latin typeface="Arial"/>
               </a:rPr>
               <a:t>ALS TDI · OHDSI/OMOP Train-the-Trainer</a:t>
             </a:r>
@@ -4208,13 +4218,13 @@
         <p:spPr>
           <a:xfrm>
             <a:off x="0" y="0"/>
-            <a:ext cx="12188952" cy="960120"/>
+            <a:ext cx="12188952" cy="6858000"/>
           </a:xfrm>
           <a:prstGeom prst="rect">
             <a:avLst/>
           </a:prstGeom>
           <a:solidFill>
-            <a:srgbClr val="4B2682"/>
+            <a:srgbClr val="20425A"/>
           </a:solidFill>
           <a:ln>
             <a:noFill/>
@@ -4250,14 +4260,14 @@
         </p:nvSpPr>
         <p:spPr>
           <a:xfrm>
-            <a:off x="0" y="923544"/>
-            <a:ext cx="12188952" cy="36576"/>
+            <a:off x="0" y="0"/>
+            <a:ext cx="12188952" cy="64008"/>
           </a:xfrm>
           <a:prstGeom prst="rect">
             <a:avLst/>
           </a:prstGeom>
           <a:solidFill>
-            <a:srgbClr val="7B4FA8"/>
+            <a:srgbClr val="904199"/>
           </a:solidFill>
           <a:ln>
             <a:noFill/>
@@ -4287,14 +4297,57 @@
       </p:sp>
       <p:sp>
         <p:nvSpPr>
-          <p:cNvPr id="4" name="TextBox 3"/>
+          <p:cNvPr id="4" name="Rectangle 3"/>
+          <p:cNvSpPr/>
+          <p:nvPr/>
+        </p:nvSpPr>
+        <p:spPr>
+          <a:xfrm>
+            <a:off x="475488" y="1737360"/>
+            <a:ext cx="822960" cy="822960"/>
+          </a:xfrm>
+          <a:prstGeom prst="rect">
+            <a:avLst/>
+          </a:prstGeom>
+          <a:solidFill>
+            <a:srgbClr val="904199"/>
+          </a:solidFill>
+          <a:ln>
+            <a:noFill/>
+          </a:ln>
+        </p:spPr>
+        <p:style>
+          <a:lnRef idx="1">
+            <a:schemeClr val="accent1"/>
+          </a:lnRef>
+          <a:fillRef idx="3">
+            <a:schemeClr val="accent1"/>
+          </a:fillRef>
+          <a:effectRef idx="2">
+            <a:schemeClr val="accent1"/>
+          </a:effectRef>
+          <a:fontRef idx="minor">
+            <a:schemeClr val="lt1"/>
+          </a:fontRef>
+        </p:style>
+        <p:txBody>
+          <a:bodyPr rtlCol="0" anchor="ctr"/>
+          <a:lstStyle/>
+          <a:p>
+            <a:pPr algn="ctr"/>
+          </a:p>
+        </p:txBody>
+      </p:sp>
+      <p:sp>
+        <p:nvSpPr>
+          <p:cNvPr id="5" name="TextBox 4"/>
           <p:cNvSpPr txBox="1"/>
           <p:nvPr/>
         </p:nvSpPr>
         <p:spPr>
           <a:xfrm>
-            <a:off x="475488" y="137160"/>
-            <a:ext cx="11713464" cy="777240"/>
+            <a:off x="475488" y="1801368"/>
+            <a:ext cx="822960" cy="731520"/>
           </a:xfrm>
           <a:prstGeom prst="rect">
             <a:avLst/>
@@ -4307,28 +4360,29 @@
           </a:bodyPr>
           <a:lstStyle/>
           <a:p>
-            <a:pPr algn="l"/>
-            <a:r>
-              <a:rPr sz="2800" b="1" i="0">
+            <a:pPr algn="ctr"/>
+            <a:r>
+              <a:rPr sz="3400" b="1" i="0">
                 <a:solidFill>
                   <a:srgbClr val="FFFFFF"/>
                 </a:solidFill>
-              </a:rPr>
-              <a:t>Part 4: Cohort Exit</a:t>
-            </a:r>
-          </a:p>
-        </p:txBody>
-      </p:sp>
-      <p:sp>
-        <p:nvSpPr>
-          <p:cNvPr id="5" name="TextBox 4"/>
+                <a:latin typeface="Gotham Narrow"/>
+              </a:rPr>
+              <a:t>The 4 Parts</a:t>
+            </a:r>
+          </a:p>
+        </p:txBody>
+      </p:sp>
+      <p:sp>
+        <p:nvSpPr>
+          <p:cNvPr id="6" name="TextBox 5"/>
           <p:cNvSpPr txBox="1"/>
           <p:nvPr/>
         </p:nvSpPr>
         <p:spPr>
           <a:xfrm>
-            <a:off x="475488" y="1161288"/>
-            <a:ext cx="11237976" cy="5495544"/>
+            <a:off x="1737360" y="1828800"/>
+            <a:ext cx="9902952" cy="1005840"/>
           </a:xfrm>
           <a:prstGeom prst="rect">
             <a:avLst/>
@@ -4341,138 +4395,50 @@
           </a:bodyPr>
           <a:lstStyle/>
           <a:p>
-            <a:pPr>
-              <a:spcBef>
-                <a:spcPts val="600"/>
-              </a:spcBef>
-            </a:pPr>
-            <a:r>
-              <a:rPr sz="1800">
-                <a:solidFill>
-                  <a:srgbClr val="191919"/>
-                </a:solidFill>
-              </a:rPr>
-              <a:t>Defines when and how a person leaves the cohort</a:t>
-            </a:r>
-          </a:p>
-          <a:p>
-            <a:pPr>
-              <a:spcBef>
-                <a:spcPts val="600"/>
-              </a:spcBef>
-            </a:pPr>
-            <a:r>
-              <a:rPr sz="1800">
-                <a:solidFill>
-                  <a:srgbClr val="191919"/>
-                </a:solidFill>
-              </a:rPr>
-              <a:t>Common exit strategies:</a:t>
-            </a:r>
-          </a:p>
-          <a:p>
-            <a:pPr lvl="1">
-              <a:spcBef>
-                <a:spcPts val="300"/>
-              </a:spcBef>
-            </a:pPr>
-            <a:r>
-              <a:rPr sz="1600">
-                <a:solidFill>
-                  <a:srgbClr val="191919"/>
-                </a:solidFill>
-              </a:rPr>
-              <a:t>End of observation period: person stays in cohort until data ends — widest possible follow-up</a:t>
-            </a:r>
-          </a:p>
-          <a:p>
-            <a:pPr lvl="1">
-              <a:spcBef>
-                <a:spcPts val="300"/>
-              </a:spcBef>
-            </a:pPr>
-            <a:r>
-              <a:rPr sz="1600">
-                <a:solidFill>
-                  <a:srgbClr val="191919"/>
-                </a:solidFill>
-              </a:rPr>
-              <a:t>End of continuous drug exposure + gap: exits when drug fill lapses by &gt;N days — correct for drug era studies</a:t>
-            </a:r>
-          </a:p>
-          <a:p>
-            <a:pPr lvl="1">
-              <a:spcBef>
-                <a:spcPts val="300"/>
-              </a:spcBef>
-            </a:pPr>
-            <a:r>
-              <a:rPr sz="1600">
-                <a:solidFill>
-                  <a:srgbClr val="191919"/>
-                </a:solidFill>
-              </a:rPr>
-              <a:t>Fixed duration: exits N days after index — useful for fixed-horizon studies</a:t>
-            </a:r>
-          </a:p>
-          <a:p>
-            <a:pPr lvl="1">
-              <a:spcBef>
-                <a:spcPts val="300"/>
-              </a:spcBef>
-            </a:pPr>
-            <a:r>
-              <a:rPr sz="1600">
-                <a:solidFill>
-                  <a:srgbClr val="191919"/>
-                </a:solidFill>
-              </a:rPr>
-              <a:t>Event-based: exits when a specific event occurs (e.g., death, hospitalization)</a:t>
-            </a:r>
-          </a:p>
-          <a:p>
-            <a:pPr>
-              <a:spcBef>
-                <a:spcPts val="600"/>
-              </a:spcBef>
-            </a:pPr>
-            <a:r>
-              <a:rPr sz="1800">
-                <a:solidFill>
-                  <a:srgbClr val="191919"/>
-                </a:solidFill>
-              </a:rPr>
-              <a:t>Exit strategy dramatically affects cohort size and follow-up time</a:t>
-            </a:r>
-          </a:p>
-          <a:p>
-            <a:pPr>
-              <a:spcBef>
-                <a:spcPts val="600"/>
-              </a:spcBef>
-            </a:pPr>
-            <a:r>
-              <a:rPr sz="1800">
-                <a:solidFill>
-                  <a:srgbClr val="191919"/>
-                </a:solidFill>
-              </a:rPr>
-              <a:t>New-user cohorts typically use: end of continuous exposure OR end of observation period</a:t>
-            </a:r>
-          </a:p>
-          <a:p>
-            <a:pPr>
-              <a:spcBef>
-                <a:spcPts val="600"/>
-              </a:spcBef>
-            </a:pPr>
-            <a:r>
-              <a:rPr sz="1800">
-                <a:solidFill>
-                  <a:srgbClr val="191919"/>
-                </a:solidFill>
-              </a:rPr>
-              <a:t>Document your exit strategy in the study protocol — it determines what analytic window you have</a:t>
+            <a:pPr algn="l"/>
+            <a:r>
+              <a:rPr sz="3600" b="1" i="0">
+                <a:solidFill>
+                  <a:srgbClr val="FFFFFF"/>
+                </a:solidFill>
+                <a:latin typeface="Gotham Narrow"/>
+              </a:rPr>
+              <a:t>Every Cohort Definition</a:t>
+            </a:r>
+          </a:p>
+        </p:txBody>
+      </p:sp>
+      <p:sp>
+        <p:nvSpPr>
+          <p:cNvPr id="7" name="TextBox 6"/>
+          <p:cNvSpPr txBox="1"/>
+          <p:nvPr/>
+        </p:nvSpPr>
+        <p:spPr>
+          <a:xfrm>
+            <a:off x="475488" y="3200400"/>
+            <a:ext cx="11237976" cy="1188720"/>
+          </a:xfrm>
+          <a:prstGeom prst="rect">
+            <a:avLst/>
+          </a:prstGeom>
+          <a:noFill/>
+        </p:spPr>
+        <p:txBody>
+          <a:bodyPr wrap="square">
+            <a:spAutoFit/>
+          </a:bodyPr>
+          <a:lstStyle/>
+          <a:p>
+            <a:pPr algn="l"/>
+            <a:r>
+              <a:rPr sz="2000" b="0" i="0">
+                <a:solidFill>
+                  <a:srgbClr val="D9C4E6"/>
+                </a:solidFill>
+                <a:latin typeface="Arial"/>
+              </a:rPr>
+              <a:t>Entry Event · Concept Sets · Inclusion Criteria · Exit</a:t>
             </a:r>
           </a:p>
         </p:txBody>
@@ -4510,7 +4476,7 @@
             <a:avLst/>
           </a:prstGeom>
           <a:solidFill>
-            <a:srgbClr val="008278"/>
+            <a:srgbClr val="20425A"/>
           </a:solidFill>
           <a:ln>
             <a:noFill/>
@@ -4546,14 +4512,14 @@
         </p:nvSpPr>
         <p:spPr>
           <a:xfrm>
-            <a:off x="0" y="923544"/>
-            <a:ext cx="12188952" cy="36576"/>
+            <a:off x="0" y="905256"/>
+            <a:ext cx="12188952" cy="54864"/>
           </a:xfrm>
           <a:prstGeom prst="rect">
             <a:avLst/>
           </a:prstGeom>
           <a:solidFill>
-            <a:srgbClr val="00645A"/>
+            <a:srgbClr val="904199"/>
           </a:solidFill>
           <a:ln>
             <a:noFill/>
@@ -4590,7 +4556,7 @@
         <p:spPr>
           <a:xfrm>
             <a:off x="475488" y="137160"/>
-            <a:ext cx="11237976" cy="777240"/>
+            <a:ext cx="11713464" cy="777240"/>
           </a:xfrm>
           <a:prstGeom prst="rect">
             <a:avLst/>
@@ -4605,12 +4571,13 @@
           <a:p>
             <a:pPr algn="l"/>
             <a:r>
-              <a:rPr sz="2600" b="1" i="0">
+              <a:rPr sz="2800" b="1" i="0">
                 <a:solidFill>
                   <a:srgbClr val="FFFFFF"/>
                 </a:solidFill>
-              </a:rPr>
-              <a:t>Lab:  Live Demo: New-User Metformin Cohort in ATLAS</a:t>
+                <a:latin typeface="Gotham Narrow"/>
+              </a:rPr>
+              <a:t>Part 1: Cohort Entry Event (Initial Event)</a:t>
             </a:r>
           </a:p>
         </p:txBody>
@@ -4623,8 +4590,8 @@
         </p:nvSpPr>
         <p:spPr>
           <a:xfrm>
-            <a:off x="9262872" y="201168"/>
-            <a:ext cx="2468880" cy="548640"/>
+            <a:off x="475488" y="1161288"/>
+            <a:ext cx="11237976" cy="5495544"/>
           </a:xfrm>
           <a:prstGeom prst="rect">
             <a:avLst/>
@@ -4637,759 +4604,115 @@
           </a:bodyPr>
           <a:lstStyle/>
           <a:p>
-            <a:pPr algn="r"/>
-            <a:r>
-              <a:rPr sz="1400" b="0" i="0">
-                <a:solidFill>
-                  <a:srgbClr val="FFFFFF"/>
-                </a:solidFill>
-              </a:rPr>
-              <a:t>⏱  ~25 minutes (demo)</a:t>
-            </a:r>
-          </a:p>
-        </p:txBody>
-      </p:sp>
-      <p:sp>
-        <p:nvSpPr>
-          <p:cNvPr id="6" name="Rectangle 5"/>
-          <p:cNvSpPr/>
-          <p:nvPr/>
-        </p:nvSpPr>
-        <p:spPr>
-          <a:xfrm>
-            <a:off x="475488" y="1124712"/>
-            <a:ext cx="11237976" cy="402336"/>
-          </a:xfrm>
-          <a:prstGeom prst="rect">
-            <a:avLst/>
-          </a:prstGeom>
-          <a:solidFill>
-            <a:srgbClr val="DAFFFA"/>
-          </a:solidFill>
-          <a:ln w="9525">
-            <a:solidFill>
-              <a:srgbClr val="008278"/>
-            </a:solidFill>
-          </a:ln>
-        </p:spPr>
-        <p:style>
-          <a:lnRef idx="1">
-            <a:schemeClr val="accent1"/>
-          </a:lnRef>
-          <a:fillRef idx="3">
-            <a:schemeClr val="accent1"/>
-          </a:fillRef>
-          <a:effectRef idx="2">
-            <a:schemeClr val="accent1"/>
-          </a:effectRef>
-          <a:fontRef idx="minor">
-            <a:schemeClr val="lt1"/>
-          </a:fontRef>
-        </p:style>
-        <p:txBody>
-          <a:bodyPr rtlCol="0" anchor="ctr"/>
-          <a:lstStyle/>
-          <a:p>
-            <a:pPr algn="ctr"/>
-          </a:p>
-        </p:txBody>
-      </p:sp>
-      <p:sp>
-        <p:nvSpPr>
-          <p:cNvPr id="7" name="TextBox 6"/>
-          <p:cNvSpPr txBox="1"/>
-          <p:nvPr/>
-        </p:nvSpPr>
-        <p:spPr>
-          <a:xfrm>
-            <a:off x="566928" y="1197864"/>
-            <a:ext cx="11055096" cy="274320"/>
-          </a:xfrm>
-          <a:prstGeom prst="rect">
-            <a:avLst/>
-          </a:prstGeom>
-          <a:noFill/>
-        </p:spPr>
-        <p:txBody>
-          <a:bodyPr wrap="square">
-            <a:spAutoFit/>
-          </a:bodyPr>
-          <a:lstStyle/>
-          <a:p>
-            <a:pPr algn="l"/>
-            <a:r>
-              <a:rPr sz="1400" b="0" i="0">
-                <a:solidFill>
-                  <a:srgbClr val="005A55"/>
-                </a:solidFill>
-              </a:rPr>
-              <a:t>Tool: ATLAS (your site's instance)</a:t>
-            </a:r>
-          </a:p>
-        </p:txBody>
-      </p:sp>
-      <p:sp>
-        <p:nvSpPr>
-          <p:cNvPr id="8" name="Rectangle 7"/>
-          <p:cNvSpPr/>
-          <p:nvPr/>
-        </p:nvSpPr>
-        <p:spPr>
-          <a:xfrm>
-            <a:off x="475488" y="1655064"/>
-            <a:ext cx="365760" cy="365760"/>
-          </a:xfrm>
-          <a:prstGeom prst="rect">
-            <a:avLst/>
-          </a:prstGeom>
-          <a:solidFill>
-            <a:srgbClr val="008278"/>
-          </a:solidFill>
-          <a:ln>
-            <a:noFill/>
-          </a:ln>
-        </p:spPr>
-        <p:style>
-          <a:lnRef idx="1">
-            <a:schemeClr val="accent1"/>
-          </a:lnRef>
-          <a:fillRef idx="3">
-            <a:schemeClr val="accent1"/>
-          </a:fillRef>
-          <a:effectRef idx="2">
-            <a:schemeClr val="accent1"/>
-          </a:effectRef>
-          <a:fontRef idx="minor">
-            <a:schemeClr val="lt1"/>
-          </a:fontRef>
-        </p:style>
-        <p:txBody>
-          <a:bodyPr rtlCol="0" anchor="ctr"/>
-          <a:lstStyle/>
-          <a:p>
-            <a:pPr algn="ctr"/>
-          </a:p>
-        </p:txBody>
-      </p:sp>
-      <p:sp>
-        <p:nvSpPr>
-          <p:cNvPr id="9" name="TextBox 8"/>
-          <p:cNvSpPr txBox="1"/>
-          <p:nvPr/>
-        </p:nvSpPr>
-        <p:spPr>
-          <a:xfrm>
-            <a:off x="475488" y="1673352"/>
-            <a:ext cx="365760" cy="329184"/>
-          </a:xfrm>
-          <a:prstGeom prst="rect">
-            <a:avLst/>
-          </a:prstGeom>
-          <a:noFill/>
-        </p:spPr>
-        <p:txBody>
-          <a:bodyPr wrap="square">
-            <a:spAutoFit/>
-          </a:bodyPr>
-          <a:lstStyle/>
-          <a:p>
-            <a:pPr algn="ctr"/>
-            <a:r>
-              <a:rPr sz="1500" b="1" i="0">
-                <a:solidFill>
-                  <a:srgbClr val="FFFFFF"/>
-                </a:solidFill>
-              </a:rPr>
-              <a:t>1</a:t>
-            </a:r>
-          </a:p>
-        </p:txBody>
-      </p:sp>
-      <p:sp>
-        <p:nvSpPr>
-          <p:cNvPr id="10" name="TextBox 9"/>
-          <p:cNvSpPr txBox="1"/>
-          <p:nvPr/>
-        </p:nvSpPr>
-        <p:spPr>
-          <a:xfrm>
-            <a:off x="969264" y="1655064"/>
-            <a:ext cx="10680192" cy="594360"/>
-          </a:xfrm>
-          <a:prstGeom prst="rect">
-            <a:avLst/>
-          </a:prstGeom>
-          <a:noFill/>
-        </p:spPr>
-        <p:txBody>
-          <a:bodyPr wrap="square">
-            <a:spAutoFit/>
-          </a:bodyPr>
-          <a:lstStyle/>
-          <a:p>
-            <a:pPr algn="l"/>
-            <a:r>
-              <a:rPr sz="1800" b="0" i="0">
+            <a:pPr>
+              <a:spcBef>
+                <a:spcPts val="600"/>
+              </a:spcBef>
+            </a:pPr>
+            <a:r>
+              <a:rPr sz="1800">
                 <a:solidFill>
                   <a:srgbClr val="191919"/>
                 </a:solidFill>
-              </a:rPr>
-              <a:t>In ATLAS → Cohort Definitions → New Cohort Definition</a:t>
-            </a:r>
-          </a:p>
-        </p:txBody>
-      </p:sp>
-      <p:sp>
-        <p:nvSpPr>
-          <p:cNvPr id="11" name="Rectangle 10"/>
-          <p:cNvSpPr/>
-          <p:nvPr/>
-        </p:nvSpPr>
-        <p:spPr>
-          <a:xfrm>
-            <a:off x="475488" y="2368296"/>
-            <a:ext cx="365760" cy="365760"/>
-          </a:xfrm>
-          <a:prstGeom prst="rect">
-            <a:avLst/>
-          </a:prstGeom>
-          <a:solidFill>
-            <a:srgbClr val="008278"/>
-          </a:solidFill>
-          <a:ln>
-            <a:noFill/>
-          </a:ln>
-        </p:spPr>
-        <p:style>
-          <a:lnRef idx="1">
-            <a:schemeClr val="accent1"/>
-          </a:lnRef>
-          <a:fillRef idx="3">
-            <a:schemeClr val="accent1"/>
-          </a:fillRef>
-          <a:effectRef idx="2">
-            <a:schemeClr val="accent1"/>
-          </a:effectRef>
-          <a:fontRef idx="minor">
-            <a:schemeClr val="lt1"/>
-          </a:fontRef>
-        </p:style>
-        <p:txBody>
-          <a:bodyPr rtlCol="0" anchor="ctr"/>
-          <a:lstStyle/>
-          <a:p>
-            <a:pPr algn="ctr"/>
-          </a:p>
-        </p:txBody>
-      </p:sp>
-      <p:sp>
-        <p:nvSpPr>
-          <p:cNvPr id="12" name="TextBox 11"/>
-          <p:cNvSpPr txBox="1"/>
-          <p:nvPr/>
-        </p:nvSpPr>
-        <p:spPr>
-          <a:xfrm>
-            <a:off x="475488" y="2386584"/>
-            <a:ext cx="365760" cy="329184"/>
-          </a:xfrm>
-          <a:prstGeom prst="rect">
-            <a:avLst/>
-          </a:prstGeom>
-          <a:noFill/>
-        </p:spPr>
-        <p:txBody>
-          <a:bodyPr wrap="square">
-            <a:spAutoFit/>
-          </a:bodyPr>
-          <a:lstStyle/>
-          <a:p>
-            <a:pPr algn="ctr"/>
-            <a:r>
-              <a:rPr sz="1500" b="1" i="0">
-                <a:solidFill>
-                  <a:srgbClr val="FFFFFF"/>
-                </a:solidFill>
-              </a:rPr>
-              <a:t>2</a:t>
-            </a:r>
-          </a:p>
-        </p:txBody>
-      </p:sp>
-      <p:sp>
-        <p:nvSpPr>
-          <p:cNvPr id="13" name="TextBox 12"/>
-          <p:cNvSpPr txBox="1"/>
-          <p:nvPr/>
-        </p:nvSpPr>
-        <p:spPr>
-          <a:xfrm>
-            <a:off x="969264" y="2368296"/>
-            <a:ext cx="10680192" cy="594360"/>
-          </a:xfrm>
-          <a:prstGeom prst="rect">
-            <a:avLst/>
-          </a:prstGeom>
-          <a:noFill/>
-        </p:spPr>
-        <p:txBody>
-          <a:bodyPr wrap="square">
-            <a:spAutoFit/>
-          </a:bodyPr>
-          <a:lstStyle/>
-          <a:p>
-            <a:pPr algn="l"/>
-            <a:r>
-              <a:rPr sz="1800" b="0" i="0">
+                <a:latin typeface="Arial"/>
+              </a:rPr>
+              <a:t>The event that qualifies a person to enter the cohort</a:t>
+            </a:r>
+          </a:p>
+          <a:p>
+            <a:pPr>
+              <a:spcBef>
+                <a:spcPts val="600"/>
+              </a:spcBef>
+            </a:pPr>
+            <a:r>
+              <a:rPr sz="1800">
                 <a:solidFill>
                   <a:srgbClr val="191919"/>
                 </a:solidFill>
-              </a:rPr>
-              <a:t>Entry event: Drug Exposure · concept set = Metformin (from Day 2) · restrict to FIRST event</a:t>
-            </a:r>
-          </a:p>
-        </p:txBody>
-      </p:sp>
-      <p:sp>
-        <p:nvSpPr>
-          <p:cNvPr id="14" name="Rectangle 13"/>
-          <p:cNvSpPr/>
-          <p:nvPr/>
-        </p:nvSpPr>
-        <p:spPr>
-          <a:xfrm>
-            <a:off x="475488" y="3081528"/>
-            <a:ext cx="365760" cy="365760"/>
-          </a:xfrm>
-          <a:prstGeom prst="rect">
-            <a:avLst/>
-          </a:prstGeom>
-          <a:solidFill>
-            <a:srgbClr val="008278"/>
-          </a:solidFill>
-          <a:ln>
-            <a:noFill/>
-          </a:ln>
-        </p:spPr>
-        <p:style>
-          <a:lnRef idx="1">
-            <a:schemeClr val="accent1"/>
-          </a:lnRef>
-          <a:fillRef idx="3">
-            <a:schemeClr val="accent1"/>
-          </a:fillRef>
-          <a:effectRef idx="2">
-            <a:schemeClr val="accent1"/>
-          </a:effectRef>
-          <a:fontRef idx="minor">
-            <a:schemeClr val="lt1"/>
-          </a:fontRef>
-        </p:style>
-        <p:txBody>
-          <a:bodyPr rtlCol="0" anchor="ctr"/>
-          <a:lstStyle/>
-          <a:p>
-            <a:pPr algn="ctr"/>
-          </a:p>
-        </p:txBody>
-      </p:sp>
-      <p:sp>
-        <p:nvSpPr>
-          <p:cNvPr id="15" name="TextBox 14"/>
-          <p:cNvSpPr txBox="1"/>
-          <p:nvPr/>
-        </p:nvSpPr>
-        <p:spPr>
-          <a:xfrm>
-            <a:off x="475488" y="3099816"/>
-            <a:ext cx="365760" cy="329184"/>
-          </a:xfrm>
-          <a:prstGeom prst="rect">
-            <a:avLst/>
-          </a:prstGeom>
-          <a:noFill/>
-        </p:spPr>
-        <p:txBody>
-          <a:bodyPr wrap="square">
-            <a:spAutoFit/>
-          </a:bodyPr>
-          <a:lstStyle/>
-          <a:p>
-            <a:pPr algn="ctr"/>
-            <a:r>
-              <a:rPr sz="1500" b="1" i="0">
-                <a:solidFill>
-                  <a:srgbClr val="FFFFFF"/>
-                </a:solidFill>
-              </a:rPr>
-              <a:t>3</a:t>
-            </a:r>
-          </a:p>
-        </p:txBody>
-      </p:sp>
-      <p:sp>
-        <p:nvSpPr>
-          <p:cNvPr id="16" name="TextBox 15"/>
-          <p:cNvSpPr txBox="1"/>
-          <p:nvPr/>
-        </p:nvSpPr>
-        <p:spPr>
-          <a:xfrm>
-            <a:off x="969264" y="3081528"/>
-            <a:ext cx="10680192" cy="594360"/>
-          </a:xfrm>
-          <a:prstGeom prst="rect">
-            <a:avLst/>
-          </a:prstGeom>
-          <a:noFill/>
-        </p:spPr>
-        <p:txBody>
-          <a:bodyPr wrap="square">
-            <a:spAutoFit/>
-          </a:bodyPr>
-          <a:lstStyle/>
-          <a:p>
-            <a:pPr algn="l"/>
-            <a:r>
-              <a:rPr sz="1800" b="0" i="0">
+                <a:latin typeface="Arial"/>
+              </a:rPr>
+              <a:t>Examples: first drug exposure to metformin · first ALS diagnosis · first inpatient hospitalization</a:t>
+            </a:r>
+          </a:p>
+          <a:p>
+            <a:pPr>
+              <a:spcBef>
+                <a:spcPts val="600"/>
+              </a:spcBef>
+            </a:pPr>
+            <a:r>
+              <a:rPr sz="1800">
                 <a:solidFill>
                   <a:srgbClr val="191919"/>
                 </a:solidFill>
-              </a:rPr>
-              <a:t>Inclusion Rule 1: 'At least 365 days of prior continuous observation' (observation period ≥ 365 days before index)</a:t>
-            </a:r>
-          </a:p>
-        </p:txBody>
-      </p:sp>
-      <p:sp>
-        <p:nvSpPr>
-          <p:cNvPr id="17" name="Rectangle 16"/>
-          <p:cNvSpPr/>
-          <p:nvPr/>
-        </p:nvSpPr>
-        <p:spPr>
-          <a:xfrm>
-            <a:off x="475488" y="3794760"/>
-            <a:ext cx="365760" cy="365760"/>
-          </a:xfrm>
-          <a:prstGeom prst="rect">
-            <a:avLst/>
-          </a:prstGeom>
-          <a:solidFill>
-            <a:srgbClr val="008278"/>
-          </a:solidFill>
-          <a:ln>
-            <a:noFill/>
-          </a:ln>
-        </p:spPr>
-        <p:style>
-          <a:lnRef idx="1">
-            <a:schemeClr val="accent1"/>
-          </a:lnRef>
-          <a:fillRef idx="3">
-            <a:schemeClr val="accent1"/>
-          </a:fillRef>
-          <a:effectRef idx="2">
-            <a:schemeClr val="accent1"/>
-          </a:effectRef>
-          <a:fontRef idx="minor">
-            <a:schemeClr val="lt1"/>
-          </a:fontRef>
-        </p:style>
-        <p:txBody>
-          <a:bodyPr rtlCol="0" anchor="ctr"/>
-          <a:lstStyle/>
-          <a:p>
-            <a:pPr algn="ctr"/>
-          </a:p>
-        </p:txBody>
-      </p:sp>
-      <p:sp>
-        <p:nvSpPr>
-          <p:cNvPr id="18" name="TextBox 17"/>
-          <p:cNvSpPr txBox="1"/>
-          <p:nvPr/>
-        </p:nvSpPr>
-        <p:spPr>
-          <a:xfrm>
-            <a:off x="475488" y="3813048"/>
-            <a:ext cx="365760" cy="329184"/>
-          </a:xfrm>
-          <a:prstGeom prst="rect">
-            <a:avLst/>
-          </a:prstGeom>
-          <a:noFill/>
-        </p:spPr>
-        <p:txBody>
-          <a:bodyPr wrap="square">
-            <a:spAutoFit/>
-          </a:bodyPr>
-          <a:lstStyle/>
-          <a:p>
-            <a:pPr algn="ctr"/>
-            <a:r>
-              <a:rPr sz="1500" b="1" i="0">
-                <a:solidFill>
-                  <a:srgbClr val="FFFFFF"/>
-                </a:solidFill>
-              </a:rPr>
-              <a:t>4</a:t>
-            </a:r>
-          </a:p>
-        </p:txBody>
-      </p:sp>
-      <p:sp>
-        <p:nvSpPr>
-          <p:cNvPr id="19" name="TextBox 18"/>
-          <p:cNvSpPr txBox="1"/>
-          <p:nvPr/>
-        </p:nvSpPr>
-        <p:spPr>
-          <a:xfrm>
-            <a:off x="969264" y="3794760"/>
-            <a:ext cx="10680192" cy="594360"/>
-          </a:xfrm>
-          <a:prstGeom prst="rect">
-            <a:avLst/>
-          </a:prstGeom>
-          <a:noFill/>
-        </p:spPr>
-        <p:txBody>
-          <a:bodyPr wrap="square">
-            <a:spAutoFit/>
-          </a:bodyPr>
-          <a:lstStyle/>
-          <a:p>
-            <a:pPr algn="l"/>
-            <a:r>
-              <a:rPr sz="1800" b="0" i="0">
+                <a:latin typeface="Arial"/>
+              </a:rPr>
+              <a:t>Built on a concept set — the concept set defines WHAT the event is</a:t>
+            </a:r>
+          </a:p>
+          <a:p>
+            <a:pPr>
+              <a:spcBef>
+                <a:spcPts val="600"/>
+              </a:spcBef>
+            </a:pPr>
+            <a:r>
+              <a:rPr sz="1800">
                 <a:solidFill>
                   <a:srgbClr val="191919"/>
                 </a:solidFill>
-              </a:rPr>
-              <a:t>Inclusion Rule 2: 'No prior sulfonylurea' (drug exposure count = 0 in 365 days prior) — ATLAS UI exclusion</a:t>
-            </a:r>
-          </a:p>
-        </p:txBody>
-      </p:sp>
-      <p:sp>
-        <p:nvSpPr>
-          <p:cNvPr id="20" name="Rectangle 19"/>
-          <p:cNvSpPr/>
-          <p:nvPr/>
-        </p:nvSpPr>
-        <p:spPr>
-          <a:xfrm>
-            <a:off x="475488" y="4507992"/>
-            <a:ext cx="365760" cy="365760"/>
-          </a:xfrm>
-          <a:prstGeom prst="rect">
-            <a:avLst/>
-          </a:prstGeom>
-          <a:solidFill>
-            <a:srgbClr val="008278"/>
-          </a:solidFill>
-          <a:ln>
-            <a:noFill/>
-          </a:ln>
-        </p:spPr>
-        <p:style>
-          <a:lnRef idx="1">
-            <a:schemeClr val="accent1"/>
-          </a:lnRef>
-          <a:fillRef idx="3">
-            <a:schemeClr val="accent1"/>
-          </a:fillRef>
-          <a:effectRef idx="2">
-            <a:schemeClr val="accent1"/>
-          </a:effectRef>
-          <a:fontRef idx="minor">
-            <a:schemeClr val="lt1"/>
-          </a:fontRef>
-        </p:style>
-        <p:txBody>
-          <a:bodyPr rtlCol="0" anchor="ctr"/>
-          <a:lstStyle/>
-          <a:p>
-            <a:pPr algn="ctr"/>
-          </a:p>
-        </p:txBody>
-      </p:sp>
-      <p:sp>
-        <p:nvSpPr>
-          <p:cNvPr id="21" name="TextBox 20"/>
-          <p:cNvSpPr txBox="1"/>
-          <p:nvPr/>
-        </p:nvSpPr>
-        <p:spPr>
-          <a:xfrm>
-            <a:off x="475488" y="4526280"/>
-            <a:ext cx="365760" cy="329184"/>
-          </a:xfrm>
-          <a:prstGeom prst="rect">
-            <a:avLst/>
-          </a:prstGeom>
-          <a:noFill/>
-        </p:spPr>
-        <p:txBody>
-          <a:bodyPr wrap="square">
-            <a:spAutoFit/>
-          </a:bodyPr>
-          <a:lstStyle/>
-          <a:p>
-            <a:pPr algn="ctr"/>
-            <a:r>
-              <a:rPr sz="1500" b="1" i="0">
-                <a:solidFill>
-                  <a:srgbClr val="FFFFFF"/>
-                </a:solidFill>
-              </a:rPr>
-              <a:t>5</a:t>
-            </a:r>
-          </a:p>
-        </p:txBody>
-      </p:sp>
-      <p:sp>
-        <p:nvSpPr>
-          <p:cNvPr id="22" name="TextBox 21"/>
-          <p:cNvSpPr txBox="1"/>
-          <p:nvPr/>
-        </p:nvSpPr>
-        <p:spPr>
-          <a:xfrm>
-            <a:off x="969264" y="4507992"/>
-            <a:ext cx="10680192" cy="594360"/>
-          </a:xfrm>
-          <a:prstGeom prst="rect">
-            <a:avLst/>
-          </a:prstGeom>
-          <a:noFill/>
-        </p:spPr>
-        <p:txBody>
-          <a:bodyPr wrap="square">
-            <a:spAutoFit/>
-          </a:bodyPr>
-          <a:lstStyle/>
-          <a:p>
-            <a:pPr algn="l"/>
-            <a:r>
-              <a:rPr sz="1800" b="0" i="0">
+                <a:latin typeface="Arial"/>
+              </a:rPr>
+              <a:t>Usually restricted to the FIRST qualifying event per person (new-user design)</a:t>
+            </a:r>
+          </a:p>
+          <a:p>
+            <a:pPr>
+              <a:spcBef>
+                <a:spcPts val="600"/>
+              </a:spcBef>
+            </a:pPr>
+            <a:r>
+              <a:rPr sz="1800">
                 <a:solidFill>
                   <a:srgbClr val="191919"/>
                 </a:solidFill>
-              </a:rPr>
-              <a:t>Cohort exit: End of continuous drug exposure + 30-day gap</a:t>
-            </a:r>
-          </a:p>
-        </p:txBody>
-      </p:sp>
-      <p:sp>
-        <p:nvSpPr>
-          <p:cNvPr id="23" name="Rectangle 22"/>
-          <p:cNvSpPr/>
-          <p:nvPr/>
-        </p:nvSpPr>
-        <p:spPr>
-          <a:xfrm>
-            <a:off x="475488" y="5221224"/>
-            <a:ext cx="365760" cy="365760"/>
-          </a:xfrm>
-          <a:prstGeom prst="rect">
-            <a:avLst/>
-          </a:prstGeom>
-          <a:solidFill>
-            <a:srgbClr val="008278"/>
-          </a:solidFill>
-          <a:ln>
-            <a:noFill/>
-          </a:ln>
-        </p:spPr>
-        <p:style>
-          <a:lnRef idx="1">
-            <a:schemeClr val="accent1"/>
-          </a:lnRef>
-          <a:fillRef idx="3">
-            <a:schemeClr val="accent1"/>
-          </a:fillRef>
-          <a:effectRef idx="2">
-            <a:schemeClr val="accent1"/>
-          </a:effectRef>
-          <a:fontRef idx="minor">
-            <a:schemeClr val="lt1"/>
-          </a:fontRef>
-        </p:style>
-        <p:txBody>
-          <a:bodyPr rtlCol="0" anchor="ctr"/>
-          <a:lstStyle/>
-          <a:p>
-            <a:pPr algn="ctr"/>
-          </a:p>
-        </p:txBody>
-      </p:sp>
-      <p:sp>
-        <p:nvSpPr>
-          <p:cNvPr id="24" name="TextBox 23"/>
-          <p:cNvSpPr txBox="1"/>
-          <p:nvPr/>
-        </p:nvSpPr>
-        <p:spPr>
-          <a:xfrm>
-            <a:off x="475488" y="5239512"/>
-            <a:ext cx="365760" cy="329184"/>
-          </a:xfrm>
-          <a:prstGeom prst="rect">
-            <a:avLst/>
-          </a:prstGeom>
-          <a:noFill/>
-        </p:spPr>
-        <p:txBody>
-          <a:bodyPr wrap="square">
-            <a:spAutoFit/>
-          </a:bodyPr>
-          <a:lstStyle/>
-          <a:p>
-            <a:pPr algn="ctr"/>
-            <a:r>
-              <a:rPr sz="1500" b="1" i="0">
-                <a:solidFill>
-                  <a:srgbClr val="FFFFFF"/>
-                </a:solidFill>
-              </a:rPr>
-              <a:t>6</a:t>
-            </a:r>
-          </a:p>
-        </p:txBody>
-      </p:sp>
-      <p:sp>
-        <p:nvSpPr>
-          <p:cNvPr id="25" name="TextBox 24"/>
-          <p:cNvSpPr txBox="1"/>
-          <p:nvPr/>
-        </p:nvSpPr>
-        <p:spPr>
-          <a:xfrm>
-            <a:off x="969264" y="5221224"/>
-            <a:ext cx="10680192" cy="594360"/>
-          </a:xfrm>
-          <a:prstGeom prst="rect">
-            <a:avLst/>
-          </a:prstGeom>
-          <a:noFill/>
-        </p:spPr>
-        <p:txBody>
-          <a:bodyPr wrap="square">
-            <a:spAutoFit/>
-          </a:bodyPr>
-          <a:lstStyle/>
-          <a:p>
-            <a:pPr algn="l"/>
-            <a:r>
-              <a:rPr sz="1800" b="0" i="0">
+                <a:latin typeface="Arial"/>
+              </a:rPr>
+              <a:t>Time constraint: the entry event defines 'index date' — the temporal anchor for all inclusion rules</a:t>
+            </a:r>
+          </a:p>
+          <a:p>
+            <a:pPr>
+              <a:spcBef>
+                <a:spcPts val="600"/>
+              </a:spcBef>
+            </a:pPr>
+            <a:r>
+              <a:rPr sz="1800">
                 <a:solidFill>
                   <a:srgbClr val="191919"/>
                 </a:solidFill>
-              </a:rPr>
-              <a:t>Save → Generate → wait for completion → open the Attrition report</a:t>
+                <a:latin typeface="Arial"/>
+              </a:rPr>
+              <a:t>The entry event is the only event where a person can enter — if there are multiple, Atlas picks the first (if you specify that)</a:t>
+            </a:r>
+          </a:p>
+          <a:p>
+            <a:pPr>
+              <a:spcBef>
+                <a:spcPts val="600"/>
+              </a:spcBef>
+            </a:pPr>
+            <a:r>
+              <a:rPr sz="1800">
+                <a:solidFill>
+                  <a:srgbClr val="191919"/>
+                </a:solidFill>
+                <a:latin typeface="Arial"/>
+              </a:rPr>
+              <a:t>Entry event domain: Drug Exposure · Condition Occurrence · Measurement · Visit Occurrence · etc.</a:t>
             </a:r>
           </a:p>
         </p:txBody>
@@ -5427,7 +4750,7 @@
             <a:avLst/>
           </a:prstGeom>
           <a:solidFill>
-            <a:srgbClr val="4B2682"/>
+            <a:srgbClr val="20425A"/>
           </a:solidFill>
           <a:ln>
             <a:noFill/>
@@ -5463,14 +4786,14 @@
         </p:nvSpPr>
         <p:spPr>
           <a:xfrm>
-            <a:off x="0" y="923544"/>
-            <a:ext cx="12188952" cy="36576"/>
+            <a:off x="0" y="905256"/>
+            <a:ext cx="12188952" cy="54864"/>
           </a:xfrm>
           <a:prstGeom prst="rect">
             <a:avLst/>
           </a:prstGeom>
           <a:solidFill>
-            <a:srgbClr val="7B4FA8"/>
+            <a:srgbClr val="904199"/>
           </a:solidFill>
           <a:ln>
             <a:noFill/>
@@ -5526,8 +4849,9 @@
                 <a:solidFill>
                   <a:srgbClr val="FFFFFF"/>
                 </a:solidFill>
-              </a:rPr>
-              <a:t>Reading the Attrition Report</a:t>
+                <a:latin typeface="Gotham Narrow"/>
+              </a:rPr>
+              <a:t>Part 2: Concept Sets — The Day 2 Building Block</a:t>
             </a:r>
           </a:p>
         </p:txBody>
@@ -5564,8 +4888,9 @@
                 <a:solidFill>
                   <a:srgbClr val="191919"/>
                 </a:solidFill>
-              </a:rPr>
-              <a:t>The attrition report shows the count at each step of the cohort building process</a:t>
+                <a:latin typeface="Arial"/>
+              </a:rPr>
+              <a:t>Every cohort entry event and inclusion rule is built on a concept set</a:t>
             </a:r>
           </a:p>
           <a:p>
@@ -5579,8 +4904,9 @@
                 <a:solidFill>
                   <a:srgbClr val="191919"/>
                 </a:solidFill>
-              </a:rPr>
-              <a:t>Row 0: total persons meeting the entry event (ALL qualifying events, before inclusion criteria)</a:t>
+                <a:latin typeface="Arial"/>
+              </a:rPr>
+              <a:t>The concept set defines 'what counts' as the clinical event</a:t>
             </a:r>
           </a:p>
           <a:p>
@@ -5594,8 +4920,9 @@
                 <a:solidFill>
                   <a:srgbClr val="191919"/>
                 </a:solidFill>
-              </a:rPr>
-              <a:t>Row 1: after applying Inclusion Rule 1 — how many remain?</a:t>
+                <a:latin typeface="Arial"/>
+              </a:rPr>
+              <a:t>Best practice: build and validate concept sets (Day 2) BEFORE building cohorts (Day 3)</a:t>
             </a:r>
           </a:p>
           <a:p>
@@ -5609,8 +4936,9 @@
                 <a:solidFill>
                   <a:srgbClr val="191919"/>
                 </a:solidFill>
-              </a:rPr>
-              <a:t>Row 2: after applying Inclusion Rule 2 — how many remain?</a:t>
+                <a:latin typeface="Arial"/>
+              </a:rPr>
+              <a:t>You can reuse the same concept set across multiple cohorts — this ensures consistency</a:t>
             </a:r>
           </a:p>
           <a:p>
@@ -5624,8 +4952,9 @@
                 <a:solidFill>
                   <a:srgbClr val="191919"/>
                 </a:solidFill>
-              </a:rPr>
-              <a:t>Final row: the cohort size</a:t>
+                <a:latin typeface="Arial"/>
+              </a:rPr>
+              <a:t>Common mistake: modifying a concept set that is already used in a generated cohort — regenerate after any change</a:t>
             </a:r>
           </a:p>
           <a:p>
@@ -5639,68 +4968,9 @@
                 <a:solidFill>
                   <a:srgbClr val="191919"/>
                 </a:solidFill>
-              </a:rPr>
-              <a:t>What the attrition report teaches you:</a:t>
-            </a:r>
-          </a:p>
-          <a:p>
-            <a:pPr lvl="1">
-              <a:spcBef>
-                <a:spcPts val="300"/>
-              </a:spcBef>
-            </a:pPr>
-            <a:r>
-              <a:rPr sz="1600">
-                <a:solidFill>
-                  <a:srgbClr val="191919"/>
-                </a:solidFill>
-              </a:rPr>
-              <a:t>A rule that removes almost everyone → probably too strict (temporal window too long?)</a:t>
-            </a:r>
-          </a:p>
-          <a:p>
-            <a:pPr lvl="1">
-              <a:spcBef>
-                <a:spcPts val="300"/>
-              </a:spcBef>
-            </a:pPr>
-            <a:r>
-              <a:rPr sz="1600">
-                <a:solidFill>
-                  <a:srgbClr val="191919"/>
-                </a:solidFill>
-              </a:rPr>
-              <a:t>A rule that removes almost no one → probably not functioning as intended</a:t>
-            </a:r>
-          </a:p>
-          <a:p>
-            <a:pPr lvl="1">
-              <a:spcBef>
-                <a:spcPts val="300"/>
-              </a:spcBef>
-            </a:pPr>
-            <a:r>
-              <a:rPr sz="1600">
-                <a:solidFill>
-                  <a:srgbClr val="191919"/>
-                </a:solidFill>
-              </a:rPr>
-              <a:t>A rule that removes exactly 0 → may have a logic error — investigate</a:t>
-            </a:r>
-          </a:p>
-          <a:p>
-            <a:pPr>
-              <a:spcBef>
-                <a:spcPts val="600"/>
-              </a:spcBef>
-            </a:pPr>
-            <a:r>
-              <a:rPr sz="1800">
-                <a:solidFill>
-                  <a:srgbClr val="191919"/>
-                </a:solidFill>
-              </a:rPr>
-              <a:t>The attrition report is the single most useful diagnostic for cohort validation</a:t>
+                <a:latin typeface="Arial"/>
+              </a:rPr>
+              <a:t>Export concept sets as JSON alongside your cohort definition JSON for version control</a:t>
             </a:r>
           </a:p>
         </p:txBody>
@@ -5738,7 +5008,7 @@
             <a:avLst/>
           </a:prstGeom>
           <a:solidFill>
-            <a:srgbClr val="4B2682"/>
+            <a:srgbClr val="20425A"/>
           </a:solidFill>
           <a:ln>
             <a:noFill/>
@@ -5774,14 +5044,14 @@
         </p:nvSpPr>
         <p:spPr>
           <a:xfrm>
-            <a:off x="0" y="923544"/>
-            <a:ext cx="12188952" cy="36576"/>
+            <a:off x="0" y="905256"/>
+            <a:ext cx="12188952" cy="54864"/>
           </a:xfrm>
           <a:prstGeom prst="rect">
             <a:avLst/>
           </a:prstGeom>
           <a:solidFill>
-            <a:srgbClr val="7B4FA8"/>
+            <a:srgbClr val="904199"/>
           </a:solidFill>
           <a:ln>
             <a:noFill/>
@@ -5837,8 +5107,9 @@
                 <a:solidFill>
                   <a:srgbClr val="FFFFFF"/>
                 </a:solidFill>
-              </a:rPr>
-              <a:t>Cohort Characterization — Sanity-Check Who You Captured</a:t>
+                <a:latin typeface="Gotham Narrow"/>
+              </a:rPr>
+              <a:t>Part 3: Inclusion Criteria</a:t>
             </a:r>
           </a:p>
         </p:txBody>
@@ -5875,8 +5146,9 @@
                 <a:solidFill>
                   <a:srgbClr val="191919"/>
                 </a:solidFill>
-              </a:rPr>
-              <a:t>After generating a cohort, characterization summarizes WHO is in it</a:t>
+                <a:latin typeface="Arial"/>
+              </a:rPr>
+              <a:t>Additional conditions applied to the entry events</a:t>
             </a:r>
           </a:p>
           <a:p>
@@ -5890,8 +5162,9 @@
                 <a:solidFill>
                   <a:srgbClr val="191919"/>
                 </a:solidFill>
-              </a:rPr>
-              <a:t>Characterization outputs: demographics · prior conditions · prior drugs · procedures</a:t>
+                <a:latin typeface="Arial"/>
+              </a:rPr>
+              <a:t>Each criterion is a named, testable rule with a temporal window</a:t>
             </a:r>
           </a:p>
           <a:p>
@@ -5905,8 +5178,73 @@
                 <a:solidFill>
                   <a:srgbClr val="191919"/>
                 </a:solidFill>
-              </a:rPr>
-              <a:t>Run in ATLAS: Characterization tab on your cohort definition, or via a separate Analysis</a:t>
+                <a:latin typeface="Arial"/>
+              </a:rPr>
+              <a:t>Examples:</a:t>
+            </a:r>
+          </a:p>
+          <a:p>
+            <a:pPr lvl="1">
+              <a:spcBef>
+                <a:spcPts val="300"/>
+              </a:spcBef>
+            </a:pPr>
+            <a:r>
+              <a:rPr sz="1600">
+                <a:solidFill>
+                  <a:srgbClr val="191919"/>
+                </a:solidFill>
+                <a:latin typeface="Arial"/>
+              </a:rPr>
+              <a:t>'At least 365 days of continuous prior observation before index'</a:t>
+            </a:r>
+          </a:p>
+          <a:p>
+            <a:pPr lvl="1">
+              <a:spcBef>
+                <a:spcPts val="300"/>
+              </a:spcBef>
+            </a:pPr>
+            <a:r>
+              <a:rPr sz="1600">
+                <a:solidFill>
+                  <a:srgbClr val="191919"/>
+                </a:solidFill>
+                <a:latin typeface="Arial"/>
+              </a:rPr>
+              <a:t>'No prior insulin exposure in the 365 days before index'</a:t>
+            </a:r>
+          </a:p>
+          <a:p>
+            <a:pPr lvl="1">
+              <a:spcBef>
+                <a:spcPts val="300"/>
+              </a:spcBef>
+            </a:pPr>
+            <a:r>
+              <a:rPr sz="1600">
+                <a:solidFill>
+                  <a:srgbClr val="191919"/>
+                </a:solidFill>
+                <a:latin typeface="Arial"/>
+              </a:rPr>
+              <a:t>'Age ≥ 18 at index date'</a:t>
+            </a:r>
+          </a:p>
+          <a:p>
+            <a:pPr lvl="1">
+              <a:spcBef>
+                <a:spcPts val="300"/>
+              </a:spcBef>
+            </a:pPr>
+            <a:r>
+              <a:rPr sz="1600">
+                <a:solidFill>
+                  <a:srgbClr val="191919"/>
+                </a:solidFill>
+                <a:latin typeface="Arial"/>
+              </a:rPr>
+              <a:t>'At least one type 2 diabetes diagnosis in the 365 days before index'</a:t>
             </a:r>
           </a:p>
           <a:p>
@@ -5920,53 +5258,9 @@
                 <a:solidFill>
                   <a:srgbClr val="191919"/>
                 </a:solidFill>
-              </a:rPr>
-              <a:t>What to look for:</a:t>
-            </a:r>
-          </a:p>
-          <a:p>
-            <a:pPr lvl="1">
-              <a:spcBef>
-                <a:spcPts val="300"/>
-              </a:spcBef>
-            </a:pPr>
-            <a:r>
-              <a:rPr sz="1600">
-                <a:solidFill>
-                  <a:srgbClr val="191919"/>
-                </a:solidFill>
-              </a:rPr>
-              <a:t>Demographics: does the age/sex distribution match what you'd expect for new metformin users?</a:t>
-            </a:r>
-          </a:p>
-          <a:p>
-            <a:pPr lvl="1">
-              <a:spcBef>
-                <a:spcPts val="300"/>
-              </a:spcBef>
-            </a:pPr>
-            <a:r>
-              <a:rPr sz="1600">
-                <a:solidFill>
-                  <a:srgbClr val="191919"/>
-                </a:solidFill>
-              </a:rPr>
-              <a:t>Prior conditions: is type 2 diabetes the most common prior condition? (it should be)</a:t>
-            </a:r>
-          </a:p>
-          <a:p>
-            <a:pPr lvl="1">
-              <a:spcBef>
-                <a:spcPts val="300"/>
-              </a:spcBef>
-            </a:pPr>
-            <a:r>
-              <a:rPr sz="1600">
-                <a:solidFill>
-                  <a:srgbClr val="191919"/>
-                </a:solidFill>
-              </a:rPr>
-              <a:t>Prior drugs: are other antidiabetic drugs common at baseline? (depends on your design)</a:t>
+                <a:latin typeface="Arial"/>
+              </a:rPr>
+              <a:t>Exclusions are written as inclusions: 'no prior insulin' = 'count of prior insulin exposures = 0'</a:t>
             </a:r>
           </a:p>
           <a:p>
@@ -5980,8 +5274,25 @@
                 <a:solidFill>
                   <a:srgbClr val="191919"/>
                 </a:solidFill>
-              </a:rPr>
-              <a:t>Characterization is the first face-validity check — if the output looks wrong, revisit the definition</a:t>
+                <a:latin typeface="Arial"/>
+              </a:rPr>
+              <a:t>There is no separate exclusion list in ATLAS — exclusions are inclusion rules that must be false</a:t>
+            </a:r>
+          </a:p>
+          <a:p>
+            <a:pPr>
+              <a:spcBef>
+                <a:spcPts val="600"/>
+              </a:spcBef>
+            </a:pPr>
+            <a:r>
+              <a:rPr sz="1800">
+                <a:solidFill>
+                  <a:srgbClr val="191919"/>
+                </a:solidFill>
+                <a:latin typeface="Arial"/>
+              </a:rPr>
+              <a:t>Each rule removes a subset of the cohort → the attrition report shows how many each rule removed</a:t>
             </a:r>
           </a:p>
         </p:txBody>
@@ -6019,7 +5330,7 @@
             <a:avLst/>
           </a:prstGeom>
           <a:solidFill>
-            <a:srgbClr val="4B2682"/>
+            <a:srgbClr val="20425A"/>
           </a:solidFill>
           <a:ln>
             <a:noFill/>
@@ -6055,14 +5366,14 @@
         </p:nvSpPr>
         <p:spPr>
           <a:xfrm>
-            <a:off x="0" y="923544"/>
-            <a:ext cx="12188952" cy="36576"/>
+            <a:off x="0" y="905256"/>
+            <a:ext cx="12188952" cy="54864"/>
           </a:xfrm>
           <a:prstGeom prst="rect">
             <a:avLst/>
           </a:prstGeom>
           <a:solidFill>
-            <a:srgbClr val="7B4FA8"/>
+            <a:srgbClr val="904199"/>
           </a:solidFill>
           <a:ln>
             <a:noFill/>
@@ -6118,8 +5429,9 @@
                 <a:solidFill>
                   <a:srgbClr val="FFFFFF"/>
                 </a:solidFill>
-              </a:rPr>
-              <a:t>Exporting and Validating Cohort SQL</a:t>
+                <a:latin typeface="Gotham Narrow"/>
+              </a:rPr>
+              <a:t>Temporal Logic — The Most Common Source of Errors</a:t>
             </a:r>
           </a:p>
         </p:txBody>
@@ -6132,8 +5444,8 @@
         </p:nvSpPr>
         <p:spPr>
           <a:xfrm>
-            <a:off x="475488" y="1097280"/>
-            <a:ext cx="11237976" cy="411480"/>
+            <a:off x="475488" y="1161288"/>
+            <a:ext cx="11237976" cy="5495544"/>
           </a:xfrm>
           <a:prstGeom prst="rect">
             <a:avLst/>
@@ -6146,258 +5458,147 @@
           </a:bodyPr>
           <a:lstStyle/>
           <a:p>
-            <a:pPr algn="l"/>
-            <a:r>
-              <a:rPr sz="1600" b="0" i="1">
-                <a:solidFill>
-                  <a:srgbClr val="5A5A5A"/>
-                </a:solidFill>
-              </a:rPr>
-              <a:t>Export from ATLAS, then run a validation count in your SQL client:</a:t>
-            </a:r>
-          </a:p>
-        </p:txBody>
-      </p:sp>
-      <p:sp>
-        <p:nvSpPr>
-          <p:cNvPr id="6" name="Rectangle 5"/>
-          <p:cNvSpPr/>
-          <p:nvPr/>
-        </p:nvSpPr>
-        <p:spPr>
-          <a:xfrm>
-            <a:off x="475488" y="1527048"/>
-            <a:ext cx="11237976" cy="5074920"/>
-          </a:xfrm>
-          <a:prstGeom prst="rect">
-            <a:avLst/>
-          </a:prstGeom>
-          <a:solidFill>
-            <a:srgbClr val="1C1C2C"/>
-          </a:solidFill>
-          <a:ln w="9525">
-            <a:solidFill>
-              <a:srgbClr val="50506E"/>
-            </a:solidFill>
-          </a:ln>
-        </p:spPr>
-        <p:style>
-          <a:lnRef idx="1">
-            <a:schemeClr val="accent1"/>
-          </a:lnRef>
-          <a:fillRef idx="3">
-            <a:schemeClr val="accent1"/>
-          </a:fillRef>
-          <a:effectRef idx="2">
-            <a:schemeClr val="accent1"/>
-          </a:effectRef>
-          <a:fontRef idx="minor">
-            <a:schemeClr val="lt1"/>
-          </a:fontRef>
-        </p:style>
-        <p:txBody>
-          <a:bodyPr rtlCol="0" anchor="ctr"/>
-          <a:lstStyle/>
-          <a:p>
-            <a:pPr algn="ctr"/>
-          </a:p>
-        </p:txBody>
-      </p:sp>
-      <p:sp>
-        <p:nvSpPr>
-          <p:cNvPr id="7" name="TextBox 6"/>
-          <p:cNvSpPr txBox="1"/>
-          <p:nvPr/>
-        </p:nvSpPr>
-        <p:spPr>
-          <a:xfrm>
-            <a:off x="640080" y="1636776"/>
-            <a:ext cx="10908792" cy="4855464"/>
-          </a:xfrm>
-          <a:prstGeom prst="rect">
-            <a:avLst/>
-          </a:prstGeom>
-          <a:noFill/>
-        </p:spPr>
-        <p:txBody>
-          <a:bodyPr wrap="none">
-            <a:spAutoFit/>
-          </a:bodyPr>
-          <a:lstStyle/>
-          <a:p>
             <a:pPr>
               <a:spcBef>
-                <a:spcPts val="100"/>
+                <a:spcPts val="600"/>
               </a:spcBef>
             </a:pPr>
             <a:r>
-              <a:rPr sz="1300">
-                <a:solidFill>
-                  <a:srgbClr val="D7D7D7"/>
-                </a:solidFill>
-                <a:latin typeface="Courier New"/>
-              </a:rPr>
-              <a:t>-- Step 1: In ATLAS, click Export → SQL (choose your dialect)</a:t>
+              <a:rPr sz="1800">
+                <a:solidFill>
+                  <a:srgbClr val="191919"/>
+                </a:solidFill>
+                <a:latin typeface="Arial"/>
+              </a:rPr>
+              <a:t>Every inclusion rule has a time window relative to the index date (entry event)</a:t>
             </a:r>
           </a:p>
           <a:p>
             <a:pPr>
               <a:spcBef>
-                <a:spcPts val="100"/>
+                <a:spcPts val="600"/>
               </a:spcBef>
             </a:pPr>
             <a:r>
-              <a:rPr sz="1300">
-                <a:solidFill>
-                  <a:srgbClr val="D7D7D7"/>
-                </a:solidFill>
-                <a:latin typeface="Courier New"/>
-              </a:rPr>
-              <a:t>-- Save the SQL and run it in your client to generate the cohort table</a:t>
+              <a:rPr sz="1800">
+                <a:solidFill>
+                  <a:srgbClr val="191919"/>
+                </a:solidFill>
+                <a:latin typeface="Arial"/>
+              </a:rPr>
+              <a:t>Window options: BEFORE index · AFTER index · SURROUNDING index · ANY TIME</a:t>
             </a:r>
           </a:p>
           <a:p>
             <a:pPr>
               <a:spcBef>
-                <a:spcPts val="100"/>
+                <a:spcPts val="600"/>
               </a:spcBef>
             </a:pPr>
             <a:r>
-              <a:rPr sz="1300">
-                <a:solidFill>
-                  <a:srgbClr val="D7D7D7"/>
-                </a:solidFill>
-                <a:latin typeface="Courier New"/>
-              </a:rPr>
-              <a:t/>
+              <a:rPr sz="1800">
+                <a:solidFill>
+                  <a:srgbClr val="191919"/>
+                </a:solidFill>
+                <a:latin typeface="Arial"/>
+              </a:rPr>
+              <a:t>Examples of windows:</a:t>
+            </a:r>
+          </a:p>
+          <a:p>
+            <a:pPr lvl="1">
+              <a:spcBef>
+                <a:spcPts val="300"/>
+              </a:spcBef>
+            </a:pPr>
+            <a:r>
+              <a:rPr sz="1600">
+                <a:solidFill>
+                  <a:srgbClr val="191919"/>
+                </a:solidFill>
+                <a:latin typeface="Arial"/>
+              </a:rPr>
+              <a:t>365 days BEFORE index: look back one year from the entry event</a:t>
+            </a:r>
+          </a:p>
+          <a:p>
+            <a:pPr lvl="1">
+              <a:spcBef>
+                <a:spcPts val="300"/>
+              </a:spcBef>
+            </a:pPr>
+            <a:r>
+              <a:rPr sz="1600">
+                <a:solidFill>
+                  <a:srgbClr val="191919"/>
+                </a:solidFill>
+                <a:latin typeface="Arial"/>
+              </a:rPr>
+              <a:t>0–90 days AFTER index: look forward 3 months from the entry event</a:t>
+            </a:r>
+          </a:p>
+          <a:p>
+            <a:pPr lvl="1">
+              <a:spcBef>
+                <a:spcPts val="300"/>
+              </a:spcBef>
+            </a:pPr>
+            <a:r>
+              <a:rPr sz="1600">
+                <a:solidFill>
+                  <a:srgbClr val="191919"/>
+                </a:solidFill>
+                <a:latin typeface="Arial"/>
+              </a:rPr>
+              <a:t>'Any time prior': no lookback limit — captures entire patient history before entry</a:t>
             </a:r>
           </a:p>
           <a:p>
             <a:pPr>
               <a:spcBef>
-                <a:spcPts val="100"/>
+                <a:spcPts val="600"/>
               </a:spcBef>
             </a:pPr>
             <a:r>
-              <a:rPr sz="1300">
-                <a:solidFill>
-                  <a:srgbClr val="D7D7D7"/>
-                </a:solidFill>
-                <a:latin typeface="Courier New"/>
-              </a:rPr>
-              <a:t>-- Step 2: Validate the cohort count independently</a:t>
+              <a:rPr sz="1800">
+                <a:solidFill>
+                  <a:srgbClr val="191919"/>
+                </a:solidFill>
+                <a:latin typeface="Arial"/>
+              </a:rPr>
+              <a:t>The window defines what 'counts' as prior vs. subsequent exposure</a:t>
             </a:r>
           </a:p>
           <a:p>
             <a:pPr>
               <a:spcBef>
-                <a:spcPts val="100"/>
+                <a:spcPts val="600"/>
               </a:spcBef>
             </a:pPr>
             <a:r>
-              <a:rPr sz="1300">
-                <a:solidFill>
-                  <a:srgbClr val="D7D7D7"/>
-                </a:solidFill>
-                <a:latin typeface="Courier New"/>
-              </a:rPr>
-              <a:t>SELECT COUNT(DISTINCT subject_id) AS cohort_size</a:t>
+              <a:rPr sz="1800">
+                <a:solidFill>
+                  <a:srgbClr val="191919"/>
+                </a:solidFill>
+                <a:latin typeface="Arial"/>
+              </a:rPr>
+              <a:t>Wrong temporal logic is the most common cause of unexpectedly large or small cohorts</a:t>
             </a:r>
           </a:p>
           <a:p>
             <a:pPr>
               <a:spcBef>
-                <a:spcPts val="100"/>
+                <a:spcPts val="600"/>
               </a:spcBef>
             </a:pPr>
             <a:r>
-              <a:rPr sz="1300">
-                <a:solidFill>
-                  <a:srgbClr val="D7D7D7"/>
-                </a:solidFill>
-                <a:latin typeface="Courier New"/>
-              </a:rPr>
-              <a:t>FROM results.cohort</a:t>
-            </a:r>
-          </a:p>
-          <a:p>
-            <a:pPr>
-              <a:spcBef>
-                <a:spcPts val="100"/>
-              </a:spcBef>
-            </a:pPr>
-            <a:r>
-              <a:rPr sz="1300">
-                <a:solidFill>
-                  <a:srgbClr val="D7D7D7"/>
-                </a:solidFill>
-                <a:latin typeface="Courier New"/>
-              </a:rPr>
-              <a:t>WHERE cohort_definition_id = [your_cohort_id];</a:t>
-            </a:r>
-          </a:p>
-          <a:p>
-            <a:pPr>
-              <a:spcBef>
-                <a:spcPts val="100"/>
-              </a:spcBef>
-            </a:pPr>
-            <a:r>
-              <a:rPr sz="1300">
-                <a:solidFill>
-                  <a:srgbClr val="D7D7D7"/>
-                </a:solidFill>
-                <a:latin typeface="Courier New"/>
-              </a:rPr>
-              <a:t/>
-            </a:r>
-          </a:p>
-          <a:p>
-            <a:pPr>
-              <a:spcBef>
-                <a:spcPts val="100"/>
-              </a:spcBef>
-            </a:pPr>
-            <a:r>
-              <a:rPr sz="1300">
-                <a:solidFill>
-                  <a:srgbClr val="D7D7D7"/>
-                </a:solidFill>
-                <a:latin typeface="Courier New"/>
-              </a:rPr>
-              <a:t>-- Step 3: Compare to Atlas UI count</a:t>
-            </a:r>
-          </a:p>
-          <a:p>
-            <a:pPr>
-              <a:spcBef>
-                <a:spcPts val="100"/>
-              </a:spcBef>
-            </a:pPr>
-            <a:r>
-              <a:rPr sz="1300">
-                <a:solidFill>
-                  <a:srgbClr val="D7D7D7"/>
-                </a:solidFill>
-                <a:latin typeface="Courier New"/>
-              </a:rPr>
-              <a:t>-- If they match: your extraction path is trustworthy</a:t>
-            </a:r>
-          </a:p>
-          <a:p>
-            <a:pPr>
-              <a:spcBef>
-                <a:spcPts val="100"/>
-              </a:spcBef>
-            </a:pPr>
-            <a:r>
-              <a:rPr sz="1300">
-                <a:solidFill>
-                  <a:srgbClr val="D7D7D7"/>
-                </a:solidFill>
-                <a:latin typeface="Courier New"/>
-              </a:rPr>
-              <a:t>-- If they differ: check CDM version, results schema, vocabulary version</a:t>
+              <a:rPr sz="1800">
+                <a:solidFill>
+                  <a:srgbClr val="191919"/>
+                </a:solidFill>
+                <a:latin typeface="Arial"/>
+              </a:rPr>
+              <a:t>Always review the attrition report BEFORE using a cohort for analysis</a:t>
             </a:r>
           </a:p>
         </p:txBody>
@@ -6435,7 +5636,7 @@
             <a:avLst/>
           </a:prstGeom>
           <a:solidFill>
-            <a:srgbClr val="4B2682"/>
+            <a:srgbClr val="20425A"/>
           </a:solidFill>
           <a:ln>
             <a:noFill/>
@@ -6471,14 +5672,14 @@
         </p:nvSpPr>
         <p:spPr>
           <a:xfrm>
-            <a:off x="0" y="923544"/>
-            <a:ext cx="12188952" cy="36576"/>
+            <a:off x="0" y="905256"/>
+            <a:ext cx="12188952" cy="54864"/>
           </a:xfrm>
           <a:prstGeom prst="rect">
             <a:avLst/>
           </a:prstGeom>
           <a:solidFill>
-            <a:srgbClr val="7B4FA8"/>
+            <a:srgbClr val="904199"/>
           </a:solidFill>
           <a:ln>
             <a:noFill/>
@@ -6534,33 +5735,217 @@
                 <a:solidFill>
                   <a:srgbClr val="FFFFFF"/>
                 </a:solidFill>
-              </a:rPr>
-              <a:t>Key Takeaways</a:t>
-            </a:r>
-          </a:p>
-        </p:txBody>
-      </p:sp>
-      <p:sp>
-        <p:nvSpPr>
-          <p:cNvPr id="5" name="Rectangle 4"/>
+                <a:latin typeface="Gotham Narrow"/>
+              </a:rPr>
+              <a:t>Part 4: Cohort Exit</a:t>
+            </a:r>
+          </a:p>
+        </p:txBody>
+      </p:sp>
+      <p:sp>
+        <p:nvSpPr>
+          <p:cNvPr id="5" name="TextBox 4"/>
+          <p:cNvSpPr txBox="1"/>
+          <p:nvPr/>
+        </p:nvSpPr>
+        <p:spPr>
+          <a:xfrm>
+            <a:off x="475488" y="1161288"/>
+            <a:ext cx="11237976" cy="5495544"/>
+          </a:xfrm>
+          <a:prstGeom prst="rect">
+            <a:avLst/>
+          </a:prstGeom>
+          <a:noFill/>
+        </p:spPr>
+        <p:txBody>
+          <a:bodyPr wrap="square">
+            <a:spAutoFit/>
+          </a:bodyPr>
+          <a:lstStyle/>
+          <a:p>
+            <a:pPr>
+              <a:spcBef>
+                <a:spcPts val="600"/>
+              </a:spcBef>
+            </a:pPr>
+            <a:r>
+              <a:rPr sz="1800">
+                <a:solidFill>
+                  <a:srgbClr val="191919"/>
+                </a:solidFill>
+                <a:latin typeface="Arial"/>
+              </a:rPr>
+              <a:t>Defines when and how a person leaves the cohort</a:t>
+            </a:r>
+          </a:p>
+          <a:p>
+            <a:pPr>
+              <a:spcBef>
+                <a:spcPts val="600"/>
+              </a:spcBef>
+            </a:pPr>
+            <a:r>
+              <a:rPr sz="1800">
+                <a:solidFill>
+                  <a:srgbClr val="191919"/>
+                </a:solidFill>
+                <a:latin typeface="Arial"/>
+              </a:rPr>
+              <a:t>Common exit strategies:</a:t>
+            </a:r>
+          </a:p>
+          <a:p>
+            <a:pPr lvl="1">
+              <a:spcBef>
+                <a:spcPts val="300"/>
+              </a:spcBef>
+            </a:pPr>
+            <a:r>
+              <a:rPr sz="1600">
+                <a:solidFill>
+                  <a:srgbClr val="191919"/>
+                </a:solidFill>
+                <a:latin typeface="Arial"/>
+              </a:rPr>
+              <a:t>End of observation period: person stays in cohort until data ends — widest possible follow-up</a:t>
+            </a:r>
+          </a:p>
+          <a:p>
+            <a:pPr lvl="1">
+              <a:spcBef>
+                <a:spcPts val="300"/>
+              </a:spcBef>
+            </a:pPr>
+            <a:r>
+              <a:rPr sz="1600">
+                <a:solidFill>
+                  <a:srgbClr val="191919"/>
+                </a:solidFill>
+                <a:latin typeface="Arial"/>
+              </a:rPr>
+              <a:t>End of continuous drug exposure + gap: exits when drug fill lapses by &gt;N days — correct for drug era studies</a:t>
+            </a:r>
+          </a:p>
+          <a:p>
+            <a:pPr lvl="1">
+              <a:spcBef>
+                <a:spcPts val="300"/>
+              </a:spcBef>
+            </a:pPr>
+            <a:r>
+              <a:rPr sz="1600">
+                <a:solidFill>
+                  <a:srgbClr val="191919"/>
+                </a:solidFill>
+                <a:latin typeface="Arial"/>
+              </a:rPr>
+              <a:t>Fixed duration: exits N days after index — useful for fixed-horizon studies</a:t>
+            </a:r>
+          </a:p>
+          <a:p>
+            <a:pPr lvl="1">
+              <a:spcBef>
+                <a:spcPts val="300"/>
+              </a:spcBef>
+            </a:pPr>
+            <a:r>
+              <a:rPr sz="1600">
+                <a:solidFill>
+                  <a:srgbClr val="191919"/>
+                </a:solidFill>
+                <a:latin typeface="Arial"/>
+              </a:rPr>
+              <a:t>Event-based: exits when a specific event occurs (e.g., death, hospitalization)</a:t>
+            </a:r>
+          </a:p>
+          <a:p>
+            <a:pPr>
+              <a:spcBef>
+                <a:spcPts val="600"/>
+              </a:spcBef>
+            </a:pPr>
+            <a:r>
+              <a:rPr sz="1800">
+                <a:solidFill>
+                  <a:srgbClr val="191919"/>
+                </a:solidFill>
+                <a:latin typeface="Arial"/>
+              </a:rPr>
+              <a:t>Exit strategy dramatically affects cohort size and follow-up time</a:t>
+            </a:r>
+          </a:p>
+          <a:p>
+            <a:pPr>
+              <a:spcBef>
+                <a:spcPts val="600"/>
+              </a:spcBef>
+            </a:pPr>
+            <a:r>
+              <a:rPr sz="1800">
+                <a:solidFill>
+                  <a:srgbClr val="191919"/>
+                </a:solidFill>
+                <a:latin typeface="Arial"/>
+              </a:rPr>
+              <a:t>New-user cohorts typically use: end of continuous exposure OR end of observation period</a:t>
+            </a:r>
+          </a:p>
+          <a:p>
+            <a:pPr>
+              <a:spcBef>
+                <a:spcPts val="600"/>
+              </a:spcBef>
+            </a:pPr>
+            <a:r>
+              <a:rPr sz="1800">
+                <a:solidFill>
+                  <a:srgbClr val="191919"/>
+                </a:solidFill>
+                <a:latin typeface="Arial"/>
+              </a:rPr>
+              <a:t>Document your exit strategy in the study protocol — it determines what analytic window you have</a:t>
+            </a:r>
+          </a:p>
+        </p:txBody>
+      </p:sp>
+    </p:spTree>
+  </p:cSld>
+  <p:clrMapOvr>
+    <a:masterClrMapping/>
+  </p:clrMapOvr>
+</p:sld>
+</file>
+
+<file path=ppt/slides/slide16.xml><?xml version="1.0" encoding="utf-8"?>
+<p:sld xmlns:a="http://schemas.openxmlformats.org/drawingml/2006/main" xmlns:p="http://schemas.openxmlformats.org/presentationml/2006/main" xmlns:r="http://schemas.openxmlformats.org/officeDocument/2006/relationships">
+  <p:cSld>
+    <p:spTree>
+      <p:nvGrpSpPr>
+        <p:cNvPr id="1" name=""/>
+        <p:cNvGrpSpPr/>
+        <p:nvPr/>
+      </p:nvGrpSpPr>
+      <p:grpSpPr/>
+      <p:sp>
+        <p:nvSpPr>
+          <p:cNvPr id="2" name="Rectangle 1"/>
           <p:cNvSpPr/>
           <p:nvPr/>
         </p:nvSpPr>
         <p:spPr>
           <a:xfrm>
-            <a:off x="475488" y="1170432"/>
-            <a:ext cx="11237976" cy="780288"/>
+            <a:off x="0" y="0"/>
+            <a:ext cx="12188952" cy="960120"/>
           </a:xfrm>
           <a:prstGeom prst="rect">
             <a:avLst/>
           </a:prstGeom>
           <a:solidFill>
-            <a:srgbClr val="DCD2F5"/>
+            <a:srgbClr val="904199"/>
           </a:solidFill>
-          <a:ln w="9525">
-            <a:solidFill>
-              <a:srgbClr val="7B4FA8"/>
-            </a:solidFill>
+          <a:ln>
+            <a:noFill/>
           </a:ln>
         </p:spPr>
         <p:style>
@@ -6587,59 +5972,23 @@
       </p:sp>
       <p:sp>
         <p:nvSpPr>
-          <p:cNvPr id="6" name="TextBox 5"/>
-          <p:cNvSpPr txBox="1"/>
-          <p:nvPr/>
-        </p:nvSpPr>
-        <p:spPr>
-          <a:xfrm>
-            <a:off x="585216" y="1234440"/>
-            <a:ext cx="11018520" cy="670560"/>
-          </a:xfrm>
-          <a:prstGeom prst="rect">
-            <a:avLst/>
-          </a:prstGeom>
-          <a:noFill/>
-        </p:spPr>
-        <p:txBody>
-          <a:bodyPr wrap="square">
-            <a:spAutoFit/>
-          </a:bodyPr>
-          <a:lstStyle/>
-          <a:p>
-            <a:pPr algn="l"/>
-            <a:r>
-              <a:rPr sz="1800" b="0" i="0">
-                <a:solidFill>
-                  <a:srgbClr val="191919"/>
-                </a:solidFill>
-              </a:rPr>
-              <a:t>✓  A cohort is a rule set — not a list. Same definition, any OMOP CDM, comparable result</a:t>
-            </a:r>
-          </a:p>
-        </p:txBody>
-      </p:sp>
-      <p:sp>
-        <p:nvSpPr>
-          <p:cNvPr id="7" name="Rectangle 6"/>
+          <p:cNvPr id="3" name="Rectangle 2"/>
           <p:cNvSpPr/>
           <p:nvPr/>
         </p:nvSpPr>
         <p:spPr>
           <a:xfrm>
-            <a:off x="475488" y="2042160"/>
-            <a:ext cx="11237976" cy="780288"/>
+            <a:off x="0" y="905256"/>
+            <a:ext cx="12188952" cy="54864"/>
           </a:xfrm>
           <a:prstGeom prst="rect">
             <a:avLst/>
           </a:prstGeom>
           <a:solidFill>
-            <a:srgbClr val="F8F2FF"/>
+            <a:srgbClr val="320337"/>
           </a:solidFill>
-          <a:ln w="9525">
-            <a:solidFill>
-              <a:srgbClr val="7B4FA8"/>
-            </a:solidFill>
+          <a:ln>
+            <a:noFill/>
           </a:ln>
         </p:spPr>
         <p:style>
@@ -6666,14 +6015,14 @@
       </p:sp>
       <p:sp>
         <p:nvSpPr>
-          <p:cNvPr id="8" name="TextBox 7"/>
+          <p:cNvPr id="4" name="TextBox 3"/>
           <p:cNvSpPr txBox="1"/>
           <p:nvPr/>
         </p:nvSpPr>
         <p:spPr>
           <a:xfrm>
-            <a:off x="585216" y="2106168"/>
-            <a:ext cx="11018520" cy="670560"/>
+            <a:off x="475488" y="137160"/>
+            <a:ext cx="11237976" cy="777240"/>
           </a:xfrm>
           <a:prstGeom prst="rect">
             <a:avLst/>
@@ -6688,36 +6037,72 @@
           <a:p>
             <a:pPr algn="l"/>
             <a:r>
-              <a:rPr sz="1800" b="0" i="0">
-                <a:solidFill>
-                  <a:srgbClr val="191919"/>
-                </a:solidFill>
-              </a:rPr>
-              <a:t>✓  Every cohort has four parts: entry event, concept sets, inclusion criteria, exit</a:t>
-            </a:r>
-          </a:p>
-        </p:txBody>
-      </p:sp>
-      <p:sp>
-        <p:nvSpPr>
-          <p:cNvPr id="9" name="Rectangle 8"/>
+              <a:rPr sz="2600" b="1" i="0">
+                <a:solidFill>
+                  <a:srgbClr val="FFFFFF"/>
+                </a:solidFill>
+                <a:latin typeface="Gotham Narrow"/>
+              </a:rPr>
+              <a:t>Lab:  Live Demo: New-User Metformin Cohort in ATLAS</a:t>
+            </a:r>
+          </a:p>
+        </p:txBody>
+      </p:sp>
+      <p:sp>
+        <p:nvSpPr>
+          <p:cNvPr id="5" name="TextBox 4"/>
+          <p:cNvSpPr txBox="1"/>
+          <p:nvPr/>
+        </p:nvSpPr>
+        <p:spPr>
+          <a:xfrm>
+            <a:off x="9262872" y="201168"/>
+            <a:ext cx="2468880" cy="548640"/>
+          </a:xfrm>
+          <a:prstGeom prst="rect">
+            <a:avLst/>
+          </a:prstGeom>
+          <a:noFill/>
+        </p:spPr>
+        <p:txBody>
+          <a:bodyPr wrap="square">
+            <a:spAutoFit/>
+          </a:bodyPr>
+          <a:lstStyle/>
+          <a:p>
+            <a:pPr algn="r"/>
+            <a:r>
+              <a:rPr sz="1400" b="0" i="0">
+                <a:solidFill>
+                  <a:srgbClr val="FFFFFF"/>
+                </a:solidFill>
+                <a:latin typeface="Arial"/>
+              </a:rPr>
+              <a:t>⏱  ~25 minutes (demo)</a:t>
+            </a:r>
+          </a:p>
+        </p:txBody>
+      </p:sp>
+      <p:sp>
+        <p:nvSpPr>
+          <p:cNvPr id="6" name="Rectangle 5"/>
           <p:cNvSpPr/>
           <p:nvPr/>
         </p:nvSpPr>
         <p:spPr>
           <a:xfrm>
-            <a:off x="475488" y="2913888"/>
-            <a:ext cx="11237976" cy="780288"/>
+            <a:off x="475488" y="1124712"/>
+            <a:ext cx="11237976" cy="402336"/>
           </a:xfrm>
           <a:prstGeom prst="rect">
             <a:avLst/>
           </a:prstGeom>
           <a:solidFill>
-            <a:srgbClr val="DCD2F5"/>
+            <a:srgbClr val="ECDFF3"/>
           </a:solidFill>
           <a:ln w="9525">
             <a:solidFill>
-              <a:srgbClr val="7B4FA8"/>
+              <a:srgbClr val="904199"/>
             </a:solidFill>
           </a:ln>
         </p:spPr>
@@ -6745,14 +6130,14 @@
       </p:sp>
       <p:sp>
         <p:nvSpPr>
-          <p:cNvPr id="10" name="TextBox 9"/>
+          <p:cNvPr id="7" name="TextBox 6"/>
           <p:cNvSpPr txBox="1"/>
           <p:nvPr/>
         </p:nvSpPr>
         <p:spPr>
           <a:xfrm>
-            <a:off x="585216" y="2977896"/>
-            <a:ext cx="11018520" cy="670560"/>
+            <a:off x="566928" y="1197864"/>
+            <a:ext cx="11055096" cy="274320"/>
           </a:xfrm>
           <a:prstGeom prst="rect">
             <a:avLst/>
@@ -6767,37 +6152,36 @@
           <a:p>
             <a:pPr algn="l"/>
             <a:r>
-              <a:rPr sz="1800" b="0" i="0">
-                <a:solidFill>
-                  <a:srgbClr val="191919"/>
-                </a:solidFill>
-              </a:rPr>
-              <a:t>✓  Temporal logic is the most common source of errors — review the attrition report carefully</a:t>
-            </a:r>
-          </a:p>
-        </p:txBody>
-      </p:sp>
-      <p:sp>
-        <p:nvSpPr>
-          <p:cNvPr id="11" name="Rectangle 10"/>
+              <a:rPr sz="1400" b="0" i="0">
+                <a:solidFill>
+                  <a:srgbClr val="320337"/>
+                </a:solidFill>
+                <a:latin typeface="Arial"/>
+              </a:rPr>
+              <a:t>Tool: ATLAS (your site's instance)</a:t>
+            </a:r>
+          </a:p>
+        </p:txBody>
+      </p:sp>
+      <p:sp>
+        <p:nvSpPr>
+          <p:cNvPr id="8" name="Rectangle 7"/>
           <p:cNvSpPr/>
           <p:nvPr/>
         </p:nvSpPr>
         <p:spPr>
           <a:xfrm>
-            <a:off x="475488" y="3785616"/>
-            <a:ext cx="11237976" cy="780288"/>
+            <a:off x="475488" y="1655064"/>
+            <a:ext cx="365760" cy="365760"/>
           </a:xfrm>
           <a:prstGeom prst="rect">
             <a:avLst/>
           </a:prstGeom>
           <a:solidFill>
-            <a:srgbClr val="F8F2FF"/>
+            <a:srgbClr val="904199"/>
           </a:solidFill>
-          <a:ln w="9525">
-            <a:solidFill>
-              <a:srgbClr val="7B4FA8"/>
-            </a:solidFill>
+          <a:ln>
+            <a:noFill/>
           </a:ln>
         </p:spPr>
         <p:style>
@@ -6824,14 +6208,14 @@
       </p:sp>
       <p:sp>
         <p:nvSpPr>
-          <p:cNvPr id="12" name="TextBox 11"/>
+          <p:cNvPr id="9" name="TextBox 8"/>
           <p:cNvSpPr txBox="1"/>
           <p:nvPr/>
         </p:nvSpPr>
         <p:spPr>
           <a:xfrm>
-            <a:off x="585216" y="3849624"/>
-            <a:ext cx="11018520" cy="670560"/>
+            <a:off x="475488" y="1673352"/>
+            <a:ext cx="365760" cy="329184"/>
           </a:xfrm>
           <a:prstGeom prst="rect">
             <a:avLst/>
@@ -6844,39 +6228,73 @@
           </a:bodyPr>
           <a:lstStyle/>
           <a:p>
+            <a:pPr algn="ctr"/>
+            <a:r>
+              <a:rPr sz="1500" b="1" i="0">
+                <a:solidFill>
+                  <a:srgbClr val="FFFFFF"/>
+                </a:solidFill>
+                <a:latin typeface="Arial"/>
+              </a:rPr>
+              <a:t>1</a:t>
+            </a:r>
+          </a:p>
+        </p:txBody>
+      </p:sp>
+      <p:sp>
+        <p:nvSpPr>
+          <p:cNvPr id="10" name="TextBox 9"/>
+          <p:cNvSpPr txBox="1"/>
+          <p:nvPr/>
+        </p:nvSpPr>
+        <p:spPr>
+          <a:xfrm>
+            <a:off x="969264" y="1655064"/>
+            <a:ext cx="10680192" cy="594360"/>
+          </a:xfrm>
+          <a:prstGeom prst="rect">
+            <a:avLst/>
+          </a:prstGeom>
+          <a:noFill/>
+        </p:spPr>
+        <p:txBody>
+          <a:bodyPr wrap="square">
+            <a:spAutoFit/>
+          </a:bodyPr>
+          <a:lstStyle/>
+          <a:p>
             <a:pPr algn="l"/>
             <a:r>
               <a:rPr sz="1800" b="0" i="0">
                 <a:solidFill>
                   <a:srgbClr val="191919"/>
                 </a:solidFill>
-              </a:rPr>
-              <a:t>✓  ATLAS is the primary tool for cohort building: graphical, version-controlled, exportable</a:t>
-            </a:r>
-          </a:p>
-        </p:txBody>
-      </p:sp>
-      <p:sp>
-        <p:nvSpPr>
-          <p:cNvPr id="13" name="Rectangle 12"/>
+                <a:latin typeface="Arial"/>
+              </a:rPr>
+              <a:t>In ATLAS → Cohort Definitions → New Cohort Definition</a:t>
+            </a:r>
+          </a:p>
+        </p:txBody>
+      </p:sp>
+      <p:sp>
+        <p:nvSpPr>
+          <p:cNvPr id="11" name="Rectangle 10"/>
           <p:cNvSpPr/>
           <p:nvPr/>
         </p:nvSpPr>
         <p:spPr>
           <a:xfrm>
-            <a:off x="475488" y="4657344"/>
-            <a:ext cx="11237976" cy="780288"/>
+            <a:off x="475488" y="2368296"/>
+            <a:ext cx="365760" cy="365760"/>
           </a:xfrm>
           <a:prstGeom prst="rect">
             <a:avLst/>
           </a:prstGeom>
           <a:solidFill>
-            <a:srgbClr val="DCD2F5"/>
+            <a:srgbClr val="904199"/>
           </a:solidFill>
-          <a:ln w="9525">
-            <a:solidFill>
-              <a:srgbClr val="7B4FA8"/>
-            </a:solidFill>
+          <a:ln>
+            <a:noFill/>
           </a:ln>
         </p:spPr>
         <p:style>
@@ -6903,14 +6321,14 @@
       </p:sp>
       <p:sp>
         <p:nvSpPr>
-          <p:cNvPr id="14" name="TextBox 13"/>
+          <p:cNvPr id="12" name="TextBox 11"/>
           <p:cNvSpPr txBox="1"/>
           <p:nvPr/>
         </p:nvSpPr>
         <p:spPr>
           <a:xfrm>
-            <a:off x="585216" y="4721352"/>
-            <a:ext cx="11018520" cy="670560"/>
+            <a:off x="475488" y="2386584"/>
+            <a:ext cx="365760" cy="329184"/>
           </a:xfrm>
           <a:prstGeom prst="rect">
             <a:avLst/>
@@ -6923,39 +6341,73 @@
           </a:bodyPr>
           <a:lstStyle/>
           <a:p>
+            <a:pPr algn="ctr"/>
+            <a:r>
+              <a:rPr sz="1500" b="1" i="0">
+                <a:solidFill>
+                  <a:srgbClr val="FFFFFF"/>
+                </a:solidFill>
+                <a:latin typeface="Arial"/>
+              </a:rPr>
+              <a:t>2</a:t>
+            </a:r>
+          </a:p>
+        </p:txBody>
+      </p:sp>
+      <p:sp>
+        <p:nvSpPr>
+          <p:cNvPr id="13" name="TextBox 12"/>
+          <p:cNvSpPr txBox="1"/>
+          <p:nvPr/>
+        </p:nvSpPr>
+        <p:spPr>
+          <a:xfrm>
+            <a:off x="969264" y="2368296"/>
+            <a:ext cx="10680192" cy="594360"/>
+          </a:xfrm>
+          <a:prstGeom prst="rect">
+            <a:avLst/>
+          </a:prstGeom>
+          <a:noFill/>
+        </p:spPr>
+        <p:txBody>
+          <a:bodyPr wrap="square">
+            <a:spAutoFit/>
+          </a:bodyPr>
+          <a:lstStyle/>
+          <a:p>
             <a:pPr algn="l"/>
             <a:r>
               <a:rPr sz="1800" b="0" i="0">
                 <a:solidFill>
                   <a:srgbClr val="191919"/>
                 </a:solidFill>
-              </a:rPr>
-              <a:t>✓  Characterization is the first sanity check: does the population look like what you intended?</a:t>
-            </a:r>
-          </a:p>
-        </p:txBody>
-      </p:sp>
-      <p:sp>
-        <p:nvSpPr>
-          <p:cNvPr id="15" name="Rectangle 14"/>
+                <a:latin typeface="Arial"/>
+              </a:rPr>
+              <a:t>Entry event: Drug Exposure · concept set = Metformin (from Day 2) · restrict to FIRST event</a:t>
+            </a:r>
+          </a:p>
+        </p:txBody>
+      </p:sp>
+      <p:sp>
+        <p:nvSpPr>
+          <p:cNvPr id="14" name="Rectangle 13"/>
           <p:cNvSpPr/>
           <p:nvPr/>
         </p:nvSpPr>
         <p:spPr>
           <a:xfrm>
-            <a:off x="475488" y="5529072"/>
-            <a:ext cx="11237976" cy="780288"/>
+            <a:off x="475488" y="3081528"/>
+            <a:ext cx="365760" cy="365760"/>
           </a:xfrm>
           <a:prstGeom prst="rect">
             <a:avLst/>
           </a:prstGeom>
           <a:solidFill>
-            <a:srgbClr val="F8F2FF"/>
+            <a:srgbClr val="904199"/>
           </a:solidFill>
-          <a:ln w="9525">
-            <a:solidFill>
-              <a:srgbClr val="7B4FA8"/>
-            </a:solidFill>
+          <a:ln>
+            <a:noFill/>
           </a:ln>
         </p:spPr>
         <p:style>
@@ -6982,14 +6434,14 @@
       </p:sp>
       <p:sp>
         <p:nvSpPr>
-          <p:cNvPr id="16" name="TextBox 15"/>
+          <p:cNvPr id="15" name="TextBox 14"/>
           <p:cNvSpPr txBox="1"/>
           <p:nvPr/>
         </p:nvSpPr>
         <p:spPr>
           <a:xfrm>
-            <a:off x="585216" y="5593080"/>
-            <a:ext cx="11018520" cy="670560"/>
+            <a:off x="475488" y="3099816"/>
+            <a:ext cx="365760" cy="329184"/>
           </a:xfrm>
           <a:prstGeom prst="rect">
             <a:avLst/>
@@ -7002,28 +6454,29 @@
           </a:bodyPr>
           <a:lstStyle/>
           <a:p>
-            <a:pPr algn="l"/>
-            <a:r>
-              <a:rPr sz="1800" b="0" i="0">
-                <a:solidFill>
-                  <a:srgbClr val="191919"/>
-                </a:solidFill>
-              </a:rPr>
-              <a:t>✓  Always validate cohort counts against your SQL client — if they disagree, investigate before analysis</a:t>
-            </a:r>
-          </a:p>
-        </p:txBody>
-      </p:sp>
-      <p:sp>
-        <p:nvSpPr>
-          <p:cNvPr id="17" name="TextBox 16"/>
+            <a:pPr algn="ctr"/>
+            <a:r>
+              <a:rPr sz="1500" b="1" i="0">
+                <a:solidFill>
+                  <a:srgbClr val="FFFFFF"/>
+                </a:solidFill>
+                <a:latin typeface="Arial"/>
+              </a:rPr>
+              <a:t>3</a:t>
+            </a:r>
+          </a:p>
+        </p:txBody>
+      </p:sp>
+      <p:sp>
+        <p:nvSpPr>
+          <p:cNvPr id="16" name="TextBox 15"/>
           <p:cNvSpPr txBox="1"/>
           <p:nvPr/>
         </p:nvSpPr>
         <p:spPr>
           <a:xfrm>
-            <a:off x="475488" y="6428232"/>
-            <a:ext cx="11237976" cy="347472"/>
+            <a:off x="969264" y="3081528"/>
+            <a:ext cx="10680192" cy="594360"/>
           </a:xfrm>
           <a:prstGeom prst="rect">
             <a:avLst/>
@@ -7038,12 +6491,1382 @@
           <a:p>
             <a:pPr algn="l"/>
             <a:r>
-              <a:rPr sz="1400" b="0" i="1">
+              <a:rPr sz="1800" b="0" i="0">
+                <a:solidFill>
+                  <a:srgbClr val="191919"/>
+                </a:solidFill>
+                <a:latin typeface="Arial"/>
+              </a:rPr>
+              <a:t>Inclusion Rule 1: 'At least 365 days of prior continuous observation' (observation period ≥ 365 days before index)</a:t>
+            </a:r>
+          </a:p>
+        </p:txBody>
+      </p:sp>
+      <p:sp>
+        <p:nvSpPr>
+          <p:cNvPr id="17" name="Rectangle 16"/>
+          <p:cNvSpPr/>
+          <p:nvPr/>
+        </p:nvSpPr>
+        <p:spPr>
+          <a:xfrm>
+            <a:off x="475488" y="3794760"/>
+            <a:ext cx="365760" cy="365760"/>
+          </a:xfrm>
+          <a:prstGeom prst="rect">
+            <a:avLst/>
+          </a:prstGeom>
+          <a:solidFill>
+            <a:srgbClr val="904199"/>
+          </a:solidFill>
+          <a:ln>
+            <a:noFill/>
+          </a:ln>
+        </p:spPr>
+        <p:style>
+          <a:lnRef idx="1">
+            <a:schemeClr val="accent1"/>
+          </a:lnRef>
+          <a:fillRef idx="3">
+            <a:schemeClr val="accent1"/>
+          </a:fillRef>
+          <a:effectRef idx="2">
+            <a:schemeClr val="accent1"/>
+          </a:effectRef>
+          <a:fontRef idx="minor">
+            <a:schemeClr val="lt1"/>
+          </a:fontRef>
+        </p:style>
+        <p:txBody>
+          <a:bodyPr rtlCol="0" anchor="ctr"/>
+          <a:lstStyle/>
+          <a:p>
+            <a:pPr algn="ctr"/>
+          </a:p>
+        </p:txBody>
+      </p:sp>
+      <p:sp>
+        <p:nvSpPr>
+          <p:cNvPr id="18" name="TextBox 17"/>
+          <p:cNvSpPr txBox="1"/>
+          <p:nvPr/>
+        </p:nvSpPr>
+        <p:spPr>
+          <a:xfrm>
+            <a:off x="475488" y="3813048"/>
+            <a:ext cx="365760" cy="329184"/>
+          </a:xfrm>
+          <a:prstGeom prst="rect">
+            <a:avLst/>
+          </a:prstGeom>
+          <a:noFill/>
+        </p:spPr>
+        <p:txBody>
+          <a:bodyPr wrap="square">
+            <a:spAutoFit/>
+          </a:bodyPr>
+          <a:lstStyle/>
+          <a:p>
+            <a:pPr algn="ctr"/>
+            <a:r>
+              <a:rPr sz="1500" b="1" i="0">
+                <a:solidFill>
+                  <a:srgbClr val="FFFFFF"/>
+                </a:solidFill>
+                <a:latin typeface="Arial"/>
+              </a:rPr>
+              <a:t>4</a:t>
+            </a:r>
+          </a:p>
+        </p:txBody>
+      </p:sp>
+      <p:sp>
+        <p:nvSpPr>
+          <p:cNvPr id="19" name="TextBox 18"/>
+          <p:cNvSpPr txBox="1"/>
+          <p:nvPr/>
+        </p:nvSpPr>
+        <p:spPr>
+          <a:xfrm>
+            <a:off x="969264" y="3794760"/>
+            <a:ext cx="10680192" cy="594360"/>
+          </a:xfrm>
+          <a:prstGeom prst="rect">
+            <a:avLst/>
+          </a:prstGeom>
+          <a:noFill/>
+        </p:spPr>
+        <p:txBody>
+          <a:bodyPr wrap="square">
+            <a:spAutoFit/>
+          </a:bodyPr>
+          <a:lstStyle/>
+          <a:p>
+            <a:pPr algn="l"/>
+            <a:r>
+              <a:rPr sz="1800" b="0" i="0">
+                <a:solidFill>
+                  <a:srgbClr val="191919"/>
+                </a:solidFill>
+                <a:latin typeface="Arial"/>
+              </a:rPr>
+              <a:t>Inclusion Rule 2: 'No prior sulfonylurea' (drug exposure count = 0 in 365 days prior) — ATLAS UI exclusion</a:t>
+            </a:r>
+          </a:p>
+        </p:txBody>
+      </p:sp>
+      <p:sp>
+        <p:nvSpPr>
+          <p:cNvPr id="20" name="Rectangle 19"/>
+          <p:cNvSpPr/>
+          <p:nvPr/>
+        </p:nvSpPr>
+        <p:spPr>
+          <a:xfrm>
+            <a:off x="475488" y="4507992"/>
+            <a:ext cx="365760" cy="365760"/>
+          </a:xfrm>
+          <a:prstGeom prst="rect">
+            <a:avLst/>
+          </a:prstGeom>
+          <a:solidFill>
+            <a:srgbClr val="904199"/>
+          </a:solidFill>
+          <a:ln>
+            <a:noFill/>
+          </a:ln>
+        </p:spPr>
+        <p:style>
+          <a:lnRef idx="1">
+            <a:schemeClr val="accent1"/>
+          </a:lnRef>
+          <a:fillRef idx="3">
+            <a:schemeClr val="accent1"/>
+          </a:fillRef>
+          <a:effectRef idx="2">
+            <a:schemeClr val="accent1"/>
+          </a:effectRef>
+          <a:fontRef idx="minor">
+            <a:schemeClr val="lt1"/>
+          </a:fontRef>
+        </p:style>
+        <p:txBody>
+          <a:bodyPr rtlCol="0" anchor="ctr"/>
+          <a:lstStyle/>
+          <a:p>
+            <a:pPr algn="ctr"/>
+          </a:p>
+        </p:txBody>
+      </p:sp>
+      <p:sp>
+        <p:nvSpPr>
+          <p:cNvPr id="21" name="TextBox 20"/>
+          <p:cNvSpPr txBox="1"/>
+          <p:nvPr/>
+        </p:nvSpPr>
+        <p:spPr>
+          <a:xfrm>
+            <a:off x="475488" y="4526280"/>
+            <a:ext cx="365760" cy="329184"/>
+          </a:xfrm>
+          <a:prstGeom prst="rect">
+            <a:avLst/>
+          </a:prstGeom>
+          <a:noFill/>
+        </p:spPr>
+        <p:txBody>
+          <a:bodyPr wrap="square">
+            <a:spAutoFit/>
+          </a:bodyPr>
+          <a:lstStyle/>
+          <a:p>
+            <a:pPr algn="ctr"/>
+            <a:r>
+              <a:rPr sz="1500" b="1" i="0">
+                <a:solidFill>
+                  <a:srgbClr val="FFFFFF"/>
+                </a:solidFill>
+                <a:latin typeface="Arial"/>
+              </a:rPr>
+              <a:t>5</a:t>
+            </a:r>
+          </a:p>
+        </p:txBody>
+      </p:sp>
+      <p:sp>
+        <p:nvSpPr>
+          <p:cNvPr id="22" name="TextBox 21"/>
+          <p:cNvSpPr txBox="1"/>
+          <p:nvPr/>
+        </p:nvSpPr>
+        <p:spPr>
+          <a:xfrm>
+            <a:off x="969264" y="4507992"/>
+            <a:ext cx="10680192" cy="594360"/>
+          </a:xfrm>
+          <a:prstGeom prst="rect">
+            <a:avLst/>
+          </a:prstGeom>
+          <a:noFill/>
+        </p:spPr>
+        <p:txBody>
+          <a:bodyPr wrap="square">
+            <a:spAutoFit/>
+          </a:bodyPr>
+          <a:lstStyle/>
+          <a:p>
+            <a:pPr algn="l"/>
+            <a:r>
+              <a:rPr sz="1800" b="0" i="0">
+                <a:solidFill>
+                  <a:srgbClr val="191919"/>
+                </a:solidFill>
+                <a:latin typeface="Arial"/>
+              </a:rPr>
+              <a:t>Cohort exit: End of continuous drug exposure + 30-day gap</a:t>
+            </a:r>
+          </a:p>
+        </p:txBody>
+      </p:sp>
+      <p:sp>
+        <p:nvSpPr>
+          <p:cNvPr id="23" name="Rectangle 22"/>
+          <p:cNvSpPr/>
+          <p:nvPr/>
+        </p:nvSpPr>
+        <p:spPr>
+          <a:xfrm>
+            <a:off x="475488" y="5221224"/>
+            <a:ext cx="365760" cy="365760"/>
+          </a:xfrm>
+          <a:prstGeom prst="rect">
+            <a:avLst/>
+          </a:prstGeom>
+          <a:solidFill>
+            <a:srgbClr val="904199"/>
+          </a:solidFill>
+          <a:ln>
+            <a:noFill/>
+          </a:ln>
+        </p:spPr>
+        <p:style>
+          <a:lnRef idx="1">
+            <a:schemeClr val="accent1"/>
+          </a:lnRef>
+          <a:fillRef idx="3">
+            <a:schemeClr val="accent1"/>
+          </a:fillRef>
+          <a:effectRef idx="2">
+            <a:schemeClr val="accent1"/>
+          </a:effectRef>
+          <a:fontRef idx="minor">
+            <a:schemeClr val="lt1"/>
+          </a:fontRef>
+        </p:style>
+        <p:txBody>
+          <a:bodyPr rtlCol="0" anchor="ctr"/>
+          <a:lstStyle/>
+          <a:p>
+            <a:pPr algn="ctr"/>
+          </a:p>
+        </p:txBody>
+      </p:sp>
+      <p:sp>
+        <p:nvSpPr>
+          <p:cNvPr id="24" name="TextBox 23"/>
+          <p:cNvSpPr txBox="1"/>
+          <p:nvPr/>
+        </p:nvSpPr>
+        <p:spPr>
+          <a:xfrm>
+            <a:off x="475488" y="5239512"/>
+            <a:ext cx="365760" cy="329184"/>
+          </a:xfrm>
+          <a:prstGeom prst="rect">
+            <a:avLst/>
+          </a:prstGeom>
+          <a:noFill/>
+        </p:spPr>
+        <p:txBody>
+          <a:bodyPr wrap="square">
+            <a:spAutoFit/>
+          </a:bodyPr>
+          <a:lstStyle/>
+          <a:p>
+            <a:pPr algn="ctr"/>
+            <a:r>
+              <a:rPr sz="1500" b="1" i="0">
+                <a:solidFill>
+                  <a:srgbClr val="FFFFFF"/>
+                </a:solidFill>
+                <a:latin typeface="Arial"/>
+              </a:rPr>
+              <a:t>6</a:t>
+            </a:r>
+          </a:p>
+        </p:txBody>
+      </p:sp>
+      <p:sp>
+        <p:nvSpPr>
+          <p:cNvPr id="25" name="TextBox 24"/>
+          <p:cNvSpPr txBox="1"/>
+          <p:nvPr/>
+        </p:nvSpPr>
+        <p:spPr>
+          <a:xfrm>
+            <a:off x="969264" y="5221224"/>
+            <a:ext cx="10680192" cy="594360"/>
+          </a:xfrm>
+          <a:prstGeom prst="rect">
+            <a:avLst/>
+          </a:prstGeom>
+          <a:noFill/>
+        </p:spPr>
+        <p:txBody>
+          <a:bodyPr wrap="square">
+            <a:spAutoFit/>
+          </a:bodyPr>
+          <a:lstStyle/>
+          <a:p>
+            <a:pPr algn="l"/>
+            <a:r>
+              <a:rPr sz="1800" b="0" i="0">
+                <a:solidFill>
+                  <a:srgbClr val="191919"/>
+                </a:solidFill>
+                <a:latin typeface="Arial"/>
+              </a:rPr>
+              <a:t>Save → Generate → wait for completion → open the Attrition report</a:t>
+            </a:r>
+          </a:p>
+        </p:txBody>
+      </p:sp>
+    </p:spTree>
+  </p:cSld>
+  <p:clrMapOvr>
+    <a:masterClrMapping/>
+  </p:clrMapOvr>
+</p:sld>
+</file>
+
+<file path=ppt/slides/slide17.xml><?xml version="1.0" encoding="utf-8"?>
+<p:sld xmlns:a="http://schemas.openxmlformats.org/drawingml/2006/main" xmlns:p="http://schemas.openxmlformats.org/presentationml/2006/main" xmlns:r="http://schemas.openxmlformats.org/officeDocument/2006/relationships">
+  <p:cSld>
+    <p:spTree>
+      <p:nvGrpSpPr>
+        <p:cNvPr id="1" name=""/>
+        <p:cNvGrpSpPr/>
+        <p:nvPr/>
+      </p:nvGrpSpPr>
+      <p:grpSpPr/>
+      <p:sp>
+        <p:nvSpPr>
+          <p:cNvPr id="2" name="Rectangle 1"/>
+          <p:cNvSpPr/>
+          <p:nvPr/>
+        </p:nvSpPr>
+        <p:spPr>
+          <a:xfrm>
+            <a:off x="0" y="0"/>
+            <a:ext cx="12188952" cy="960120"/>
+          </a:xfrm>
+          <a:prstGeom prst="rect">
+            <a:avLst/>
+          </a:prstGeom>
+          <a:solidFill>
+            <a:srgbClr val="20425A"/>
+          </a:solidFill>
+          <a:ln>
+            <a:noFill/>
+          </a:ln>
+        </p:spPr>
+        <p:style>
+          <a:lnRef idx="1">
+            <a:schemeClr val="accent1"/>
+          </a:lnRef>
+          <a:fillRef idx="3">
+            <a:schemeClr val="accent1"/>
+          </a:fillRef>
+          <a:effectRef idx="2">
+            <a:schemeClr val="accent1"/>
+          </a:effectRef>
+          <a:fontRef idx="minor">
+            <a:schemeClr val="lt1"/>
+          </a:fontRef>
+        </p:style>
+        <p:txBody>
+          <a:bodyPr rtlCol="0" anchor="ctr"/>
+          <a:lstStyle/>
+          <a:p>
+            <a:pPr algn="ctr"/>
+          </a:p>
+        </p:txBody>
+      </p:sp>
+      <p:sp>
+        <p:nvSpPr>
+          <p:cNvPr id="3" name="Rectangle 2"/>
+          <p:cNvSpPr/>
+          <p:nvPr/>
+        </p:nvSpPr>
+        <p:spPr>
+          <a:xfrm>
+            <a:off x="0" y="905256"/>
+            <a:ext cx="12188952" cy="54864"/>
+          </a:xfrm>
+          <a:prstGeom prst="rect">
+            <a:avLst/>
+          </a:prstGeom>
+          <a:solidFill>
+            <a:srgbClr val="904199"/>
+          </a:solidFill>
+          <a:ln>
+            <a:noFill/>
+          </a:ln>
+        </p:spPr>
+        <p:style>
+          <a:lnRef idx="1">
+            <a:schemeClr val="accent1"/>
+          </a:lnRef>
+          <a:fillRef idx="3">
+            <a:schemeClr val="accent1"/>
+          </a:fillRef>
+          <a:effectRef idx="2">
+            <a:schemeClr val="accent1"/>
+          </a:effectRef>
+          <a:fontRef idx="minor">
+            <a:schemeClr val="lt1"/>
+          </a:fontRef>
+        </p:style>
+        <p:txBody>
+          <a:bodyPr rtlCol="0" anchor="ctr"/>
+          <a:lstStyle/>
+          <a:p>
+            <a:pPr algn="ctr"/>
+          </a:p>
+        </p:txBody>
+      </p:sp>
+      <p:sp>
+        <p:nvSpPr>
+          <p:cNvPr id="4" name="TextBox 3"/>
+          <p:cNvSpPr txBox="1"/>
+          <p:nvPr/>
+        </p:nvSpPr>
+        <p:spPr>
+          <a:xfrm>
+            <a:off x="475488" y="137160"/>
+            <a:ext cx="11713464" cy="777240"/>
+          </a:xfrm>
+          <a:prstGeom prst="rect">
+            <a:avLst/>
+          </a:prstGeom>
+          <a:noFill/>
+        </p:spPr>
+        <p:txBody>
+          <a:bodyPr wrap="square">
+            <a:spAutoFit/>
+          </a:bodyPr>
+          <a:lstStyle/>
+          <a:p>
+            <a:pPr algn="l"/>
+            <a:r>
+              <a:rPr sz="2800" b="1" i="0">
+                <a:solidFill>
+                  <a:srgbClr val="FFFFFF"/>
+                </a:solidFill>
+                <a:latin typeface="Gotham Narrow"/>
+              </a:rPr>
+              <a:t>Reading the Attrition Report</a:t>
+            </a:r>
+          </a:p>
+        </p:txBody>
+      </p:sp>
+      <p:sp>
+        <p:nvSpPr>
+          <p:cNvPr id="5" name="TextBox 4"/>
+          <p:cNvSpPr txBox="1"/>
+          <p:nvPr/>
+        </p:nvSpPr>
+        <p:spPr>
+          <a:xfrm>
+            <a:off x="475488" y="1161288"/>
+            <a:ext cx="11237976" cy="5495544"/>
+          </a:xfrm>
+          <a:prstGeom prst="rect">
+            <a:avLst/>
+          </a:prstGeom>
+          <a:noFill/>
+        </p:spPr>
+        <p:txBody>
+          <a:bodyPr wrap="square">
+            <a:spAutoFit/>
+          </a:bodyPr>
+          <a:lstStyle/>
+          <a:p>
+            <a:pPr>
+              <a:spcBef>
+                <a:spcPts val="600"/>
+              </a:spcBef>
+            </a:pPr>
+            <a:r>
+              <a:rPr sz="1800">
+                <a:solidFill>
+                  <a:srgbClr val="191919"/>
+                </a:solidFill>
+                <a:latin typeface="Arial"/>
+              </a:rPr>
+              <a:t>The attrition report shows the count at each step of the cohort building process</a:t>
+            </a:r>
+          </a:p>
+          <a:p>
+            <a:pPr>
+              <a:spcBef>
+                <a:spcPts val="600"/>
+              </a:spcBef>
+            </a:pPr>
+            <a:r>
+              <a:rPr sz="1800">
+                <a:solidFill>
+                  <a:srgbClr val="191919"/>
+                </a:solidFill>
+                <a:latin typeface="Arial"/>
+              </a:rPr>
+              <a:t>Row 0: total persons meeting the entry event (ALL qualifying events, before inclusion criteria)</a:t>
+            </a:r>
+          </a:p>
+          <a:p>
+            <a:pPr>
+              <a:spcBef>
+                <a:spcPts val="600"/>
+              </a:spcBef>
+            </a:pPr>
+            <a:r>
+              <a:rPr sz="1800">
+                <a:solidFill>
+                  <a:srgbClr val="191919"/>
+                </a:solidFill>
+                <a:latin typeface="Arial"/>
+              </a:rPr>
+              <a:t>Row 1: after applying Inclusion Rule 1 — how many remain?</a:t>
+            </a:r>
+          </a:p>
+          <a:p>
+            <a:pPr>
+              <a:spcBef>
+                <a:spcPts val="600"/>
+              </a:spcBef>
+            </a:pPr>
+            <a:r>
+              <a:rPr sz="1800">
+                <a:solidFill>
+                  <a:srgbClr val="191919"/>
+                </a:solidFill>
+                <a:latin typeface="Arial"/>
+              </a:rPr>
+              <a:t>Row 2: after applying Inclusion Rule 2 — how many remain?</a:t>
+            </a:r>
+          </a:p>
+          <a:p>
+            <a:pPr>
+              <a:spcBef>
+                <a:spcPts val="600"/>
+              </a:spcBef>
+            </a:pPr>
+            <a:r>
+              <a:rPr sz="1800">
+                <a:solidFill>
+                  <a:srgbClr val="191919"/>
+                </a:solidFill>
+                <a:latin typeface="Arial"/>
+              </a:rPr>
+              <a:t>Final row: the cohort size</a:t>
+            </a:r>
+          </a:p>
+          <a:p>
+            <a:pPr>
+              <a:spcBef>
+                <a:spcPts val="600"/>
+              </a:spcBef>
+            </a:pPr>
+            <a:r>
+              <a:rPr sz="1800">
+                <a:solidFill>
+                  <a:srgbClr val="191919"/>
+                </a:solidFill>
+                <a:latin typeface="Arial"/>
+              </a:rPr>
+              <a:t>What the attrition report teaches you:</a:t>
+            </a:r>
+          </a:p>
+          <a:p>
+            <a:pPr lvl="1">
+              <a:spcBef>
+                <a:spcPts val="300"/>
+              </a:spcBef>
+            </a:pPr>
+            <a:r>
+              <a:rPr sz="1600">
+                <a:solidFill>
+                  <a:srgbClr val="191919"/>
+                </a:solidFill>
+                <a:latin typeface="Arial"/>
+              </a:rPr>
+              <a:t>A rule that removes almost everyone → probably too strict (temporal window too long?)</a:t>
+            </a:r>
+          </a:p>
+          <a:p>
+            <a:pPr lvl="1">
+              <a:spcBef>
+                <a:spcPts val="300"/>
+              </a:spcBef>
+            </a:pPr>
+            <a:r>
+              <a:rPr sz="1600">
+                <a:solidFill>
+                  <a:srgbClr val="191919"/>
+                </a:solidFill>
+                <a:latin typeface="Arial"/>
+              </a:rPr>
+              <a:t>A rule that removes almost no one → probably not functioning as intended</a:t>
+            </a:r>
+          </a:p>
+          <a:p>
+            <a:pPr lvl="1">
+              <a:spcBef>
+                <a:spcPts val="300"/>
+              </a:spcBef>
+            </a:pPr>
+            <a:r>
+              <a:rPr sz="1600">
+                <a:solidFill>
+                  <a:srgbClr val="191919"/>
+                </a:solidFill>
+                <a:latin typeface="Arial"/>
+              </a:rPr>
+              <a:t>A rule that removes exactly 0 → may have a logic error — investigate</a:t>
+            </a:r>
+          </a:p>
+          <a:p>
+            <a:pPr>
+              <a:spcBef>
+                <a:spcPts val="600"/>
+              </a:spcBef>
+            </a:pPr>
+            <a:r>
+              <a:rPr sz="1800">
+                <a:solidFill>
+                  <a:srgbClr val="191919"/>
+                </a:solidFill>
+                <a:latin typeface="Arial"/>
+              </a:rPr>
+              <a:t>The attrition report is the single most useful diagnostic for cohort validation</a:t>
+            </a:r>
+          </a:p>
+        </p:txBody>
+      </p:sp>
+    </p:spTree>
+  </p:cSld>
+  <p:clrMapOvr>
+    <a:masterClrMapping/>
+  </p:clrMapOvr>
+</p:sld>
+</file>
+
+<file path=ppt/slides/slide18.xml><?xml version="1.0" encoding="utf-8"?>
+<p:sld xmlns:a="http://schemas.openxmlformats.org/drawingml/2006/main" xmlns:p="http://schemas.openxmlformats.org/presentationml/2006/main" xmlns:r="http://schemas.openxmlformats.org/officeDocument/2006/relationships">
+  <p:cSld>
+    <p:spTree>
+      <p:nvGrpSpPr>
+        <p:cNvPr id="1" name=""/>
+        <p:cNvGrpSpPr/>
+        <p:nvPr/>
+      </p:nvGrpSpPr>
+      <p:grpSpPr/>
+      <p:sp>
+        <p:nvSpPr>
+          <p:cNvPr id="2" name="Rectangle 1"/>
+          <p:cNvSpPr/>
+          <p:nvPr/>
+        </p:nvSpPr>
+        <p:spPr>
+          <a:xfrm>
+            <a:off x="0" y="0"/>
+            <a:ext cx="12188952" cy="960120"/>
+          </a:xfrm>
+          <a:prstGeom prst="rect">
+            <a:avLst/>
+          </a:prstGeom>
+          <a:solidFill>
+            <a:srgbClr val="20425A"/>
+          </a:solidFill>
+          <a:ln>
+            <a:noFill/>
+          </a:ln>
+        </p:spPr>
+        <p:style>
+          <a:lnRef idx="1">
+            <a:schemeClr val="accent1"/>
+          </a:lnRef>
+          <a:fillRef idx="3">
+            <a:schemeClr val="accent1"/>
+          </a:fillRef>
+          <a:effectRef idx="2">
+            <a:schemeClr val="accent1"/>
+          </a:effectRef>
+          <a:fontRef idx="minor">
+            <a:schemeClr val="lt1"/>
+          </a:fontRef>
+        </p:style>
+        <p:txBody>
+          <a:bodyPr rtlCol="0" anchor="ctr"/>
+          <a:lstStyle/>
+          <a:p>
+            <a:pPr algn="ctr"/>
+          </a:p>
+        </p:txBody>
+      </p:sp>
+      <p:sp>
+        <p:nvSpPr>
+          <p:cNvPr id="3" name="Rectangle 2"/>
+          <p:cNvSpPr/>
+          <p:nvPr/>
+        </p:nvSpPr>
+        <p:spPr>
+          <a:xfrm>
+            <a:off x="0" y="905256"/>
+            <a:ext cx="12188952" cy="54864"/>
+          </a:xfrm>
+          <a:prstGeom prst="rect">
+            <a:avLst/>
+          </a:prstGeom>
+          <a:solidFill>
+            <a:srgbClr val="904199"/>
+          </a:solidFill>
+          <a:ln>
+            <a:noFill/>
+          </a:ln>
+        </p:spPr>
+        <p:style>
+          <a:lnRef idx="1">
+            <a:schemeClr val="accent1"/>
+          </a:lnRef>
+          <a:fillRef idx="3">
+            <a:schemeClr val="accent1"/>
+          </a:fillRef>
+          <a:effectRef idx="2">
+            <a:schemeClr val="accent1"/>
+          </a:effectRef>
+          <a:fontRef idx="minor">
+            <a:schemeClr val="lt1"/>
+          </a:fontRef>
+        </p:style>
+        <p:txBody>
+          <a:bodyPr rtlCol="0" anchor="ctr"/>
+          <a:lstStyle/>
+          <a:p>
+            <a:pPr algn="ctr"/>
+          </a:p>
+        </p:txBody>
+      </p:sp>
+      <p:sp>
+        <p:nvSpPr>
+          <p:cNvPr id="4" name="TextBox 3"/>
+          <p:cNvSpPr txBox="1"/>
+          <p:nvPr/>
+        </p:nvSpPr>
+        <p:spPr>
+          <a:xfrm>
+            <a:off x="475488" y="137160"/>
+            <a:ext cx="11713464" cy="777240"/>
+          </a:xfrm>
+          <a:prstGeom prst="rect">
+            <a:avLst/>
+          </a:prstGeom>
+          <a:noFill/>
+        </p:spPr>
+        <p:txBody>
+          <a:bodyPr wrap="square">
+            <a:spAutoFit/>
+          </a:bodyPr>
+          <a:lstStyle/>
+          <a:p>
+            <a:pPr algn="l"/>
+            <a:r>
+              <a:rPr sz="2800" b="1" i="0">
+                <a:solidFill>
+                  <a:srgbClr val="FFFFFF"/>
+                </a:solidFill>
+                <a:latin typeface="Gotham Narrow"/>
+              </a:rPr>
+              <a:t>Cohort Characterization — Sanity-Check Who You Captured</a:t>
+            </a:r>
+          </a:p>
+        </p:txBody>
+      </p:sp>
+      <p:sp>
+        <p:nvSpPr>
+          <p:cNvPr id="5" name="TextBox 4"/>
+          <p:cNvSpPr txBox="1"/>
+          <p:nvPr/>
+        </p:nvSpPr>
+        <p:spPr>
+          <a:xfrm>
+            <a:off x="475488" y="1161288"/>
+            <a:ext cx="11237976" cy="5495544"/>
+          </a:xfrm>
+          <a:prstGeom prst="rect">
+            <a:avLst/>
+          </a:prstGeom>
+          <a:noFill/>
+        </p:spPr>
+        <p:txBody>
+          <a:bodyPr wrap="square">
+            <a:spAutoFit/>
+          </a:bodyPr>
+          <a:lstStyle/>
+          <a:p>
+            <a:pPr>
+              <a:spcBef>
+                <a:spcPts val="600"/>
+              </a:spcBef>
+            </a:pPr>
+            <a:r>
+              <a:rPr sz="1800">
+                <a:solidFill>
+                  <a:srgbClr val="191919"/>
+                </a:solidFill>
+                <a:latin typeface="Arial"/>
+              </a:rPr>
+              <a:t>After generating a cohort, characterization summarizes WHO is in it</a:t>
+            </a:r>
+          </a:p>
+          <a:p>
+            <a:pPr>
+              <a:spcBef>
+                <a:spcPts val="600"/>
+              </a:spcBef>
+            </a:pPr>
+            <a:r>
+              <a:rPr sz="1800">
+                <a:solidFill>
+                  <a:srgbClr val="191919"/>
+                </a:solidFill>
+                <a:latin typeface="Arial"/>
+              </a:rPr>
+              <a:t>Characterization outputs: demographics · prior conditions · prior drugs · procedures</a:t>
+            </a:r>
+          </a:p>
+          <a:p>
+            <a:pPr>
+              <a:spcBef>
+                <a:spcPts val="600"/>
+              </a:spcBef>
+            </a:pPr>
+            <a:r>
+              <a:rPr sz="1800">
+                <a:solidFill>
+                  <a:srgbClr val="191919"/>
+                </a:solidFill>
+                <a:latin typeface="Arial"/>
+              </a:rPr>
+              <a:t>Run in ATLAS: Characterization tab on your cohort definition, or via a separate Analysis</a:t>
+            </a:r>
+          </a:p>
+          <a:p>
+            <a:pPr>
+              <a:spcBef>
+                <a:spcPts val="600"/>
+              </a:spcBef>
+            </a:pPr>
+            <a:r>
+              <a:rPr sz="1800">
+                <a:solidFill>
+                  <a:srgbClr val="191919"/>
+                </a:solidFill>
+                <a:latin typeface="Arial"/>
+              </a:rPr>
+              <a:t>What to look for:</a:t>
+            </a:r>
+          </a:p>
+          <a:p>
+            <a:pPr lvl="1">
+              <a:spcBef>
+                <a:spcPts val="300"/>
+              </a:spcBef>
+            </a:pPr>
+            <a:r>
+              <a:rPr sz="1600">
+                <a:solidFill>
+                  <a:srgbClr val="191919"/>
+                </a:solidFill>
+                <a:latin typeface="Arial"/>
+              </a:rPr>
+              <a:t>Demographics: does the age/sex distribution match what you'd expect for new metformin users?</a:t>
+            </a:r>
+          </a:p>
+          <a:p>
+            <a:pPr lvl="1">
+              <a:spcBef>
+                <a:spcPts val="300"/>
+              </a:spcBef>
+            </a:pPr>
+            <a:r>
+              <a:rPr sz="1600">
+                <a:solidFill>
+                  <a:srgbClr val="191919"/>
+                </a:solidFill>
+                <a:latin typeface="Arial"/>
+              </a:rPr>
+              <a:t>Prior conditions: is type 2 diabetes the most common prior condition? (it should be)</a:t>
+            </a:r>
+          </a:p>
+          <a:p>
+            <a:pPr lvl="1">
+              <a:spcBef>
+                <a:spcPts val="300"/>
+              </a:spcBef>
+            </a:pPr>
+            <a:r>
+              <a:rPr sz="1600">
+                <a:solidFill>
+                  <a:srgbClr val="191919"/>
+                </a:solidFill>
+                <a:latin typeface="Arial"/>
+              </a:rPr>
+              <a:t>Prior drugs: are other antidiabetic drugs common at baseline? (depends on your design)</a:t>
+            </a:r>
+          </a:p>
+          <a:p>
+            <a:pPr>
+              <a:spcBef>
+                <a:spcPts val="600"/>
+              </a:spcBef>
+            </a:pPr>
+            <a:r>
+              <a:rPr sz="1800">
+                <a:solidFill>
+                  <a:srgbClr val="191919"/>
+                </a:solidFill>
+                <a:latin typeface="Arial"/>
+              </a:rPr>
+              <a:t>Characterization is the first face-validity check — if the output looks wrong, revisit the definition</a:t>
+            </a:r>
+          </a:p>
+        </p:txBody>
+      </p:sp>
+    </p:spTree>
+  </p:cSld>
+  <p:clrMapOvr>
+    <a:masterClrMapping/>
+  </p:clrMapOvr>
+</p:sld>
+</file>
+
+<file path=ppt/slides/slide19.xml><?xml version="1.0" encoding="utf-8"?>
+<p:sld xmlns:a="http://schemas.openxmlformats.org/drawingml/2006/main" xmlns:p="http://schemas.openxmlformats.org/presentationml/2006/main" xmlns:r="http://schemas.openxmlformats.org/officeDocument/2006/relationships">
+  <p:cSld>
+    <p:spTree>
+      <p:nvGrpSpPr>
+        <p:cNvPr id="1" name=""/>
+        <p:cNvGrpSpPr/>
+        <p:nvPr/>
+      </p:nvGrpSpPr>
+      <p:grpSpPr/>
+      <p:sp>
+        <p:nvSpPr>
+          <p:cNvPr id="2" name="Rectangle 1"/>
+          <p:cNvSpPr/>
+          <p:nvPr/>
+        </p:nvSpPr>
+        <p:spPr>
+          <a:xfrm>
+            <a:off x="0" y="0"/>
+            <a:ext cx="12188952" cy="960120"/>
+          </a:xfrm>
+          <a:prstGeom prst="rect">
+            <a:avLst/>
+          </a:prstGeom>
+          <a:solidFill>
+            <a:srgbClr val="20425A"/>
+          </a:solidFill>
+          <a:ln>
+            <a:noFill/>
+          </a:ln>
+        </p:spPr>
+        <p:style>
+          <a:lnRef idx="1">
+            <a:schemeClr val="accent1"/>
+          </a:lnRef>
+          <a:fillRef idx="3">
+            <a:schemeClr val="accent1"/>
+          </a:fillRef>
+          <a:effectRef idx="2">
+            <a:schemeClr val="accent1"/>
+          </a:effectRef>
+          <a:fontRef idx="minor">
+            <a:schemeClr val="lt1"/>
+          </a:fontRef>
+        </p:style>
+        <p:txBody>
+          <a:bodyPr rtlCol="0" anchor="ctr"/>
+          <a:lstStyle/>
+          <a:p>
+            <a:pPr algn="ctr"/>
+          </a:p>
+        </p:txBody>
+      </p:sp>
+      <p:sp>
+        <p:nvSpPr>
+          <p:cNvPr id="3" name="Rectangle 2"/>
+          <p:cNvSpPr/>
+          <p:nvPr/>
+        </p:nvSpPr>
+        <p:spPr>
+          <a:xfrm>
+            <a:off x="0" y="905256"/>
+            <a:ext cx="12188952" cy="54864"/>
+          </a:xfrm>
+          <a:prstGeom prst="rect">
+            <a:avLst/>
+          </a:prstGeom>
+          <a:solidFill>
+            <a:srgbClr val="904199"/>
+          </a:solidFill>
+          <a:ln>
+            <a:noFill/>
+          </a:ln>
+        </p:spPr>
+        <p:style>
+          <a:lnRef idx="1">
+            <a:schemeClr val="accent1"/>
+          </a:lnRef>
+          <a:fillRef idx="3">
+            <a:schemeClr val="accent1"/>
+          </a:fillRef>
+          <a:effectRef idx="2">
+            <a:schemeClr val="accent1"/>
+          </a:effectRef>
+          <a:fontRef idx="minor">
+            <a:schemeClr val="lt1"/>
+          </a:fontRef>
+        </p:style>
+        <p:txBody>
+          <a:bodyPr rtlCol="0" anchor="ctr"/>
+          <a:lstStyle/>
+          <a:p>
+            <a:pPr algn="ctr"/>
+          </a:p>
+        </p:txBody>
+      </p:sp>
+      <p:sp>
+        <p:nvSpPr>
+          <p:cNvPr id="4" name="TextBox 3"/>
+          <p:cNvSpPr txBox="1"/>
+          <p:nvPr/>
+        </p:nvSpPr>
+        <p:spPr>
+          <a:xfrm>
+            <a:off x="475488" y="137160"/>
+            <a:ext cx="11713464" cy="777240"/>
+          </a:xfrm>
+          <a:prstGeom prst="rect">
+            <a:avLst/>
+          </a:prstGeom>
+          <a:noFill/>
+        </p:spPr>
+        <p:txBody>
+          <a:bodyPr wrap="square">
+            <a:spAutoFit/>
+          </a:bodyPr>
+          <a:lstStyle/>
+          <a:p>
+            <a:pPr algn="l"/>
+            <a:r>
+              <a:rPr sz="2800" b="1" i="0">
+                <a:solidFill>
+                  <a:srgbClr val="FFFFFF"/>
+                </a:solidFill>
+                <a:latin typeface="Gotham Narrow"/>
+              </a:rPr>
+              <a:t>Exporting and Validating Cohort SQL</a:t>
+            </a:r>
+          </a:p>
+        </p:txBody>
+      </p:sp>
+      <p:sp>
+        <p:nvSpPr>
+          <p:cNvPr id="5" name="TextBox 4"/>
+          <p:cNvSpPr txBox="1"/>
+          <p:nvPr/>
+        </p:nvSpPr>
+        <p:spPr>
+          <a:xfrm>
+            <a:off x="475488" y="1097280"/>
+            <a:ext cx="11237976" cy="411480"/>
+          </a:xfrm>
+          <a:prstGeom prst="rect">
+            <a:avLst/>
+          </a:prstGeom>
+          <a:noFill/>
+        </p:spPr>
+        <p:txBody>
+          <a:bodyPr wrap="square">
+            <a:spAutoFit/>
+          </a:bodyPr>
+          <a:lstStyle/>
+          <a:p>
+            <a:pPr algn="l"/>
+            <a:r>
+              <a:rPr sz="1600" b="0" i="1">
                 <a:solidFill>
                   <a:srgbClr val="5A5A5A"/>
                 </a:solidFill>
-              </a:rPr>
-              <a:t>Next session: Day 4 · Data Extraction — turning your cohort into an analytic dataset</a:t>
+                <a:latin typeface="Arial"/>
+              </a:rPr>
+              <a:t>Export from ATLAS, then run a validation count in your SQL client:</a:t>
+            </a:r>
+          </a:p>
+        </p:txBody>
+      </p:sp>
+      <p:sp>
+        <p:nvSpPr>
+          <p:cNvPr id="6" name="Rectangle 5"/>
+          <p:cNvSpPr/>
+          <p:nvPr/>
+        </p:nvSpPr>
+        <p:spPr>
+          <a:xfrm>
+            <a:off x="475488" y="1527048"/>
+            <a:ext cx="11237976" cy="5074920"/>
+          </a:xfrm>
+          <a:prstGeom prst="rect">
+            <a:avLst/>
+          </a:prstGeom>
+          <a:solidFill>
+            <a:srgbClr val="1C1C2C"/>
+          </a:solidFill>
+          <a:ln w="9525">
+            <a:solidFill>
+              <a:srgbClr val="50506E"/>
+            </a:solidFill>
+          </a:ln>
+        </p:spPr>
+        <p:style>
+          <a:lnRef idx="1">
+            <a:schemeClr val="accent1"/>
+          </a:lnRef>
+          <a:fillRef idx="3">
+            <a:schemeClr val="accent1"/>
+          </a:fillRef>
+          <a:effectRef idx="2">
+            <a:schemeClr val="accent1"/>
+          </a:effectRef>
+          <a:fontRef idx="minor">
+            <a:schemeClr val="lt1"/>
+          </a:fontRef>
+        </p:style>
+        <p:txBody>
+          <a:bodyPr rtlCol="0" anchor="ctr"/>
+          <a:lstStyle/>
+          <a:p>
+            <a:pPr algn="ctr"/>
+          </a:p>
+        </p:txBody>
+      </p:sp>
+      <p:sp>
+        <p:nvSpPr>
+          <p:cNvPr id="7" name="TextBox 6"/>
+          <p:cNvSpPr txBox="1"/>
+          <p:nvPr/>
+        </p:nvSpPr>
+        <p:spPr>
+          <a:xfrm>
+            <a:off x="640080" y="1636776"/>
+            <a:ext cx="10908792" cy="4855464"/>
+          </a:xfrm>
+          <a:prstGeom prst="rect">
+            <a:avLst/>
+          </a:prstGeom>
+          <a:noFill/>
+        </p:spPr>
+        <p:txBody>
+          <a:bodyPr wrap="none">
+            <a:spAutoFit/>
+          </a:bodyPr>
+          <a:lstStyle/>
+          <a:p>
+            <a:pPr>
+              <a:spcBef>
+                <a:spcPts val="100"/>
+              </a:spcBef>
+            </a:pPr>
+            <a:r>
+              <a:rPr sz="1300">
+                <a:solidFill>
+                  <a:srgbClr val="D7D7D7"/>
+                </a:solidFill>
+                <a:latin typeface="Courier New"/>
+              </a:rPr>
+              <a:t>-- Step 1: In ATLAS, click Export → SQL (choose your dialect)</a:t>
+            </a:r>
+          </a:p>
+          <a:p>
+            <a:pPr>
+              <a:spcBef>
+                <a:spcPts val="100"/>
+              </a:spcBef>
+            </a:pPr>
+            <a:r>
+              <a:rPr sz="1300">
+                <a:solidFill>
+                  <a:srgbClr val="D7D7D7"/>
+                </a:solidFill>
+                <a:latin typeface="Courier New"/>
+              </a:rPr>
+              <a:t>-- Save the SQL and run it in your client to generate the cohort table</a:t>
+            </a:r>
+          </a:p>
+          <a:p>
+            <a:pPr>
+              <a:spcBef>
+                <a:spcPts val="100"/>
+              </a:spcBef>
+            </a:pPr>
+            <a:r>
+              <a:rPr sz="1300">
+                <a:solidFill>
+                  <a:srgbClr val="D7D7D7"/>
+                </a:solidFill>
+                <a:latin typeface="Courier New"/>
+              </a:rPr>
+              <a:t/>
+            </a:r>
+          </a:p>
+          <a:p>
+            <a:pPr>
+              <a:spcBef>
+                <a:spcPts val="100"/>
+              </a:spcBef>
+            </a:pPr>
+            <a:r>
+              <a:rPr sz="1300">
+                <a:solidFill>
+                  <a:srgbClr val="D7D7D7"/>
+                </a:solidFill>
+                <a:latin typeface="Courier New"/>
+              </a:rPr>
+              <a:t>-- Step 2: Validate the cohort count independently</a:t>
+            </a:r>
+          </a:p>
+          <a:p>
+            <a:pPr>
+              <a:spcBef>
+                <a:spcPts val="100"/>
+              </a:spcBef>
+            </a:pPr>
+            <a:r>
+              <a:rPr sz="1300">
+                <a:solidFill>
+                  <a:srgbClr val="D7D7D7"/>
+                </a:solidFill>
+                <a:latin typeface="Courier New"/>
+              </a:rPr>
+              <a:t>SELECT COUNT(DISTINCT subject_id) AS cohort_size</a:t>
+            </a:r>
+          </a:p>
+          <a:p>
+            <a:pPr>
+              <a:spcBef>
+                <a:spcPts val="100"/>
+              </a:spcBef>
+            </a:pPr>
+            <a:r>
+              <a:rPr sz="1300">
+                <a:solidFill>
+                  <a:srgbClr val="D7D7D7"/>
+                </a:solidFill>
+                <a:latin typeface="Courier New"/>
+              </a:rPr>
+              <a:t>FROM results.cohort</a:t>
+            </a:r>
+          </a:p>
+          <a:p>
+            <a:pPr>
+              <a:spcBef>
+                <a:spcPts val="100"/>
+              </a:spcBef>
+            </a:pPr>
+            <a:r>
+              <a:rPr sz="1300">
+                <a:solidFill>
+                  <a:srgbClr val="D7D7D7"/>
+                </a:solidFill>
+                <a:latin typeface="Courier New"/>
+              </a:rPr>
+              <a:t>WHERE cohort_definition_id = [your_cohort_id];</a:t>
+            </a:r>
+          </a:p>
+          <a:p>
+            <a:pPr>
+              <a:spcBef>
+                <a:spcPts val="100"/>
+              </a:spcBef>
+            </a:pPr>
+            <a:r>
+              <a:rPr sz="1300">
+                <a:solidFill>
+                  <a:srgbClr val="D7D7D7"/>
+                </a:solidFill>
+                <a:latin typeface="Courier New"/>
+              </a:rPr>
+              <a:t/>
+            </a:r>
+          </a:p>
+          <a:p>
+            <a:pPr>
+              <a:spcBef>
+                <a:spcPts val="100"/>
+              </a:spcBef>
+            </a:pPr>
+            <a:r>
+              <a:rPr sz="1300">
+                <a:solidFill>
+                  <a:srgbClr val="D7D7D7"/>
+                </a:solidFill>
+                <a:latin typeface="Courier New"/>
+              </a:rPr>
+              <a:t>-- Step 3: Compare to Atlas UI count</a:t>
+            </a:r>
+          </a:p>
+          <a:p>
+            <a:pPr>
+              <a:spcBef>
+                <a:spcPts val="100"/>
+              </a:spcBef>
+            </a:pPr>
+            <a:r>
+              <a:rPr sz="1300">
+                <a:solidFill>
+                  <a:srgbClr val="D7D7D7"/>
+                </a:solidFill>
+                <a:latin typeface="Courier New"/>
+              </a:rPr>
+              <a:t>-- If they match: your extraction path is trustworthy</a:t>
+            </a:r>
+          </a:p>
+          <a:p>
+            <a:pPr>
+              <a:spcBef>
+                <a:spcPts val="100"/>
+              </a:spcBef>
+            </a:pPr>
+            <a:r>
+              <a:rPr sz="1300">
+                <a:solidFill>
+                  <a:srgbClr val="D7D7D7"/>
+                </a:solidFill>
+                <a:latin typeface="Courier New"/>
+              </a:rPr>
+              <a:t>-- If they differ: check CDM version, results schema, vocabulary version</a:t>
             </a:r>
           </a:p>
         </p:txBody>
@@ -7075,13 +7898,13 @@
         <p:spPr>
           <a:xfrm>
             <a:off x="0" y="0"/>
-            <a:ext cx="12188952" cy="960120"/>
+            <a:ext cx="12188952" cy="6858000"/>
           </a:xfrm>
           <a:prstGeom prst="rect">
             <a:avLst/>
           </a:prstGeom>
           <a:solidFill>
-            <a:srgbClr val="4B2682"/>
+            <a:srgbClr val="20425A"/>
           </a:solidFill>
           <a:ln>
             <a:noFill/>
@@ -7117,14 +7940,14 @@
         </p:nvSpPr>
         <p:spPr>
           <a:xfrm>
-            <a:off x="0" y="923544"/>
-            <a:ext cx="12188952" cy="36576"/>
+            <a:off x="0" y="0"/>
+            <a:ext cx="12188952" cy="64008"/>
           </a:xfrm>
           <a:prstGeom prst="rect">
             <a:avLst/>
           </a:prstGeom>
           <a:solidFill>
-            <a:srgbClr val="7B4FA8"/>
+            <a:srgbClr val="904199"/>
           </a:solidFill>
           <a:ln>
             <a:noFill/>
@@ -7154,88 +7977,20 @@
       </p:sp>
       <p:sp>
         <p:nvSpPr>
-          <p:cNvPr id="4" name="TextBox 3"/>
-          <p:cNvSpPr txBox="1"/>
-          <p:nvPr/>
-        </p:nvSpPr>
-        <p:spPr>
-          <a:xfrm>
-            <a:off x="475488" y="137160"/>
-            <a:ext cx="11713464" cy="777240"/>
-          </a:xfrm>
-          <a:prstGeom prst="rect">
-            <a:avLst/>
-          </a:prstGeom>
-          <a:noFill/>
-        </p:spPr>
-        <p:txBody>
-          <a:bodyPr wrap="square">
-            <a:spAutoFit/>
-          </a:bodyPr>
-          <a:lstStyle/>
-          <a:p>
-            <a:pPr algn="l"/>
-            <a:r>
-              <a:rPr sz="2800" b="1" i="0">
-                <a:solidFill>
-                  <a:srgbClr val="FFFFFF"/>
-                </a:solidFill>
-              </a:rPr>
-              <a:t>Learning Objectives</a:t>
-            </a:r>
-          </a:p>
-        </p:txBody>
-      </p:sp>
-      <p:sp>
-        <p:nvSpPr>
-          <p:cNvPr id="5" name="TextBox 4"/>
-          <p:cNvSpPr txBox="1"/>
-          <p:nvPr/>
-        </p:nvSpPr>
-        <p:spPr>
-          <a:xfrm>
-            <a:off x="475488" y="1124712"/>
-            <a:ext cx="11237976" cy="411480"/>
-          </a:xfrm>
-          <a:prstGeom prst="rect">
-            <a:avLst/>
-          </a:prstGeom>
-          <a:noFill/>
-        </p:spPr>
-        <p:txBody>
-          <a:bodyPr wrap="square">
-            <a:spAutoFit/>
-          </a:bodyPr>
-          <a:lstStyle/>
-          <a:p>
-            <a:pPr algn="l"/>
-            <a:r>
-              <a:rPr sz="1700" b="0" i="1">
-                <a:solidFill>
-                  <a:srgbClr val="5A5A5A"/>
-                </a:solidFill>
-              </a:rPr>
-              <a:t>By the end of this session, you will be able to:</a:t>
-            </a:r>
-          </a:p>
-        </p:txBody>
-      </p:sp>
-      <p:sp>
-        <p:nvSpPr>
-          <p:cNvPr id="6" name="Rectangle 5"/>
+          <p:cNvPr id="4" name="Rectangle 3"/>
           <p:cNvSpPr/>
           <p:nvPr/>
         </p:nvSpPr>
         <p:spPr>
           <a:xfrm>
-            <a:off x="475488" y="1581912"/>
-            <a:ext cx="365760" cy="365760"/>
+            <a:off x="0" y="6793992"/>
+            <a:ext cx="12188952" cy="64008"/>
           </a:xfrm>
           <a:prstGeom prst="rect">
             <a:avLst/>
           </a:prstGeom>
           <a:solidFill>
-            <a:srgbClr val="7B4FA8"/>
+            <a:srgbClr val="904199"/>
           </a:solidFill>
           <a:ln>
             <a:noFill/>
@@ -7265,14 +8020,14 @@
       </p:sp>
       <p:sp>
         <p:nvSpPr>
-          <p:cNvPr id="7" name="TextBox 6"/>
+          <p:cNvPr id="5" name="TextBox 4"/>
           <p:cNvSpPr txBox="1"/>
           <p:nvPr/>
         </p:nvSpPr>
         <p:spPr>
           <a:xfrm>
-            <a:off x="475488" y="1609344"/>
-            <a:ext cx="365760" cy="338328"/>
+            <a:off x="475488" y="1554480"/>
+            <a:ext cx="11237976" cy="1188720"/>
           </a:xfrm>
           <a:prstGeom prst="rect">
             <a:avLst/>
@@ -7285,28 +8040,29 @@
           </a:bodyPr>
           <a:lstStyle/>
           <a:p>
-            <a:pPr algn="ctr"/>
-            <a:r>
-              <a:rPr sz="1500" b="1" i="0">
+            <a:pPr algn="l"/>
+            <a:r>
+              <a:rPr sz="4800" b="1" i="0">
                 <a:solidFill>
                   <a:srgbClr val="FFFFFF"/>
                 </a:solidFill>
-              </a:rPr>
-              <a:t>1</a:t>
-            </a:r>
-          </a:p>
-        </p:txBody>
-      </p:sp>
-      <p:sp>
-        <p:nvSpPr>
-          <p:cNvPr id="8" name="TextBox 7"/>
+                <a:latin typeface="Gotham Narrow"/>
+              </a:rPr>
+              <a:t>Thank You</a:t>
+            </a:r>
+          </a:p>
+        </p:txBody>
+      </p:sp>
+      <p:sp>
+        <p:nvSpPr>
+          <p:cNvPr id="6" name="TextBox 5"/>
           <p:cNvSpPr txBox="1"/>
           <p:nvPr/>
         </p:nvSpPr>
         <p:spPr>
           <a:xfrm>
-            <a:off x="987552" y="1581912"/>
-            <a:ext cx="10680192" cy="594360"/>
+            <a:off x="475488" y="3017520"/>
+            <a:ext cx="11237976" cy="2743200"/>
           </a:xfrm>
           <a:prstGeom prst="rect">
             <a:avLst/>
@@ -7319,34 +8075,73 @@
           </a:bodyPr>
           <a:lstStyle/>
           <a:p>
-            <a:pPr algn="l"/>
-            <a:r>
-              <a:rPr sz="1800" b="0" i="0">
-                <a:solidFill>
-                  <a:srgbClr val="191919"/>
-                </a:solidFill>
-              </a:rPr>
-              <a:t>Define an OHDSI cohort and explain how it differs from a simple code list</a:t>
-            </a:r>
-          </a:p>
-        </p:txBody>
-      </p:sp>
-      <p:sp>
-        <p:nvSpPr>
-          <p:cNvPr id="9" name="Rectangle 8"/>
+            <a:pPr>
+              <a:spcBef>
+                <a:spcPts val="800"/>
+              </a:spcBef>
+            </a:pPr>
+            <a:r>
+              <a:rPr sz="2000">
+                <a:solidFill>
+                  <a:srgbClr val="D9C4E6"/>
+                </a:solidFill>
+                <a:latin typeface="Arial"/>
+              </a:rPr>
+              <a:t>Thank you for being here and for investing your time in this work.</a:t>
+            </a:r>
+          </a:p>
+          <a:p>
+            <a:pPr>
+              <a:spcBef>
+                <a:spcPts val="800"/>
+              </a:spcBef>
+            </a:pPr>
+            <a:r>
+              <a:rPr sz="2000">
+                <a:solidFill>
+                  <a:srgbClr val="D9C4E6"/>
+                </a:solidFill>
+                <a:latin typeface="Arial"/>
+              </a:rPr>
+              <a:t>This program stands on the shoulders of the global OHDSI community and everyone who contributes to open, reproducible health data science.</a:t>
+            </a:r>
+          </a:p>
+        </p:txBody>
+      </p:sp>
+    </p:spTree>
+  </p:cSld>
+  <p:clrMapOvr>
+    <a:masterClrMapping/>
+  </p:clrMapOvr>
+</p:sld>
+</file>
+
+<file path=ppt/slides/slide20.xml><?xml version="1.0" encoding="utf-8"?>
+<p:sld xmlns:a="http://schemas.openxmlformats.org/drawingml/2006/main" xmlns:p="http://schemas.openxmlformats.org/presentationml/2006/main" xmlns:r="http://schemas.openxmlformats.org/officeDocument/2006/relationships">
+  <p:cSld>
+    <p:spTree>
+      <p:nvGrpSpPr>
+        <p:cNvPr id="1" name=""/>
+        <p:cNvGrpSpPr/>
+        <p:nvPr/>
+      </p:nvGrpSpPr>
+      <p:grpSpPr/>
+      <p:sp>
+        <p:nvSpPr>
+          <p:cNvPr id="2" name="Rectangle 1"/>
           <p:cNvSpPr/>
           <p:nvPr/>
         </p:nvSpPr>
         <p:spPr>
           <a:xfrm>
-            <a:off x="475488" y="2249424"/>
-            <a:ext cx="365760" cy="365760"/>
+            <a:off x="0" y="0"/>
+            <a:ext cx="12188952" cy="960120"/>
           </a:xfrm>
           <a:prstGeom prst="rect">
             <a:avLst/>
           </a:prstGeom>
           <a:solidFill>
-            <a:srgbClr val="7B4FA8"/>
+            <a:srgbClr val="20425A"/>
           </a:solidFill>
           <a:ln>
             <a:noFill/>
@@ -7376,88 +8171,20 @@
       </p:sp>
       <p:sp>
         <p:nvSpPr>
-          <p:cNvPr id="10" name="TextBox 9"/>
-          <p:cNvSpPr txBox="1"/>
-          <p:nvPr/>
-        </p:nvSpPr>
-        <p:spPr>
-          <a:xfrm>
-            <a:off x="475488" y="2276856"/>
-            <a:ext cx="365760" cy="338328"/>
-          </a:xfrm>
-          <a:prstGeom prst="rect">
-            <a:avLst/>
-          </a:prstGeom>
-          <a:noFill/>
-        </p:spPr>
-        <p:txBody>
-          <a:bodyPr wrap="square">
-            <a:spAutoFit/>
-          </a:bodyPr>
-          <a:lstStyle/>
-          <a:p>
-            <a:pPr algn="ctr"/>
-            <a:r>
-              <a:rPr sz="1500" b="1" i="0">
-                <a:solidFill>
-                  <a:srgbClr val="FFFFFF"/>
-                </a:solidFill>
-              </a:rPr>
-              <a:t>2</a:t>
-            </a:r>
-          </a:p>
-        </p:txBody>
-      </p:sp>
-      <p:sp>
-        <p:nvSpPr>
-          <p:cNvPr id="11" name="TextBox 10"/>
-          <p:cNvSpPr txBox="1"/>
-          <p:nvPr/>
-        </p:nvSpPr>
-        <p:spPr>
-          <a:xfrm>
-            <a:off x="987552" y="2249424"/>
-            <a:ext cx="10680192" cy="594360"/>
-          </a:xfrm>
-          <a:prstGeom prst="rect">
-            <a:avLst/>
-          </a:prstGeom>
-          <a:noFill/>
-        </p:spPr>
-        <p:txBody>
-          <a:bodyPr wrap="square">
-            <a:spAutoFit/>
-          </a:bodyPr>
-          <a:lstStyle/>
-          <a:p>
-            <a:pPr algn="l"/>
-            <a:r>
-              <a:rPr sz="1800" b="0" i="0">
-                <a:solidFill>
-                  <a:srgbClr val="191919"/>
-                </a:solidFill>
-              </a:rPr>
-              <a:t>Identify and apply the four parts: entry event, concept sets, inclusion criteria, and exit</a:t>
-            </a:r>
-          </a:p>
-        </p:txBody>
-      </p:sp>
-      <p:sp>
-        <p:nvSpPr>
-          <p:cNvPr id="12" name="Rectangle 11"/>
+          <p:cNvPr id="3" name="Rectangle 2"/>
           <p:cNvSpPr/>
           <p:nvPr/>
         </p:nvSpPr>
         <p:spPr>
           <a:xfrm>
-            <a:off x="475488" y="2916936"/>
-            <a:ext cx="365760" cy="365760"/>
+            <a:off x="0" y="905256"/>
+            <a:ext cx="12188952" cy="54864"/>
           </a:xfrm>
           <a:prstGeom prst="rect">
             <a:avLst/>
           </a:prstGeom>
           <a:solidFill>
-            <a:srgbClr val="7B4FA8"/>
+            <a:srgbClr val="904199"/>
           </a:solidFill>
           <a:ln>
             <a:noFill/>
@@ -7487,14 +8214,14 @@
       </p:sp>
       <p:sp>
         <p:nvSpPr>
-          <p:cNvPr id="13" name="TextBox 12"/>
+          <p:cNvPr id="4" name="TextBox 3"/>
           <p:cNvSpPr txBox="1"/>
           <p:nvPr/>
         </p:nvSpPr>
         <p:spPr>
           <a:xfrm>
-            <a:off x="475488" y="2944368"/>
-            <a:ext cx="365760" cy="338328"/>
+            <a:off x="475488" y="137160"/>
+            <a:ext cx="11713464" cy="777240"/>
           </a:xfrm>
           <a:prstGeom prst="rect">
             <a:avLst/>
@@ -7507,71 +8234,40 @@
           </a:bodyPr>
           <a:lstStyle/>
           <a:p>
-            <a:pPr algn="ctr"/>
-            <a:r>
-              <a:rPr sz="1500" b="1" i="0">
+            <a:pPr algn="l"/>
+            <a:r>
+              <a:rPr sz="2800" b="1" i="0">
                 <a:solidFill>
                   <a:srgbClr val="FFFFFF"/>
                 </a:solidFill>
-              </a:rPr>
-              <a:t>3</a:t>
-            </a:r>
-          </a:p>
-        </p:txBody>
-      </p:sp>
-      <p:sp>
-        <p:nvSpPr>
-          <p:cNvPr id="14" name="TextBox 13"/>
-          <p:cNvSpPr txBox="1"/>
-          <p:nvPr/>
-        </p:nvSpPr>
-        <p:spPr>
-          <a:xfrm>
-            <a:off x="987552" y="2916936"/>
-            <a:ext cx="10680192" cy="594360"/>
-          </a:xfrm>
-          <a:prstGeom prst="rect">
-            <a:avLst/>
-          </a:prstGeom>
-          <a:noFill/>
-        </p:spPr>
-        <p:txBody>
-          <a:bodyPr wrap="square">
-            <a:spAutoFit/>
-          </a:bodyPr>
-          <a:lstStyle/>
-          <a:p>
-            <a:pPr algn="l"/>
-            <a:r>
-              <a:rPr sz="1800" b="0" i="0">
-                <a:solidFill>
-                  <a:srgbClr val="191919"/>
-                </a:solidFill>
-              </a:rPr>
-              <a:t>Apply temporal logic correctly in inclusion and exclusion rules</a:t>
-            </a:r>
-          </a:p>
-        </p:txBody>
-      </p:sp>
-      <p:sp>
-        <p:nvSpPr>
-          <p:cNvPr id="15" name="Rectangle 14"/>
+                <a:latin typeface="Gotham Narrow"/>
+              </a:rPr>
+              <a:t>Key Takeaways</a:t>
+            </a:r>
+          </a:p>
+        </p:txBody>
+      </p:sp>
+      <p:sp>
+        <p:nvSpPr>
+          <p:cNvPr id="5" name="Rectangle 4"/>
           <p:cNvSpPr/>
           <p:nvPr/>
         </p:nvSpPr>
         <p:spPr>
           <a:xfrm>
-            <a:off x="475488" y="3584448"/>
-            <a:ext cx="365760" cy="365760"/>
+            <a:off x="475488" y="1170432"/>
+            <a:ext cx="11237976" cy="780288"/>
           </a:xfrm>
           <a:prstGeom prst="rect">
             <a:avLst/>
           </a:prstGeom>
           <a:solidFill>
-            <a:srgbClr val="7B4FA8"/>
+            <a:srgbClr val="ECDFF3"/>
           </a:solidFill>
-          <a:ln>
-            <a:noFill/>
+          <a:ln w="9525">
+            <a:solidFill>
+              <a:srgbClr val="904199"/>
+            </a:solidFill>
           </a:ln>
         </p:spPr>
         <p:style>
@@ -7598,14 +8294,14 @@
       </p:sp>
       <p:sp>
         <p:nvSpPr>
-          <p:cNvPr id="16" name="TextBox 15"/>
+          <p:cNvPr id="6" name="TextBox 5"/>
           <p:cNvSpPr txBox="1"/>
           <p:nvPr/>
         </p:nvSpPr>
         <p:spPr>
           <a:xfrm>
-            <a:off x="475488" y="3611880"/>
-            <a:ext cx="365760" cy="338328"/>
+            <a:off x="585216" y="1234440"/>
+            <a:ext cx="11018520" cy="670560"/>
           </a:xfrm>
           <a:prstGeom prst="rect">
             <a:avLst/>
@@ -7618,71 +8314,40 @@
           </a:bodyPr>
           <a:lstStyle/>
           <a:p>
-            <a:pPr algn="ctr"/>
-            <a:r>
-              <a:rPr sz="1500" b="1" i="0">
-                <a:solidFill>
-                  <a:srgbClr val="FFFFFF"/>
-                </a:solidFill>
-              </a:rPr>
-              <a:t>4</a:t>
-            </a:r>
-          </a:p>
-        </p:txBody>
-      </p:sp>
-      <p:sp>
-        <p:nvSpPr>
-          <p:cNvPr id="17" name="TextBox 16"/>
-          <p:cNvSpPr txBox="1"/>
-          <p:nvPr/>
-        </p:nvSpPr>
-        <p:spPr>
-          <a:xfrm>
-            <a:off x="987552" y="3584448"/>
-            <a:ext cx="10680192" cy="594360"/>
-          </a:xfrm>
-          <a:prstGeom prst="rect">
-            <a:avLst/>
-          </a:prstGeom>
-          <a:noFill/>
-        </p:spPr>
-        <p:txBody>
-          <a:bodyPr wrap="square">
-            <a:spAutoFit/>
-          </a:bodyPr>
-          <a:lstStyle/>
-          <a:p>
             <a:pPr algn="l"/>
             <a:r>
               <a:rPr sz="1800" b="0" i="0">
                 <a:solidFill>
                   <a:srgbClr val="191919"/>
                 </a:solidFill>
-              </a:rPr>
-              <a:t>Build and generate a cohort in ATLAS step by step</a:t>
-            </a:r>
-          </a:p>
-        </p:txBody>
-      </p:sp>
-      <p:sp>
-        <p:nvSpPr>
-          <p:cNvPr id="18" name="Rectangle 17"/>
+                <a:latin typeface="Arial"/>
+              </a:rPr>
+              <a:t>✓  A cohort is a rule set — not a list. Same definition, any OMOP CDM, comparable result</a:t>
+            </a:r>
+          </a:p>
+        </p:txBody>
+      </p:sp>
+      <p:sp>
+        <p:nvSpPr>
+          <p:cNvPr id="7" name="Rectangle 6"/>
           <p:cNvSpPr/>
           <p:nvPr/>
         </p:nvSpPr>
         <p:spPr>
           <a:xfrm>
-            <a:off x="475488" y="4251960"/>
-            <a:ext cx="365760" cy="365760"/>
+            <a:off x="475488" y="2042160"/>
+            <a:ext cx="11237976" cy="780288"/>
           </a:xfrm>
           <a:prstGeom prst="rect">
             <a:avLst/>
           </a:prstGeom>
           <a:solidFill>
-            <a:srgbClr val="7B4FA8"/>
+            <a:srgbClr val="F8F2FF"/>
           </a:solidFill>
-          <a:ln>
-            <a:noFill/>
+          <a:ln w="9525">
+            <a:solidFill>
+              <a:srgbClr val="904199"/>
+            </a:solidFill>
           </a:ln>
         </p:spPr>
         <p:style>
@@ -7709,14 +8374,14 @@
       </p:sp>
       <p:sp>
         <p:nvSpPr>
-          <p:cNvPr id="19" name="TextBox 18"/>
+          <p:cNvPr id="8" name="TextBox 7"/>
           <p:cNvSpPr txBox="1"/>
           <p:nvPr/>
         </p:nvSpPr>
         <p:spPr>
           <a:xfrm>
-            <a:off x="475488" y="4279392"/>
-            <a:ext cx="365760" cy="338328"/>
+            <a:off x="585216" y="2106168"/>
+            <a:ext cx="11018520" cy="670560"/>
           </a:xfrm>
           <a:prstGeom prst="rect">
             <a:avLst/>
@@ -7729,71 +8394,40 @@
           </a:bodyPr>
           <a:lstStyle/>
           <a:p>
-            <a:pPr algn="ctr"/>
-            <a:r>
-              <a:rPr sz="1500" b="1" i="0">
-                <a:solidFill>
-                  <a:srgbClr val="FFFFFF"/>
-                </a:solidFill>
-              </a:rPr>
-              <a:t>5</a:t>
-            </a:r>
-          </a:p>
-        </p:txBody>
-      </p:sp>
-      <p:sp>
-        <p:nvSpPr>
-          <p:cNvPr id="20" name="TextBox 19"/>
-          <p:cNvSpPr txBox="1"/>
-          <p:nvPr/>
-        </p:nvSpPr>
-        <p:spPr>
-          <a:xfrm>
-            <a:off x="987552" y="4251960"/>
-            <a:ext cx="10680192" cy="594360"/>
-          </a:xfrm>
-          <a:prstGeom prst="rect">
-            <a:avLst/>
-          </a:prstGeom>
-          <a:noFill/>
-        </p:spPr>
-        <p:txBody>
-          <a:bodyPr wrap="square">
-            <a:spAutoFit/>
-          </a:bodyPr>
-          <a:lstStyle/>
-          <a:p>
             <a:pPr algn="l"/>
             <a:r>
               <a:rPr sz="1800" b="0" i="0">
                 <a:solidFill>
                   <a:srgbClr val="191919"/>
                 </a:solidFill>
-              </a:rPr>
-              <a:t>Read an attrition report and identify logic errors from the counts</a:t>
-            </a:r>
-          </a:p>
-        </p:txBody>
-      </p:sp>
-      <p:sp>
-        <p:nvSpPr>
-          <p:cNvPr id="21" name="Rectangle 20"/>
+                <a:latin typeface="Arial"/>
+              </a:rPr>
+              <a:t>✓  Every cohort has four parts: entry event, concept sets, inclusion criteria, exit</a:t>
+            </a:r>
+          </a:p>
+        </p:txBody>
+      </p:sp>
+      <p:sp>
+        <p:nvSpPr>
+          <p:cNvPr id="9" name="Rectangle 8"/>
           <p:cNvSpPr/>
           <p:nvPr/>
         </p:nvSpPr>
         <p:spPr>
           <a:xfrm>
-            <a:off x="475488" y="4919472"/>
-            <a:ext cx="365760" cy="365760"/>
+            <a:off x="475488" y="2913888"/>
+            <a:ext cx="11237976" cy="780288"/>
           </a:xfrm>
           <a:prstGeom prst="rect">
             <a:avLst/>
           </a:prstGeom>
           <a:solidFill>
-            <a:srgbClr val="7B4FA8"/>
+            <a:srgbClr val="ECDFF3"/>
           </a:solidFill>
-          <a:ln>
-            <a:noFill/>
+          <a:ln w="9525">
+            <a:solidFill>
+              <a:srgbClr val="904199"/>
+            </a:solidFill>
           </a:ln>
         </p:spPr>
         <p:style>
@@ -7820,14 +8454,14 @@
       </p:sp>
       <p:sp>
         <p:nvSpPr>
-          <p:cNvPr id="22" name="TextBox 21"/>
+          <p:cNvPr id="10" name="TextBox 9"/>
           <p:cNvSpPr txBox="1"/>
           <p:nvPr/>
         </p:nvSpPr>
         <p:spPr>
           <a:xfrm>
-            <a:off x="475488" y="4946904"/>
-            <a:ext cx="365760" cy="338328"/>
+            <a:off x="585216" y="2977896"/>
+            <a:ext cx="11018520" cy="670560"/>
           </a:xfrm>
           <a:prstGeom prst="rect">
             <a:avLst/>
@@ -7840,28 +8474,74 @@
           </a:bodyPr>
           <a:lstStyle/>
           <a:p>
+            <a:pPr algn="l"/>
+            <a:r>
+              <a:rPr sz="1800" b="0" i="0">
+                <a:solidFill>
+                  <a:srgbClr val="191919"/>
+                </a:solidFill>
+                <a:latin typeface="Arial"/>
+              </a:rPr>
+              <a:t>✓  Temporal logic is the most common source of errors — review the attrition report carefully</a:t>
+            </a:r>
+          </a:p>
+        </p:txBody>
+      </p:sp>
+      <p:sp>
+        <p:nvSpPr>
+          <p:cNvPr id="11" name="Rectangle 10"/>
+          <p:cNvSpPr/>
+          <p:nvPr/>
+        </p:nvSpPr>
+        <p:spPr>
+          <a:xfrm>
+            <a:off x="475488" y="3785616"/>
+            <a:ext cx="11237976" cy="780288"/>
+          </a:xfrm>
+          <a:prstGeom prst="rect">
+            <a:avLst/>
+          </a:prstGeom>
+          <a:solidFill>
+            <a:srgbClr val="F8F2FF"/>
+          </a:solidFill>
+          <a:ln w="9525">
+            <a:solidFill>
+              <a:srgbClr val="904199"/>
+            </a:solidFill>
+          </a:ln>
+        </p:spPr>
+        <p:style>
+          <a:lnRef idx="1">
+            <a:schemeClr val="accent1"/>
+          </a:lnRef>
+          <a:fillRef idx="3">
+            <a:schemeClr val="accent1"/>
+          </a:fillRef>
+          <a:effectRef idx="2">
+            <a:schemeClr val="accent1"/>
+          </a:effectRef>
+          <a:fontRef idx="minor">
+            <a:schemeClr val="lt1"/>
+          </a:fontRef>
+        </p:style>
+        <p:txBody>
+          <a:bodyPr rtlCol="0" anchor="ctr"/>
+          <a:lstStyle/>
+          <a:p>
             <a:pPr algn="ctr"/>
-            <a:r>
-              <a:rPr sz="1500" b="1" i="0">
-                <a:solidFill>
-                  <a:srgbClr val="FFFFFF"/>
-                </a:solidFill>
-              </a:rPr>
-              <a:t>6</a:t>
-            </a:r>
-          </a:p>
-        </p:txBody>
-      </p:sp>
-      <p:sp>
-        <p:nvSpPr>
-          <p:cNvPr id="23" name="TextBox 22"/>
+          </a:p>
+        </p:txBody>
+      </p:sp>
+      <p:sp>
+        <p:nvSpPr>
+          <p:cNvPr id="12" name="TextBox 11"/>
           <p:cNvSpPr txBox="1"/>
           <p:nvPr/>
         </p:nvSpPr>
         <p:spPr>
           <a:xfrm>
-            <a:off x="987552" y="4919472"/>
-            <a:ext cx="10680192" cy="594360"/>
+            <a:off x="585216" y="3849624"/>
+            <a:ext cx="11018520" cy="670560"/>
           </a:xfrm>
           <a:prstGeom prst="rect">
             <a:avLst/>
@@ -7880,8 +8560,491 @@
                 <a:solidFill>
                   <a:srgbClr val="191919"/>
                 </a:solidFill>
-              </a:rPr>
-              <a:t>Characterize a generated cohort and interpret the output</a:t>
+                <a:latin typeface="Arial"/>
+              </a:rPr>
+              <a:t>✓  ATLAS is the primary tool for cohort building: graphical, version-controlled, exportable</a:t>
+            </a:r>
+          </a:p>
+        </p:txBody>
+      </p:sp>
+      <p:sp>
+        <p:nvSpPr>
+          <p:cNvPr id="13" name="Rectangle 12"/>
+          <p:cNvSpPr/>
+          <p:nvPr/>
+        </p:nvSpPr>
+        <p:spPr>
+          <a:xfrm>
+            <a:off x="475488" y="4657344"/>
+            <a:ext cx="11237976" cy="780288"/>
+          </a:xfrm>
+          <a:prstGeom prst="rect">
+            <a:avLst/>
+          </a:prstGeom>
+          <a:solidFill>
+            <a:srgbClr val="ECDFF3"/>
+          </a:solidFill>
+          <a:ln w="9525">
+            <a:solidFill>
+              <a:srgbClr val="904199"/>
+            </a:solidFill>
+          </a:ln>
+        </p:spPr>
+        <p:style>
+          <a:lnRef idx="1">
+            <a:schemeClr val="accent1"/>
+          </a:lnRef>
+          <a:fillRef idx="3">
+            <a:schemeClr val="accent1"/>
+          </a:fillRef>
+          <a:effectRef idx="2">
+            <a:schemeClr val="accent1"/>
+          </a:effectRef>
+          <a:fontRef idx="minor">
+            <a:schemeClr val="lt1"/>
+          </a:fontRef>
+        </p:style>
+        <p:txBody>
+          <a:bodyPr rtlCol="0" anchor="ctr"/>
+          <a:lstStyle/>
+          <a:p>
+            <a:pPr algn="ctr"/>
+          </a:p>
+        </p:txBody>
+      </p:sp>
+      <p:sp>
+        <p:nvSpPr>
+          <p:cNvPr id="14" name="TextBox 13"/>
+          <p:cNvSpPr txBox="1"/>
+          <p:nvPr/>
+        </p:nvSpPr>
+        <p:spPr>
+          <a:xfrm>
+            <a:off x="585216" y="4721352"/>
+            <a:ext cx="11018520" cy="670560"/>
+          </a:xfrm>
+          <a:prstGeom prst="rect">
+            <a:avLst/>
+          </a:prstGeom>
+          <a:noFill/>
+        </p:spPr>
+        <p:txBody>
+          <a:bodyPr wrap="square">
+            <a:spAutoFit/>
+          </a:bodyPr>
+          <a:lstStyle/>
+          <a:p>
+            <a:pPr algn="l"/>
+            <a:r>
+              <a:rPr sz="1800" b="0" i="0">
+                <a:solidFill>
+                  <a:srgbClr val="191919"/>
+                </a:solidFill>
+                <a:latin typeface="Arial"/>
+              </a:rPr>
+              <a:t>✓  Characterization is the first sanity check: does the population look like what you intended?</a:t>
+            </a:r>
+          </a:p>
+        </p:txBody>
+      </p:sp>
+      <p:sp>
+        <p:nvSpPr>
+          <p:cNvPr id="15" name="Rectangle 14"/>
+          <p:cNvSpPr/>
+          <p:nvPr/>
+        </p:nvSpPr>
+        <p:spPr>
+          <a:xfrm>
+            <a:off x="475488" y="5529072"/>
+            <a:ext cx="11237976" cy="780288"/>
+          </a:xfrm>
+          <a:prstGeom prst="rect">
+            <a:avLst/>
+          </a:prstGeom>
+          <a:solidFill>
+            <a:srgbClr val="F8F2FF"/>
+          </a:solidFill>
+          <a:ln w="9525">
+            <a:solidFill>
+              <a:srgbClr val="904199"/>
+            </a:solidFill>
+          </a:ln>
+        </p:spPr>
+        <p:style>
+          <a:lnRef idx="1">
+            <a:schemeClr val="accent1"/>
+          </a:lnRef>
+          <a:fillRef idx="3">
+            <a:schemeClr val="accent1"/>
+          </a:fillRef>
+          <a:effectRef idx="2">
+            <a:schemeClr val="accent1"/>
+          </a:effectRef>
+          <a:fontRef idx="minor">
+            <a:schemeClr val="lt1"/>
+          </a:fontRef>
+        </p:style>
+        <p:txBody>
+          <a:bodyPr rtlCol="0" anchor="ctr"/>
+          <a:lstStyle/>
+          <a:p>
+            <a:pPr algn="ctr"/>
+          </a:p>
+        </p:txBody>
+      </p:sp>
+      <p:sp>
+        <p:nvSpPr>
+          <p:cNvPr id="16" name="TextBox 15"/>
+          <p:cNvSpPr txBox="1"/>
+          <p:nvPr/>
+        </p:nvSpPr>
+        <p:spPr>
+          <a:xfrm>
+            <a:off x="585216" y="5593080"/>
+            <a:ext cx="11018520" cy="670560"/>
+          </a:xfrm>
+          <a:prstGeom prst="rect">
+            <a:avLst/>
+          </a:prstGeom>
+          <a:noFill/>
+        </p:spPr>
+        <p:txBody>
+          <a:bodyPr wrap="square">
+            <a:spAutoFit/>
+          </a:bodyPr>
+          <a:lstStyle/>
+          <a:p>
+            <a:pPr algn="l"/>
+            <a:r>
+              <a:rPr sz="1800" b="0" i="0">
+                <a:solidFill>
+                  <a:srgbClr val="191919"/>
+                </a:solidFill>
+                <a:latin typeface="Arial"/>
+              </a:rPr>
+              <a:t>✓  Always validate cohort counts against your SQL client — if they disagree, investigate before analysis</a:t>
+            </a:r>
+          </a:p>
+        </p:txBody>
+      </p:sp>
+      <p:sp>
+        <p:nvSpPr>
+          <p:cNvPr id="17" name="TextBox 16"/>
+          <p:cNvSpPr txBox="1"/>
+          <p:nvPr/>
+        </p:nvSpPr>
+        <p:spPr>
+          <a:xfrm>
+            <a:off x="475488" y="6428232"/>
+            <a:ext cx="11237976" cy="347472"/>
+          </a:xfrm>
+          <a:prstGeom prst="rect">
+            <a:avLst/>
+          </a:prstGeom>
+          <a:noFill/>
+        </p:spPr>
+        <p:txBody>
+          <a:bodyPr wrap="square">
+            <a:spAutoFit/>
+          </a:bodyPr>
+          <a:lstStyle/>
+          <a:p>
+            <a:pPr algn="l"/>
+            <a:r>
+              <a:rPr sz="1400" b="0" i="1">
+                <a:solidFill>
+                  <a:srgbClr val="5A5A5A"/>
+                </a:solidFill>
+                <a:latin typeface="Arial"/>
+              </a:rPr>
+              <a:t>Next session: Day 4 · Data Extraction — turning your cohort into an analytic dataset</a:t>
+            </a:r>
+          </a:p>
+        </p:txBody>
+      </p:sp>
+    </p:spTree>
+  </p:cSld>
+  <p:clrMapOvr>
+    <a:masterClrMapping/>
+  </p:clrMapOvr>
+</p:sld>
+</file>
+
+<file path=ppt/slides/slide21.xml><?xml version="1.0" encoding="utf-8"?>
+<p:sld xmlns:a="http://schemas.openxmlformats.org/drawingml/2006/main" xmlns:p="http://schemas.openxmlformats.org/presentationml/2006/main" xmlns:r="http://schemas.openxmlformats.org/officeDocument/2006/relationships">
+  <p:cSld>
+    <p:spTree>
+      <p:nvGrpSpPr>
+        <p:cNvPr id="1" name=""/>
+        <p:cNvGrpSpPr/>
+        <p:nvPr/>
+      </p:nvGrpSpPr>
+      <p:grpSpPr/>
+      <p:sp>
+        <p:nvSpPr>
+          <p:cNvPr id="2" name="Rectangle 1"/>
+          <p:cNvSpPr/>
+          <p:nvPr/>
+        </p:nvSpPr>
+        <p:spPr>
+          <a:xfrm>
+            <a:off x="0" y="0"/>
+            <a:ext cx="12188952" cy="6858000"/>
+          </a:xfrm>
+          <a:prstGeom prst="rect">
+            <a:avLst/>
+          </a:prstGeom>
+          <a:solidFill>
+            <a:srgbClr val="20425A"/>
+          </a:solidFill>
+          <a:ln>
+            <a:noFill/>
+          </a:ln>
+        </p:spPr>
+        <p:style>
+          <a:lnRef idx="1">
+            <a:schemeClr val="accent1"/>
+          </a:lnRef>
+          <a:fillRef idx="3">
+            <a:schemeClr val="accent1"/>
+          </a:fillRef>
+          <a:effectRef idx="2">
+            <a:schemeClr val="accent1"/>
+          </a:effectRef>
+          <a:fontRef idx="minor">
+            <a:schemeClr val="lt1"/>
+          </a:fontRef>
+        </p:style>
+        <p:txBody>
+          <a:bodyPr rtlCol="0" anchor="ctr"/>
+          <a:lstStyle/>
+          <a:p>
+            <a:pPr algn="ctr"/>
+          </a:p>
+        </p:txBody>
+      </p:sp>
+      <p:sp>
+        <p:nvSpPr>
+          <p:cNvPr id="3" name="Rectangle 2"/>
+          <p:cNvSpPr/>
+          <p:nvPr/>
+        </p:nvSpPr>
+        <p:spPr>
+          <a:xfrm>
+            <a:off x="0" y="0"/>
+            <a:ext cx="12188952" cy="64008"/>
+          </a:xfrm>
+          <a:prstGeom prst="rect">
+            <a:avLst/>
+          </a:prstGeom>
+          <a:solidFill>
+            <a:srgbClr val="904199"/>
+          </a:solidFill>
+          <a:ln>
+            <a:noFill/>
+          </a:ln>
+        </p:spPr>
+        <p:style>
+          <a:lnRef idx="1">
+            <a:schemeClr val="accent1"/>
+          </a:lnRef>
+          <a:fillRef idx="3">
+            <a:schemeClr val="accent1"/>
+          </a:fillRef>
+          <a:effectRef idx="2">
+            <a:schemeClr val="accent1"/>
+          </a:effectRef>
+          <a:fontRef idx="minor">
+            <a:schemeClr val="lt1"/>
+          </a:fontRef>
+        </p:style>
+        <p:txBody>
+          <a:bodyPr rtlCol="0" anchor="ctr"/>
+          <a:lstStyle/>
+          <a:p>
+            <a:pPr algn="ctr"/>
+          </a:p>
+        </p:txBody>
+      </p:sp>
+      <p:sp>
+        <p:nvSpPr>
+          <p:cNvPr id="4" name="Rectangle 3"/>
+          <p:cNvSpPr/>
+          <p:nvPr/>
+        </p:nvSpPr>
+        <p:spPr>
+          <a:xfrm>
+            <a:off x="0" y="6793992"/>
+            <a:ext cx="12188952" cy="64008"/>
+          </a:xfrm>
+          <a:prstGeom prst="rect">
+            <a:avLst/>
+          </a:prstGeom>
+          <a:solidFill>
+            <a:srgbClr val="904199"/>
+          </a:solidFill>
+          <a:ln>
+            <a:noFill/>
+          </a:ln>
+        </p:spPr>
+        <p:style>
+          <a:lnRef idx="1">
+            <a:schemeClr val="accent1"/>
+          </a:lnRef>
+          <a:fillRef idx="3">
+            <a:schemeClr val="accent1"/>
+          </a:fillRef>
+          <a:effectRef idx="2">
+            <a:schemeClr val="accent1"/>
+          </a:effectRef>
+          <a:fontRef idx="minor">
+            <a:schemeClr val="lt1"/>
+          </a:fontRef>
+        </p:style>
+        <p:txBody>
+          <a:bodyPr rtlCol="0" anchor="ctr"/>
+          <a:lstStyle/>
+          <a:p>
+            <a:pPr algn="ctr"/>
+          </a:p>
+        </p:txBody>
+      </p:sp>
+      <p:sp>
+        <p:nvSpPr>
+          <p:cNvPr id="5" name="TextBox 4"/>
+          <p:cNvSpPr txBox="1"/>
+          <p:nvPr/>
+        </p:nvSpPr>
+        <p:spPr>
+          <a:xfrm>
+            <a:off x="475488" y="1828800"/>
+            <a:ext cx="11237976" cy="1188720"/>
+          </a:xfrm>
+          <a:prstGeom prst="rect">
+            <a:avLst/>
+          </a:prstGeom>
+          <a:noFill/>
+        </p:spPr>
+        <p:txBody>
+          <a:bodyPr wrap="square">
+            <a:spAutoFit/>
+          </a:bodyPr>
+          <a:lstStyle/>
+          <a:p>
+            <a:pPr algn="l"/>
+            <a:r>
+              <a:rPr sz="4400" b="1" i="0">
+                <a:solidFill>
+                  <a:srgbClr val="FFFFFF"/>
+                </a:solidFill>
+                <a:latin typeface="Gotham Narrow"/>
+              </a:rPr>
+              <a:t>Thank You.  Questions?</a:t>
+            </a:r>
+          </a:p>
+        </p:txBody>
+      </p:sp>
+      <p:sp>
+        <p:nvSpPr>
+          <p:cNvPr id="6" name="TextBox 5"/>
+          <p:cNvSpPr txBox="1"/>
+          <p:nvPr/>
+        </p:nvSpPr>
+        <p:spPr>
+          <a:xfrm>
+            <a:off x="475488" y="3383280"/>
+            <a:ext cx="11237976" cy="640080"/>
+          </a:xfrm>
+          <a:prstGeom prst="rect">
+            <a:avLst/>
+          </a:prstGeom>
+          <a:noFill/>
+        </p:spPr>
+        <p:txBody>
+          <a:bodyPr wrap="square">
+            <a:spAutoFit/>
+          </a:bodyPr>
+          <a:lstStyle/>
+          <a:p>
+            <a:pPr algn="l"/>
+            <a:r>
+              <a:rPr sz="2400" b="0" i="0">
+                <a:solidFill>
+                  <a:srgbClr val="FFFFFF"/>
+                </a:solidFill>
+                <a:latin typeface="Arial"/>
+              </a:rPr>
+              <a:t>Danielle Boyce</a:t>
+            </a:r>
+          </a:p>
+        </p:txBody>
+      </p:sp>
+      <p:sp>
+        <p:nvSpPr>
+          <p:cNvPr id="7" name="TextBox 6"/>
+          <p:cNvSpPr txBox="1"/>
+          <p:nvPr/>
+        </p:nvSpPr>
+        <p:spPr>
+          <a:xfrm>
+            <a:off x="475488" y="3977639"/>
+            <a:ext cx="11237976" cy="640080"/>
+          </a:xfrm>
+          <a:prstGeom prst="rect">
+            <a:avLst/>
+          </a:prstGeom>
+          <a:noFill/>
+        </p:spPr>
+        <p:txBody>
+          <a:bodyPr wrap="square">
+            <a:spAutoFit/>
+          </a:bodyPr>
+          <a:lstStyle/>
+          <a:p>
+            <a:pPr algn="l"/>
+            <a:r>
+              <a:rPr sz="2200" b="0" i="0">
+                <a:solidFill>
+                  <a:srgbClr val="D9C4E6"/>
+                </a:solidFill>
+                <a:latin typeface="Arial"/>
+              </a:rPr>
+              <a:t>dboyce@als.net</a:t>
+            </a:r>
+          </a:p>
+        </p:txBody>
+      </p:sp>
+      <p:sp>
+        <p:nvSpPr>
+          <p:cNvPr id="8" name="TextBox 7"/>
+          <p:cNvSpPr txBox="1"/>
+          <p:nvPr/>
+        </p:nvSpPr>
+        <p:spPr>
+          <a:xfrm>
+            <a:off x="475488" y="6309360"/>
+            <a:ext cx="8229600" cy="365760"/>
+          </a:xfrm>
+          <a:prstGeom prst="rect">
+            <a:avLst/>
+          </a:prstGeom>
+          <a:noFill/>
+        </p:spPr>
+        <p:txBody>
+          <a:bodyPr wrap="square">
+            <a:spAutoFit/>
+          </a:bodyPr>
+          <a:lstStyle/>
+          <a:p>
+            <a:pPr algn="l"/>
+            <a:r>
+              <a:rPr sz="1300" b="0" i="0">
+                <a:solidFill>
+                  <a:srgbClr val="AEC4D2"/>
+                </a:solidFill>
+                <a:latin typeface="Arial"/>
+              </a:rPr>
+              <a:t>ALS TDI · OHDSI/OMOP Train-the-Trainer</a:t>
             </a:r>
           </a:p>
         </p:txBody>
@@ -7919,7 +9082,7 @@
             <a:avLst/>
           </a:prstGeom>
           <a:solidFill>
-            <a:srgbClr val="4B2682"/>
+            <a:srgbClr val="20425A"/>
           </a:solidFill>
           <a:ln>
             <a:noFill/>
@@ -7955,14 +9118,14 @@
         </p:nvSpPr>
         <p:spPr>
           <a:xfrm>
-            <a:off x="0" y="923544"/>
-            <a:ext cx="12188952" cy="36576"/>
+            <a:off x="0" y="905256"/>
+            <a:ext cx="12188952" cy="54864"/>
           </a:xfrm>
           <a:prstGeom prst="rect">
             <a:avLst/>
           </a:prstGeom>
           <a:solidFill>
-            <a:srgbClr val="7B4FA8"/>
+            <a:srgbClr val="904199"/>
           </a:solidFill>
           <a:ln>
             <a:noFill/>
@@ -8018,65 +9181,23 @@
                 <a:solidFill>
                   <a:srgbClr val="FFFFFF"/>
                 </a:solidFill>
-              </a:rPr>
-              <a:t>Agenda</a:t>
-            </a:r>
-          </a:p>
-        </p:txBody>
-      </p:sp>
-      <p:sp>
-        <p:nvSpPr>
-          <p:cNvPr id="5" name="Rectangle 4"/>
-          <p:cNvSpPr/>
+                <a:latin typeface="Gotham Narrow"/>
+              </a:rPr>
+              <a:t>Housekeeping</a:t>
+            </a:r>
+          </a:p>
+        </p:txBody>
+      </p:sp>
+      <p:sp>
+        <p:nvSpPr>
+          <p:cNvPr id="5" name="TextBox 4"/>
+          <p:cNvSpPr txBox="1"/>
           <p:nvPr/>
         </p:nvSpPr>
         <p:spPr>
           <a:xfrm>
             <a:off x="475488" y="1161288"/>
-            <a:ext cx="1965960" cy="481888"/>
-          </a:xfrm>
-          <a:prstGeom prst="rect">
-            <a:avLst/>
-          </a:prstGeom>
-          <a:solidFill>
-            <a:srgbClr val="DCD2F5"/>
-          </a:solidFill>
-          <a:ln>
-            <a:noFill/>
-          </a:ln>
-        </p:spPr>
-        <p:style>
-          <a:lnRef idx="1">
-            <a:schemeClr val="accent1"/>
-          </a:lnRef>
-          <a:fillRef idx="3">
-            <a:schemeClr val="accent1"/>
-          </a:fillRef>
-          <a:effectRef idx="2">
-            <a:schemeClr val="accent1"/>
-          </a:effectRef>
-          <a:fontRef idx="minor">
-            <a:schemeClr val="lt1"/>
-          </a:fontRef>
-        </p:style>
-        <p:txBody>
-          <a:bodyPr rtlCol="0" anchor="ctr"/>
-          <a:lstStyle/>
-          <a:p>
-            <a:pPr algn="ctr"/>
-          </a:p>
-        </p:txBody>
-      </p:sp>
-      <p:sp>
-        <p:nvSpPr>
-          <p:cNvPr id="6" name="TextBox 5"/>
-          <p:cNvSpPr txBox="1"/>
-          <p:nvPr/>
-        </p:nvSpPr>
-        <p:spPr>
-          <a:xfrm>
-            <a:off x="566928" y="1243584"/>
-            <a:ext cx="1828800" cy="372160"/>
+            <a:ext cx="11237976" cy="5495544"/>
           </a:xfrm>
           <a:prstGeom prst="rect">
             <a:avLst/>
@@ -8089,1047 +9210,83 @@
           </a:bodyPr>
           <a:lstStyle/>
           <a:p>
-            <a:pPr algn="l"/>
-            <a:r>
-              <a:rPr sz="1400" b="0" i="0">
-                <a:solidFill>
-                  <a:srgbClr val="4B2682"/>
-                </a:solidFill>
-              </a:rPr>
-              <a:t>9:00 – 9:15</a:t>
-            </a:r>
-          </a:p>
-        </p:txBody>
-      </p:sp>
-      <p:sp>
-        <p:nvSpPr>
-          <p:cNvPr id="7" name="TextBox 6"/>
-          <p:cNvSpPr txBox="1"/>
-          <p:nvPr/>
-        </p:nvSpPr>
-        <p:spPr>
-          <a:xfrm>
-            <a:off x="2606040" y="1243584"/>
-            <a:ext cx="9034272" cy="372160"/>
-          </a:xfrm>
-          <a:prstGeom prst="rect">
-            <a:avLst/>
-          </a:prstGeom>
-          <a:noFill/>
-        </p:spPr>
-        <p:txBody>
-          <a:bodyPr wrap="square">
-            <a:spAutoFit/>
-          </a:bodyPr>
-          <a:lstStyle/>
-          <a:p>
-            <a:pPr algn="l"/>
-            <a:r>
-              <a:rPr sz="1700" b="0" i="0">
+            <a:pPr>
+              <a:spcBef>
+                <a:spcPts val="600"/>
+              </a:spcBef>
+            </a:pPr>
+            <a:r>
+              <a:rPr sz="1800">
                 <a:solidFill>
                   <a:srgbClr val="191919"/>
                 </a:solidFill>
-              </a:rPr>
-              <a:t>Recap and Q&amp;A from Day 2</a:t>
-            </a:r>
-          </a:p>
-        </p:txBody>
-      </p:sp>
-      <p:sp>
-        <p:nvSpPr>
-          <p:cNvPr id="8" name="Rectangle 7"/>
-          <p:cNvSpPr/>
-          <p:nvPr/>
-        </p:nvSpPr>
-        <p:spPr>
-          <a:xfrm>
-            <a:off x="475488" y="1716328"/>
-            <a:ext cx="1965960" cy="481888"/>
-          </a:xfrm>
-          <a:prstGeom prst="rect">
-            <a:avLst/>
-          </a:prstGeom>
-          <a:solidFill>
-            <a:srgbClr val="F5F0FF"/>
-          </a:solidFill>
-          <a:ln>
-            <a:noFill/>
-          </a:ln>
-        </p:spPr>
-        <p:style>
-          <a:lnRef idx="1">
-            <a:schemeClr val="accent1"/>
-          </a:lnRef>
-          <a:fillRef idx="3">
-            <a:schemeClr val="accent1"/>
-          </a:fillRef>
-          <a:effectRef idx="2">
-            <a:schemeClr val="accent1"/>
-          </a:effectRef>
-          <a:fontRef idx="minor">
-            <a:schemeClr val="lt1"/>
-          </a:fontRef>
-        </p:style>
-        <p:txBody>
-          <a:bodyPr rtlCol="0" anchor="ctr"/>
-          <a:lstStyle/>
-          <a:p>
-            <a:pPr algn="ctr"/>
-          </a:p>
-        </p:txBody>
-      </p:sp>
-      <p:sp>
-        <p:nvSpPr>
-          <p:cNvPr id="9" name="TextBox 8"/>
-          <p:cNvSpPr txBox="1"/>
-          <p:nvPr/>
-        </p:nvSpPr>
-        <p:spPr>
-          <a:xfrm>
-            <a:off x="566928" y="1798624"/>
-            <a:ext cx="1828800" cy="372160"/>
-          </a:xfrm>
-          <a:prstGeom prst="rect">
-            <a:avLst/>
-          </a:prstGeom>
-          <a:noFill/>
-        </p:spPr>
-        <p:txBody>
-          <a:bodyPr wrap="square">
-            <a:spAutoFit/>
-          </a:bodyPr>
-          <a:lstStyle/>
-          <a:p>
-            <a:pPr algn="l"/>
-            <a:r>
-              <a:rPr sz="1400" b="0" i="0">
-                <a:solidFill>
-                  <a:srgbClr val="4B2682"/>
-                </a:solidFill>
-              </a:rPr>
-              <a:t>9:15 – 9:45</a:t>
-            </a:r>
-          </a:p>
-        </p:txBody>
-      </p:sp>
-      <p:sp>
-        <p:nvSpPr>
-          <p:cNvPr id="10" name="TextBox 9"/>
-          <p:cNvSpPr txBox="1"/>
-          <p:nvPr/>
-        </p:nvSpPr>
-        <p:spPr>
-          <a:xfrm>
-            <a:off x="2606040" y="1798624"/>
-            <a:ext cx="9034272" cy="372160"/>
-          </a:xfrm>
-          <a:prstGeom prst="rect">
-            <a:avLst/>
-          </a:prstGeom>
-          <a:noFill/>
-        </p:spPr>
-        <p:txBody>
-          <a:bodyPr wrap="square">
-            <a:spAutoFit/>
-          </a:bodyPr>
-          <a:lstStyle/>
-          <a:p>
-            <a:pPr algn="l"/>
-            <a:r>
-              <a:rPr sz="1700" b="0" i="0">
+                <a:latin typeface="Arial"/>
+              </a:rPr>
+              <a:t>Recording: today's session is recorded and shared within 24 hours.</a:t>
+            </a:r>
+          </a:p>
+          <a:p>
+            <a:pPr>
+              <a:spcBef>
+                <a:spcPts val="600"/>
+              </a:spcBef>
+            </a:pPr>
+            <a:r>
+              <a:rPr sz="1800">
                 <a:solidFill>
                   <a:srgbClr val="191919"/>
                 </a:solidFill>
-              </a:rPr>
-              <a:t>What is an OHDSI cohort? Why it's not a code list</a:t>
-            </a:r>
-          </a:p>
-        </p:txBody>
-      </p:sp>
-      <p:sp>
-        <p:nvSpPr>
-          <p:cNvPr id="11" name="Rectangle 10"/>
-          <p:cNvSpPr/>
-          <p:nvPr/>
-        </p:nvSpPr>
-        <p:spPr>
-          <a:xfrm>
-            <a:off x="475488" y="2271369"/>
-            <a:ext cx="1965960" cy="481888"/>
-          </a:xfrm>
-          <a:prstGeom prst="rect">
-            <a:avLst/>
-          </a:prstGeom>
-          <a:solidFill>
-            <a:srgbClr val="DCD2F5"/>
-          </a:solidFill>
-          <a:ln>
-            <a:noFill/>
-          </a:ln>
-        </p:spPr>
-        <p:style>
-          <a:lnRef idx="1">
-            <a:schemeClr val="accent1"/>
-          </a:lnRef>
-          <a:fillRef idx="3">
-            <a:schemeClr val="accent1"/>
-          </a:fillRef>
-          <a:effectRef idx="2">
-            <a:schemeClr val="accent1"/>
-          </a:effectRef>
-          <a:fontRef idx="minor">
-            <a:schemeClr val="lt1"/>
-          </a:fontRef>
-        </p:style>
-        <p:txBody>
-          <a:bodyPr rtlCol="0" anchor="ctr"/>
-          <a:lstStyle/>
-          <a:p>
-            <a:pPr algn="ctr"/>
-          </a:p>
-        </p:txBody>
-      </p:sp>
-      <p:sp>
-        <p:nvSpPr>
-          <p:cNvPr id="12" name="TextBox 11"/>
-          <p:cNvSpPr txBox="1"/>
-          <p:nvPr/>
-        </p:nvSpPr>
-        <p:spPr>
-          <a:xfrm>
-            <a:off x="566928" y="2353665"/>
-            <a:ext cx="1828800" cy="372160"/>
-          </a:xfrm>
-          <a:prstGeom prst="rect">
-            <a:avLst/>
-          </a:prstGeom>
-          <a:noFill/>
-        </p:spPr>
-        <p:txBody>
-          <a:bodyPr wrap="square">
-            <a:spAutoFit/>
-          </a:bodyPr>
-          <a:lstStyle/>
-          <a:p>
-            <a:pPr algn="l"/>
-            <a:r>
-              <a:rPr sz="1400" b="0" i="0">
-                <a:solidFill>
-                  <a:srgbClr val="4B2682"/>
-                </a:solidFill>
-              </a:rPr>
-              <a:t>9:45 – 10:30</a:t>
-            </a:r>
-          </a:p>
-        </p:txBody>
-      </p:sp>
-      <p:sp>
-        <p:nvSpPr>
-          <p:cNvPr id="13" name="TextBox 12"/>
-          <p:cNvSpPr txBox="1"/>
-          <p:nvPr/>
-        </p:nvSpPr>
-        <p:spPr>
-          <a:xfrm>
-            <a:off x="2606040" y="2353665"/>
-            <a:ext cx="9034272" cy="372160"/>
-          </a:xfrm>
-          <a:prstGeom prst="rect">
-            <a:avLst/>
-          </a:prstGeom>
-          <a:noFill/>
-        </p:spPr>
-        <p:txBody>
-          <a:bodyPr wrap="square">
-            <a:spAutoFit/>
-          </a:bodyPr>
-          <a:lstStyle/>
-          <a:p>
-            <a:pPr algn="l"/>
-            <a:r>
-              <a:rPr sz="1700" b="0" i="0">
+                <a:latin typeface="Arial"/>
+              </a:rPr>
+              <a:t>Questions: ask anytime in the chat — we'll pause at each section break.</a:t>
+            </a:r>
+          </a:p>
+          <a:p>
+            <a:pPr>
+              <a:spcBef>
+                <a:spcPts val="600"/>
+              </a:spcBef>
+            </a:pPr>
+            <a:r>
+              <a:rPr sz="1800">
                 <a:solidFill>
                   <a:srgbClr val="191919"/>
                 </a:solidFill>
-              </a:rPr>
-              <a:t>The four parts of a cohort definition</a:t>
-            </a:r>
-          </a:p>
-        </p:txBody>
-      </p:sp>
-      <p:sp>
-        <p:nvSpPr>
-          <p:cNvPr id="14" name="Rectangle 13"/>
-          <p:cNvSpPr/>
-          <p:nvPr/>
-        </p:nvSpPr>
-        <p:spPr>
-          <a:xfrm>
-            <a:off x="475488" y="2826410"/>
-            <a:ext cx="1965960" cy="481888"/>
-          </a:xfrm>
-          <a:prstGeom prst="rect">
-            <a:avLst/>
-          </a:prstGeom>
-          <a:solidFill>
-            <a:srgbClr val="F5F0FF"/>
-          </a:solidFill>
-          <a:ln>
-            <a:noFill/>
-          </a:ln>
-        </p:spPr>
-        <p:style>
-          <a:lnRef idx="1">
-            <a:schemeClr val="accent1"/>
-          </a:lnRef>
-          <a:fillRef idx="3">
-            <a:schemeClr val="accent1"/>
-          </a:fillRef>
-          <a:effectRef idx="2">
-            <a:schemeClr val="accent1"/>
-          </a:effectRef>
-          <a:fontRef idx="minor">
-            <a:schemeClr val="lt1"/>
-          </a:fontRef>
-        </p:style>
-        <p:txBody>
-          <a:bodyPr rtlCol="0" anchor="ctr"/>
-          <a:lstStyle/>
-          <a:p>
-            <a:pPr algn="ctr"/>
-          </a:p>
-        </p:txBody>
-      </p:sp>
-      <p:sp>
-        <p:nvSpPr>
-          <p:cNvPr id="15" name="TextBox 14"/>
-          <p:cNvSpPr txBox="1"/>
-          <p:nvPr/>
-        </p:nvSpPr>
-        <p:spPr>
-          <a:xfrm>
-            <a:off x="566928" y="2908706"/>
-            <a:ext cx="1828800" cy="372160"/>
-          </a:xfrm>
-          <a:prstGeom prst="rect">
-            <a:avLst/>
-          </a:prstGeom>
-          <a:noFill/>
-        </p:spPr>
-        <p:txBody>
-          <a:bodyPr wrap="square">
-            <a:spAutoFit/>
-          </a:bodyPr>
-          <a:lstStyle/>
-          <a:p>
-            <a:pPr algn="l"/>
-            <a:r>
-              <a:rPr sz="1400" b="0" i="0">
-                <a:solidFill>
-                  <a:srgbClr val="4B2682"/>
-                </a:solidFill>
-              </a:rPr>
-              <a:t>10:30 – 10:45</a:t>
-            </a:r>
-          </a:p>
-        </p:txBody>
-      </p:sp>
-      <p:sp>
-        <p:nvSpPr>
-          <p:cNvPr id="16" name="TextBox 15"/>
-          <p:cNvSpPr txBox="1"/>
-          <p:nvPr/>
-        </p:nvSpPr>
-        <p:spPr>
-          <a:xfrm>
-            <a:off x="2606040" y="2908706"/>
-            <a:ext cx="9034272" cy="372160"/>
-          </a:xfrm>
-          <a:prstGeom prst="rect">
-            <a:avLst/>
-          </a:prstGeom>
-          <a:noFill/>
-        </p:spPr>
-        <p:txBody>
-          <a:bodyPr wrap="square">
-            <a:spAutoFit/>
-          </a:bodyPr>
-          <a:lstStyle/>
-          <a:p>
-            <a:pPr algn="l"/>
-            <a:r>
-              <a:rPr sz="1700" b="0" i="0">
+                <a:latin typeface="Arial"/>
+              </a:rPr>
+              <a:t>Materials: the slides, participant workbook, and Kahoot live in the program repo.</a:t>
+            </a:r>
+          </a:p>
+          <a:p>
+            <a:pPr>
+              <a:spcBef>
+                <a:spcPts val="600"/>
+              </a:spcBef>
+            </a:pPr>
+            <a:r>
+              <a:rPr sz="1800">
                 <a:solidFill>
                   <a:srgbClr val="191919"/>
                 </a:solidFill>
-              </a:rPr>
-              <a:t>Break</a:t>
-            </a:r>
-          </a:p>
-        </p:txBody>
-      </p:sp>
-      <p:sp>
-        <p:nvSpPr>
-          <p:cNvPr id="17" name="Rectangle 16"/>
-          <p:cNvSpPr/>
-          <p:nvPr/>
-        </p:nvSpPr>
-        <p:spPr>
-          <a:xfrm>
-            <a:off x="475488" y="3381451"/>
-            <a:ext cx="1965960" cy="481888"/>
-          </a:xfrm>
-          <a:prstGeom prst="rect">
-            <a:avLst/>
-          </a:prstGeom>
-          <a:solidFill>
-            <a:srgbClr val="DCD2F5"/>
-          </a:solidFill>
-          <a:ln>
-            <a:noFill/>
-          </a:ln>
-        </p:spPr>
-        <p:style>
-          <a:lnRef idx="1">
-            <a:schemeClr val="accent1"/>
-          </a:lnRef>
-          <a:fillRef idx="3">
-            <a:schemeClr val="accent1"/>
-          </a:fillRef>
-          <a:effectRef idx="2">
-            <a:schemeClr val="accent1"/>
-          </a:effectRef>
-          <a:fontRef idx="minor">
-            <a:schemeClr val="lt1"/>
-          </a:fontRef>
-        </p:style>
-        <p:txBody>
-          <a:bodyPr rtlCol="0" anchor="ctr"/>
-          <a:lstStyle/>
-          <a:p>
-            <a:pPr algn="ctr"/>
-          </a:p>
-        </p:txBody>
-      </p:sp>
-      <p:sp>
-        <p:nvSpPr>
-          <p:cNvPr id="18" name="TextBox 17"/>
-          <p:cNvSpPr txBox="1"/>
-          <p:nvPr/>
-        </p:nvSpPr>
-        <p:spPr>
-          <a:xfrm>
-            <a:off x="566928" y="3463747"/>
-            <a:ext cx="1828800" cy="372160"/>
-          </a:xfrm>
-          <a:prstGeom prst="rect">
-            <a:avLst/>
-          </a:prstGeom>
-          <a:noFill/>
-        </p:spPr>
-        <p:txBody>
-          <a:bodyPr wrap="square">
-            <a:spAutoFit/>
-          </a:bodyPr>
-          <a:lstStyle/>
-          <a:p>
-            <a:pPr algn="l"/>
-            <a:r>
-              <a:rPr sz="1400" b="0" i="0">
-                <a:solidFill>
-                  <a:srgbClr val="4B2682"/>
-                </a:solidFill>
-              </a:rPr>
-              <a:t>10:45 – 11:30</a:t>
-            </a:r>
-          </a:p>
-        </p:txBody>
-      </p:sp>
-      <p:sp>
-        <p:nvSpPr>
-          <p:cNvPr id="19" name="TextBox 18"/>
-          <p:cNvSpPr txBox="1"/>
-          <p:nvPr/>
-        </p:nvSpPr>
-        <p:spPr>
-          <a:xfrm>
-            <a:off x="2606040" y="3463747"/>
-            <a:ext cx="9034272" cy="372160"/>
-          </a:xfrm>
-          <a:prstGeom prst="rect">
-            <a:avLst/>
-          </a:prstGeom>
-          <a:noFill/>
-        </p:spPr>
-        <p:txBody>
-          <a:bodyPr wrap="square">
-            <a:spAutoFit/>
-          </a:bodyPr>
-          <a:lstStyle/>
-          <a:p>
-            <a:pPr algn="l"/>
-            <a:r>
-              <a:rPr sz="1700" b="0" i="0">
+                <a:latin typeface="Arial"/>
+              </a:rPr>
+              <a:t>Breaks: we'll take a short break partway through the session.</a:t>
+            </a:r>
+          </a:p>
+          <a:p>
+            <a:pPr>
+              <a:spcBef>
+                <a:spcPts val="600"/>
+              </a:spcBef>
+            </a:pPr>
+            <a:r>
+              <a:rPr sz="1800">
                 <a:solidFill>
                   <a:srgbClr val="191919"/>
                 </a:solidFill>
-              </a:rPr>
-              <a:t>Temporal logic and inclusion criteria deep dive</a:t>
-            </a:r>
-          </a:p>
-        </p:txBody>
-      </p:sp>
-      <p:sp>
-        <p:nvSpPr>
-          <p:cNvPr id="20" name="Rectangle 19"/>
-          <p:cNvSpPr/>
-          <p:nvPr/>
-        </p:nvSpPr>
-        <p:spPr>
-          <a:xfrm>
-            <a:off x="475488" y="3936492"/>
-            <a:ext cx="1965960" cy="481888"/>
-          </a:xfrm>
-          <a:prstGeom prst="rect">
-            <a:avLst/>
-          </a:prstGeom>
-          <a:solidFill>
-            <a:srgbClr val="F5F0FF"/>
-          </a:solidFill>
-          <a:ln>
-            <a:noFill/>
-          </a:ln>
-        </p:spPr>
-        <p:style>
-          <a:lnRef idx="1">
-            <a:schemeClr val="accent1"/>
-          </a:lnRef>
-          <a:fillRef idx="3">
-            <a:schemeClr val="accent1"/>
-          </a:fillRef>
-          <a:effectRef idx="2">
-            <a:schemeClr val="accent1"/>
-          </a:effectRef>
-          <a:fontRef idx="minor">
-            <a:schemeClr val="lt1"/>
-          </a:fontRef>
-        </p:style>
-        <p:txBody>
-          <a:bodyPr rtlCol="0" anchor="ctr"/>
-          <a:lstStyle/>
-          <a:p>
-            <a:pPr algn="ctr"/>
-          </a:p>
-        </p:txBody>
-      </p:sp>
-      <p:sp>
-        <p:nvSpPr>
-          <p:cNvPr id="21" name="TextBox 20"/>
-          <p:cNvSpPr txBox="1"/>
-          <p:nvPr/>
-        </p:nvSpPr>
-        <p:spPr>
-          <a:xfrm>
-            <a:off x="566928" y="4018788"/>
-            <a:ext cx="1828800" cy="372160"/>
-          </a:xfrm>
-          <a:prstGeom prst="rect">
-            <a:avLst/>
-          </a:prstGeom>
-          <a:noFill/>
-        </p:spPr>
-        <p:txBody>
-          <a:bodyPr wrap="square">
-            <a:spAutoFit/>
-          </a:bodyPr>
-          <a:lstStyle/>
-          <a:p>
-            <a:pPr algn="l"/>
-            <a:r>
-              <a:rPr sz="1400" b="0" i="0">
-                <a:solidFill>
-                  <a:srgbClr val="4B2682"/>
-                </a:solidFill>
-              </a:rPr>
-              <a:t>11:30 – 12:00</a:t>
-            </a:r>
-          </a:p>
-        </p:txBody>
-      </p:sp>
-      <p:sp>
-        <p:nvSpPr>
-          <p:cNvPr id="22" name="TextBox 21"/>
-          <p:cNvSpPr txBox="1"/>
-          <p:nvPr/>
-        </p:nvSpPr>
-        <p:spPr>
-          <a:xfrm>
-            <a:off x="2606040" y="4018788"/>
-            <a:ext cx="9034272" cy="372160"/>
-          </a:xfrm>
-          <a:prstGeom prst="rect">
-            <a:avLst/>
-          </a:prstGeom>
-          <a:noFill/>
-        </p:spPr>
-        <p:txBody>
-          <a:bodyPr wrap="square">
-            <a:spAutoFit/>
-          </a:bodyPr>
-          <a:lstStyle/>
-          <a:p>
-            <a:pPr algn="l"/>
-            <a:r>
-              <a:rPr sz="1700" b="0" i="0">
-                <a:solidFill>
-                  <a:srgbClr val="191919"/>
-                </a:solidFill>
-              </a:rPr>
-              <a:t>Live demo: building new-user metformin cohort in ATLAS</a:t>
-            </a:r>
-          </a:p>
-        </p:txBody>
-      </p:sp>
-      <p:sp>
-        <p:nvSpPr>
-          <p:cNvPr id="23" name="Rectangle 22"/>
-          <p:cNvSpPr/>
-          <p:nvPr/>
-        </p:nvSpPr>
-        <p:spPr>
-          <a:xfrm>
-            <a:off x="475488" y="4491532"/>
-            <a:ext cx="1965960" cy="481888"/>
-          </a:xfrm>
-          <a:prstGeom prst="rect">
-            <a:avLst/>
-          </a:prstGeom>
-          <a:solidFill>
-            <a:srgbClr val="DCD2F5"/>
-          </a:solidFill>
-          <a:ln>
-            <a:noFill/>
-          </a:ln>
-        </p:spPr>
-        <p:style>
-          <a:lnRef idx="1">
-            <a:schemeClr val="accent1"/>
-          </a:lnRef>
-          <a:fillRef idx="3">
-            <a:schemeClr val="accent1"/>
-          </a:fillRef>
-          <a:effectRef idx="2">
-            <a:schemeClr val="accent1"/>
-          </a:effectRef>
-          <a:fontRef idx="minor">
-            <a:schemeClr val="lt1"/>
-          </a:fontRef>
-        </p:style>
-        <p:txBody>
-          <a:bodyPr rtlCol="0" anchor="ctr"/>
-          <a:lstStyle/>
-          <a:p>
-            <a:pPr algn="ctr"/>
-          </a:p>
-        </p:txBody>
-      </p:sp>
-      <p:sp>
-        <p:nvSpPr>
-          <p:cNvPr id="24" name="TextBox 23"/>
-          <p:cNvSpPr txBox="1"/>
-          <p:nvPr/>
-        </p:nvSpPr>
-        <p:spPr>
-          <a:xfrm>
-            <a:off x="566928" y="4573828"/>
-            <a:ext cx="1828800" cy="372160"/>
-          </a:xfrm>
-          <a:prstGeom prst="rect">
-            <a:avLst/>
-          </a:prstGeom>
-          <a:noFill/>
-        </p:spPr>
-        <p:txBody>
-          <a:bodyPr wrap="square">
-            <a:spAutoFit/>
-          </a:bodyPr>
-          <a:lstStyle/>
-          <a:p>
-            <a:pPr algn="l"/>
-            <a:r>
-              <a:rPr sz="1400" b="0" i="0">
-                <a:solidFill>
-                  <a:srgbClr val="4B2682"/>
-                </a:solidFill>
-              </a:rPr>
-              <a:t>12:00 – 13:00</a:t>
-            </a:r>
-          </a:p>
-        </p:txBody>
-      </p:sp>
-      <p:sp>
-        <p:nvSpPr>
-          <p:cNvPr id="25" name="TextBox 24"/>
-          <p:cNvSpPr txBox="1"/>
-          <p:nvPr/>
-        </p:nvSpPr>
-        <p:spPr>
-          <a:xfrm>
-            <a:off x="2606040" y="4573828"/>
-            <a:ext cx="9034272" cy="372160"/>
-          </a:xfrm>
-          <a:prstGeom prst="rect">
-            <a:avLst/>
-          </a:prstGeom>
-          <a:noFill/>
-        </p:spPr>
-        <p:txBody>
-          <a:bodyPr wrap="square">
-            <a:spAutoFit/>
-          </a:bodyPr>
-          <a:lstStyle/>
-          <a:p>
-            <a:pPr algn="l"/>
-            <a:r>
-              <a:rPr sz="1700" b="0" i="0">
-                <a:solidFill>
-                  <a:srgbClr val="191919"/>
-                </a:solidFill>
-              </a:rPr>
-              <a:t>Lunch</a:t>
-            </a:r>
-          </a:p>
-        </p:txBody>
-      </p:sp>
-      <p:sp>
-        <p:nvSpPr>
-          <p:cNvPr id="26" name="Rectangle 25"/>
-          <p:cNvSpPr/>
-          <p:nvPr/>
-        </p:nvSpPr>
-        <p:spPr>
-          <a:xfrm>
-            <a:off x="475488" y="5046573"/>
-            <a:ext cx="1965960" cy="481888"/>
-          </a:xfrm>
-          <a:prstGeom prst="rect">
-            <a:avLst/>
-          </a:prstGeom>
-          <a:solidFill>
-            <a:srgbClr val="F5F0FF"/>
-          </a:solidFill>
-          <a:ln>
-            <a:noFill/>
-          </a:ln>
-        </p:spPr>
-        <p:style>
-          <a:lnRef idx="1">
-            <a:schemeClr val="accent1"/>
-          </a:lnRef>
-          <a:fillRef idx="3">
-            <a:schemeClr val="accent1"/>
-          </a:fillRef>
-          <a:effectRef idx="2">
-            <a:schemeClr val="accent1"/>
-          </a:effectRef>
-          <a:fontRef idx="minor">
-            <a:schemeClr val="lt1"/>
-          </a:fontRef>
-        </p:style>
-        <p:txBody>
-          <a:bodyPr rtlCol="0" anchor="ctr"/>
-          <a:lstStyle/>
-          <a:p>
-            <a:pPr algn="ctr"/>
-          </a:p>
-        </p:txBody>
-      </p:sp>
-      <p:sp>
-        <p:nvSpPr>
-          <p:cNvPr id="27" name="TextBox 26"/>
-          <p:cNvSpPr txBox="1"/>
-          <p:nvPr/>
-        </p:nvSpPr>
-        <p:spPr>
-          <a:xfrm>
-            <a:off x="566928" y="5128869"/>
-            <a:ext cx="1828800" cy="372160"/>
-          </a:xfrm>
-          <a:prstGeom prst="rect">
-            <a:avLst/>
-          </a:prstGeom>
-          <a:noFill/>
-        </p:spPr>
-        <p:txBody>
-          <a:bodyPr wrap="square">
-            <a:spAutoFit/>
-          </a:bodyPr>
-          <a:lstStyle/>
-          <a:p>
-            <a:pPr algn="l"/>
-            <a:r>
-              <a:rPr sz="1400" b="0" i="0">
-                <a:solidFill>
-                  <a:srgbClr val="4B2682"/>
-                </a:solidFill>
-              </a:rPr>
-              <a:t>13:00 – 14:30</a:t>
-            </a:r>
-          </a:p>
-        </p:txBody>
-      </p:sp>
-      <p:sp>
-        <p:nvSpPr>
-          <p:cNvPr id="28" name="TextBox 27"/>
-          <p:cNvSpPr txBox="1"/>
-          <p:nvPr/>
-        </p:nvSpPr>
-        <p:spPr>
-          <a:xfrm>
-            <a:off x="2606040" y="5128869"/>
-            <a:ext cx="9034272" cy="372160"/>
-          </a:xfrm>
-          <a:prstGeom prst="rect">
-            <a:avLst/>
-          </a:prstGeom>
-          <a:noFill/>
-        </p:spPr>
-        <p:txBody>
-          <a:bodyPr wrap="square">
-            <a:spAutoFit/>
-          </a:bodyPr>
-          <a:lstStyle/>
-          <a:p>
-            <a:pPr algn="l"/>
-            <a:r>
-              <a:rPr sz="1700" b="0" i="0">
-                <a:solidFill>
-                  <a:srgbClr val="191919"/>
-                </a:solidFill>
-              </a:rPr>
-              <a:t>ATLAS lab: build, generate, read attrition, characterize</a:t>
-            </a:r>
-          </a:p>
-        </p:txBody>
-      </p:sp>
-      <p:sp>
-        <p:nvSpPr>
-          <p:cNvPr id="29" name="Rectangle 28"/>
-          <p:cNvSpPr/>
-          <p:nvPr/>
-        </p:nvSpPr>
-        <p:spPr>
-          <a:xfrm>
-            <a:off x="475488" y="5601614"/>
-            <a:ext cx="1965960" cy="481888"/>
-          </a:xfrm>
-          <a:prstGeom prst="rect">
-            <a:avLst/>
-          </a:prstGeom>
-          <a:solidFill>
-            <a:srgbClr val="DCD2F5"/>
-          </a:solidFill>
-          <a:ln>
-            <a:noFill/>
-          </a:ln>
-        </p:spPr>
-        <p:style>
-          <a:lnRef idx="1">
-            <a:schemeClr val="accent1"/>
-          </a:lnRef>
-          <a:fillRef idx="3">
-            <a:schemeClr val="accent1"/>
-          </a:fillRef>
-          <a:effectRef idx="2">
-            <a:schemeClr val="accent1"/>
-          </a:effectRef>
-          <a:fontRef idx="minor">
-            <a:schemeClr val="lt1"/>
-          </a:fontRef>
-        </p:style>
-        <p:txBody>
-          <a:bodyPr rtlCol="0" anchor="ctr"/>
-          <a:lstStyle/>
-          <a:p>
-            <a:pPr algn="ctr"/>
-          </a:p>
-        </p:txBody>
-      </p:sp>
-      <p:sp>
-        <p:nvSpPr>
-          <p:cNvPr id="30" name="TextBox 29"/>
-          <p:cNvSpPr txBox="1"/>
-          <p:nvPr/>
-        </p:nvSpPr>
-        <p:spPr>
-          <a:xfrm>
-            <a:off x="566928" y="5683910"/>
-            <a:ext cx="1828800" cy="372160"/>
-          </a:xfrm>
-          <a:prstGeom prst="rect">
-            <a:avLst/>
-          </a:prstGeom>
-          <a:noFill/>
-        </p:spPr>
-        <p:txBody>
-          <a:bodyPr wrap="square">
-            <a:spAutoFit/>
-          </a:bodyPr>
-          <a:lstStyle/>
-          <a:p>
-            <a:pPr algn="l"/>
-            <a:r>
-              <a:rPr sz="1400" b="0" i="0">
-                <a:solidFill>
-                  <a:srgbClr val="4B2682"/>
-                </a:solidFill>
-              </a:rPr>
-              <a:t>14:30 – 15:00</a:t>
-            </a:r>
-          </a:p>
-        </p:txBody>
-      </p:sp>
-      <p:sp>
-        <p:nvSpPr>
-          <p:cNvPr id="31" name="TextBox 30"/>
-          <p:cNvSpPr txBox="1"/>
-          <p:nvPr/>
-        </p:nvSpPr>
-        <p:spPr>
-          <a:xfrm>
-            <a:off x="2606040" y="5683910"/>
-            <a:ext cx="9034272" cy="372160"/>
-          </a:xfrm>
-          <a:prstGeom prst="rect">
-            <a:avLst/>
-          </a:prstGeom>
-          <a:noFill/>
-        </p:spPr>
-        <p:txBody>
-          <a:bodyPr wrap="square">
-            <a:spAutoFit/>
-          </a:bodyPr>
-          <a:lstStyle/>
-          <a:p>
-            <a:pPr algn="l"/>
-            <a:r>
-              <a:rPr sz="1700" b="0" i="0">
-                <a:solidFill>
-                  <a:srgbClr val="191919"/>
-                </a:solidFill>
-              </a:rPr>
-              <a:t>Export cohort SQL and validate counts</a:t>
-            </a:r>
-          </a:p>
-        </p:txBody>
-      </p:sp>
-      <p:sp>
-        <p:nvSpPr>
-          <p:cNvPr id="32" name="Rectangle 31"/>
-          <p:cNvSpPr/>
-          <p:nvPr/>
-        </p:nvSpPr>
-        <p:spPr>
-          <a:xfrm>
-            <a:off x="475488" y="6156655"/>
-            <a:ext cx="1965960" cy="481888"/>
-          </a:xfrm>
-          <a:prstGeom prst="rect">
-            <a:avLst/>
-          </a:prstGeom>
-          <a:solidFill>
-            <a:srgbClr val="F5F0FF"/>
-          </a:solidFill>
-          <a:ln>
-            <a:noFill/>
-          </a:ln>
-        </p:spPr>
-        <p:style>
-          <a:lnRef idx="1">
-            <a:schemeClr val="accent1"/>
-          </a:lnRef>
-          <a:fillRef idx="3">
-            <a:schemeClr val="accent1"/>
-          </a:fillRef>
-          <a:effectRef idx="2">
-            <a:schemeClr val="accent1"/>
-          </a:effectRef>
-          <a:fontRef idx="minor">
-            <a:schemeClr val="lt1"/>
-          </a:fontRef>
-        </p:style>
-        <p:txBody>
-          <a:bodyPr rtlCol="0" anchor="ctr"/>
-          <a:lstStyle/>
-          <a:p>
-            <a:pPr algn="ctr"/>
-          </a:p>
-        </p:txBody>
-      </p:sp>
-      <p:sp>
-        <p:nvSpPr>
-          <p:cNvPr id="33" name="TextBox 32"/>
-          <p:cNvSpPr txBox="1"/>
-          <p:nvPr/>
-        </p:nvSpPr>
-        <p:spPr>
-          <a:xfrm>
-            <a:off x="566928" y="6238951"/>
-            <a:ext cx="1828800" cy="372160"/>
-          </a:xfrm>
-          <a:prstGeom prst="rect">
-            <a:avLst/>
-          </a:prstGeom>
-          <a:noFill/>
-        </p:spPr>
-        <p:txBody>
-          <a:bodyPr wrap="square">
-            <a:spAutoFit/>
-          </a:bodyPr>
-          <a:lstStyle/>
-          <a:p>
-            <a:pPr algn="l"/>
-            <a:r>
-              <a:rPr sz="1400" b="0" i="0">
-                <a:solidFill>
-                  <a:srgbClr val="4B2682"/>
-                </a:solidFill>
-              </a:rPr>
-              <a:t>15:00 – 15:30</a:t>
-            </a:r>
-          </a:p>
-        </p:txBody>
-      </p:sp>
-      <p:sp>
-        <p:nvSpPr>
-          <p:cNvPr id="34" name="TextBox 33"/>
-          <p:cNvSpPr txBox="1"/>
-          <p:nvPr/>
-        </p:nvSpPr>
-        <p:spPr>
-          <a:xfrm>
-            <a:off x="2606040" y="6238951"/>
-            <a:ext cx="9034272" cy="372160"/>
-          </a:xfrm>
-          <a:prstGeom prst="rect">
-            <a:avLst/>
-          </a:prstGeom>
-          <a:noFill/>
-        </p:spPr>
-        <p:txBody>
-          <a:bodyPr wrap="square">
-            <a:spAutoFit/>
-          </a:bodyPr>
-          <a:lstStyle/>
-          <a:p>
-            <a:pPr algn="l"/>
-            <a:r>
-              <a:rPr sz="1700" b="0" i="0">
-                <a:solidFill>
-                  <a:srgbClr val="191919"/>
-                </a:solidFill>
-              </a:rPr>
-              <a:t>Recap, homework, Day 4 preview</a:t>
+                <a:latin typeface="Arial"/>
+              </a:rPr>
+              <a:t>Be kind to yourself — this is a lot of material; mastery comes with practice, not in one day.</a:t>
             </a:r>
           </a:p>
         </p:txBody>
@@ -9167,7 +9324,7 @@
             <a:avLst/>
           </a:prstGeom>
           <a:solidFill>
-            <a:srgbClr val="4B2682"/>
+            <a:srgbClr val="20425A"/>
           </a:solidFill>
           <a:ln>
             <a:noFill/>
@@ -9203,14 +9360,14 @@
         </p:nvSpPr>
         <p:spPr>
           <a:xfrm>
-            <a:off x="0" y="923544"/>
-            <a:ext cx="12188952" cy="36576"/>
+            <a:off x="0" y="905256"/>
+            <a:ext cx="12188952" cy="54864"/>
           </a:xfrm>
           <a:prstGeom prst="rect">
             <a:avLst/>
           </a:prstGeom>
           <a:solidFill>
-            <a:srgbClr val="7B4FA8"/>
+            <a:srgbClr val="904199"/>
           </a:solidFill>
           <a:ln>
             <a:noFill/>
@@ -9266,8 +9423,9 @@
                 <a:solidFill>
                   <a:srgbClr val="FFFFFF"/>
                 </a:solidFill>
-              </a:rPr>
-              <a:t>What Is an OHDSI Cohort?</a:t>
+                <a:latin typeface="Gotham Narrow"/>
+              </a:rPr>
+              <a:t>Agenda</a:t>
             </a:r>
           </a:p>
         </p:txBody>
@@ -9280,14 +9438,14 @@
         </p:nvSpPr>
         <p:spPr>
           <a:xfrm>
-            <a:off x="475488" y="1124712"/>
-            <a:ext cx="5504688" cy="5532120"/>
+            <a:off x="475488" y="1161288"/>
+            <a:ext cx="1965960" cy="481888"/>
           </a:xfrm>
           <a:prstGeom prst="rect">
             <a:avLst/>
           </a:prstGeom>
           <a:solidFill>
-            <a:srgbClr val="F6F6F6"/>
+            <a:srgbClr val="ECDFF3"/>
           </a:solidFill>
           <a:ln>
             <a:noFill/>
@@ -9323,8 +9481,8 @@
         </p:nvSpPr>
         <p:spPr>
           <a:xfrm>
-            <a:off x="566928" y="1216152"/>
-            <a:ext cx="5321808" cy="457200"/>
+            <a:off x="566928" y="1243584"/>
+            <a:ext cx="1828800" cy="372160"/>
           </a:xfrm>
           <a:prstGeom prst="rect">
             <a:avLst/>
@@ -9339,12 +9497,13 @@
           <a:p>
             <a:pPr algn="l"/>
             <a:r>
-              <a:rPr sz="1800" b="1" i="0">
-                <a:solidFill>
-                  <a:srgbClr val="4B2682"/>
-                </a:solidFill>
-              </a:rPr>
-              <a:t>A Cohort IS</a:t>
+              <a:rPr sz="1400" b="0" i="0">
+                <a:solidFill>
+                  <a:srgbClr val="20425A"/>
+                </a:solidFill>
+                <a:latin typeface="Arial"/>
+              </a:rPr>
+              <a:t>9:00 – 9:15</a:t>
             </a:r>
           </a:p>
         </p:txBody>
@@ -9357,8 +9516,8 @@
         </p:nvSpPr>
         <p:spPr>
           <a:xfrm>
-            <a:off x="612648" y="1719072"/>
-            <a:ext cx="5230368" cy="4846320"/>
+            <a:off x="2606040" y="1243584"/>
+            <a:ext cx="9034272" cy="372160"/>
           </a:xfrm>
           <a:prstGeom prst="rect">
             <a:avLst/>
@@ -9371,78 +9530,15 @@
           </a:bodyPr>
           <a:lstStyle/>
           <a:p>
-            <a:pPr>
-              <a:spcBef>
-                <a:spcPts val="500"/>
-              </a:spcBef>
-            </a:pPr>
-            <a:r>
-              <a:rPr sz="1700">
+            <a:pPr algn="l"/>
+            <a:r>
+              <a:rPr sz="1700" b="0" i="0">
                 <a:solidFill>
                   <a:srgbClr val="191919"/>
                 </a:solidFill>
-              </a:rPr>
-              <a:t>A set of persons who satisfy one or more criteria for a duration of time</a:t>
-            </a:r>
-          </a:p>
-          <a:p>
-            <a:pPr>
-              <a:spcBef>
-                <a:spcPts val="500"/>
-              </a:spcBef>
-            </a:pPr>
-            <a:r>
-              <a:rPr sz="1700">
-                <a:solidFill>
-                  <a:srgbClr val="191919"/>
-                </a:solidFill>
-              </a:rPr>
-              <a:t>A rule set: who qualifies, under what conditions, and for how long</a:t>
-            </a:r>
-          </a:p>
-          <a:p>
-            <a:pPr>
-              <a:spcBef>
-                <a:spcPts val="500"/>
-              </a:spcBef>
-            </a:pPr>
-            <a:r>
-              <a:rPr sz="1700">
-                <a:solidFill>
-                  <a:srgbClr val="191919"/>
-                </a:solidFill>
-              </a:rPr>
-              <a:t>Reproducible: the same definition applied to any OMOP CDM produces a comparable result</a:t>
-            </a:r>
-          </a:p>
-          <a:p>
-            <a:pPr>
-              <a:spcBef>
-                <a:spcPts val="500"/>
-              </a:spcBef>
-            </a:pPr>
-            <a:r>
-              <a:rPr sz="1700">
-                <a:solidFill>
-                  <a:srgbClr val="191919"/>
-                </a:solidFill>
-              </a:rPr>
-              <a:t>An entry event (initial qualifying event) with optional inclusion rules and an exit strategy</a:t>
-            </a:r>
-          </a:p>
-          <a:p>
-            <a:pPr>
-              <a:spcBef>
-                <a:spcPts val="500"/>
-              </a:spcBef>
-            </a:pPr>
-            <a:r>
-              <a:rPr sz="1700">
-                <a:solidFill>
-                  <a:srgbClr val="191919"/>
-                </a:solidFill>
-              </a:rPr>
-              <a:t>The foundational unit of all OHDSI analysis</a:t>
+                <a:latin typeface="Arial"/>
+              </a:rPr>
+              <a:t>Recap and Q&amp;A from Day 2</a:t>
             </a:r>
           </a:p>
         </p:txBody>
@@ -9455,14 +9551,14 @@
         </p:nvSpPr>
         <p:spPr>
           <a:xfrm>
-            <a:off x="6208776" y="1124712"/>
-            <a:ext cx="5504688" cy="5532120"/>
+            <a:off x="475488" y="1716328"/>
+            <a:ext cx="1965960" cy="481888"/>
           </a:xfrm>
           <a:prstGeom prst="rect">
             <a:avLst/>
           </a:prstGeom>
           <a:solidFill>
-            <a:srgbClr val="F0EBFC"/>
+            <a:srgbClr val="F5F0FF"/>
           </a:solidFill>
           <a:ln>
             <a:noFill/>
@@ -9498,8 +9594,8 @@
         </p:nvSpPr>
         <p:spPr>
           <a:xfrm>
-            <a:off x="6300216" y="1216152"/>
-            <a:ext cx="5321808" cy="457200"/>
+            <a:off x="566928" y="1798624"/>
+            <a:ext cx="1828800" cy="372160"/>
           </a:xfrm>
           <a:prstGeom prst="rect">
             <a:avLst/>
@@ -9514,12 +9610,13 @@
           <a:p>
             <a:pPr algn="l"/>
             <a:r>
-              <a:rPr sz="1800" b="1" i="0">
-                <a:solidFill>
-                  <a:srgbClr val="4B2682"/>
-                </a:solidFill>
-              </a:rPr>
-              <a:t>A Cohort IS NOT</a:t>
+              <a:rPr sz="1400" b="0" i="0">
+                <a:solidFill>
+                  <a:srgbClr val="20425A"/>
+                </a:solidFill>
+                <a:latin typeface="Arial"/>
+              </a:rPr>
+              <a:t>9:15 – 9:45</a:t>
             </a:r>
           </a:p>
         </p:txBody>
@@ -9532,8 +9629,8 @@
         </p:nvSpPr>
         <p:spPr>
           <a:xfrm>
-            <a:off x="6345936" y="1719072"/>
-            <a:ext cx="5230368" cy="4846320"/>
+            <a:off x="2606040" y="1798624"/>
+            <a:ext cx="9034272" cy="372160"/>
           </a:xfrm>
           <a:prstGeom prst="rect">
             <a:avLst/>
@@ -9546,78 +9643,919 @@
           </a:bodyPr>
           <a:lstStyle/>
           <a:p>
-            <a:pPr>
-              <a:spcBef>
-                <a:spcPts val="500"/>
-              </a:spcBef>
-            </a:pPr>
-            <a:r>
-              <a:rPr sz="1700">
+            <a:pPr algn="l"/>
+            <a:r>
+              <a:rPr sz="1700" b="0" i="0">
                 <a:solidFill>
                   <a:srgbClr val="191919"/>
                 </a:solidFill>
-              </a:rPr>
-              <a:t>A simple list of patients with a diagnosis code</a:t>
-            </a:r>
-          </a:p>
-          <a:p>
-            <a:pPr>
-              <a:spcBef>
-                <a:spcPts val="500"/>
-              </a:spcBef>
-            </a:pPr>
-            <a:r>
-              <a:rPr sz="1700">
+                <a:latin typeface="Arial"/>
+              </a:rPr>
+              <a:t>What is an OHDSI cohort? Why it's not a code list</a:t>
+            </a:r>
+          </a:p>
+        </p:txBody>
+      </p:sp>
+      <p:sp>
+        <p:nvSpPr>
+          <p:cNvPr id="11" name="Rectangle 10"/>
+          <p:cNvSpPr/>
+          <p:nvPr/>
+        </p:nvSpPr>
+        <p:spPr>
+          <a:xfrm>
+            <a:off x="475488" y="2271369"/>
+            <a:ext cx="1965960" cy="481888"/>
+          </a:xfrm>
+          <a:prstGeom prst="rect">
+            <a:avLst/>
+          </a:prstGeom>
+          <a:solidFill>
+            <a:srgbClr val="ECDFF3"/>
+          </a:solidFill>
+          <a:ln>
+            <a:noFill/>
+          </a:ln>
+        </p:spPr>
+        <p:style>
+          <a:lnRef idx="1">
+            <a:schemeClr val="accent1"/>
+          </a:lnRef>
+          <a:fillRef idx="3">
+            <a:schemeClr val="accent1"/>
+          </a:fillRef>
+          <a:effectRef idx="2">
+            <a:schemeClr val="accent1"/>
+          </a:effectRef>
+          <a:fontRef idx="minor">
+            <a:schemeClr val="lt1"/>
+          </a:fontRef>
+        </p:style>
+        <p:txBody>
+          <a:bodyPr rtlCol="0" anchor="ctr"/>
+          <a:lstStyle/>
+          <a:p>
+            <a:pPr algn="ctr"/>
+          </a:p>
+        </p:txBody>
+      </p:sp>
+      <p:sp>
+        <p:nvSpPr>
+          <p:cNvPr id="12" name="TextBox 11"/>
+          <p:cNvSpPr txBox="1"/>
+          <p:nvPr/>
+        </p:nvSpPr>
+        <p:spPr>
+          <a:xfrm>
+            <a:off x="566928" y="2353665"/>
+            <a:ext cx="1828800" cy="372160"/>
+          </a:xfrm>
+          <a:prstGeom prst="rect">
+            <a:avLst/>
+          </a:prstGeom>
+          <a:noFill/>
+        </p:spPr>
+        <p:txBody>
+          <a:bodyPr wrap="square">
+            <a:spAutoFit/>
+          </a:bodyPr>
+          <a:lstStyle/>
+          <a:p>
+            <a:pPr algn="l"/>
+            <a:r>
+              <a:rPr sz="1400" b="0" i="0">
+                <a:solidFill>
+                  <a:srgbClr val="20425A"/>
+                </a:solidFill>
+                <a:latin typeface="Arial"/>
+              </a:rPr>
+              <a:t>9:45 – 10:30</a:t>
+            </a:r>
+          </a:p>
+        </p:txBody>
+      </p:sp>
+      <p:sp>
+        <p:nvSpPr>
+          <p:cNvPr id="13" name="TextBox 12"/>
+          <p:cNvSpPr txBox="1"/>
+          <p:nvPr/>
+        </p:nvSpPr>
+        <p:spPr>
+          <a:xfrm>
+            <a:off x="2606040" y="2353665"/>
+            <a:ext cx="9034272" cy="372160"/>
+          </a:xfrm>
+          <a:prstGeom prst="rect">
+            <a:avLst/>
+          </a:prstGeom>
+          <a:noFill/>
+        </p:spPr>
+        <p:txBody>
+          <a:bodyPr wrap="square">
+            <a:spAutoFit/>
+          </a:bodyPr>
+          <a:lstStyle/>
+          <a:p>
+            <a:pPr algn="l"/>
+            <a:r>
+              <a:rPr sz="1700" b="0" i="0">
                 <a:solidFill>
                   <a:srgbClr val="191919"/>
                 </a:solidFill>
-              </a:rPr>
-              <a:t>An ad-hoc SQL query without formal definition</a:t>
-            </a:r>
-          </a:p>
-          <a:p>
-            <a:pPr>
-              <a:spcBef>
-                <a:spcPts val="500"/>
-              </a:spcBef>
-            </a:pPr>
-            <a:r>
-              <a:rPr sz="1700">
+                <a:latin typeface="Arial"/>
+              </a:rPr>
+              <a:t>The four parts of a cohort definition</a:t>
+            </a:r>
+          </a:p>
+        </p:txBody>
+      </p:sp>
+      <p:sp>
+        <p:nvSpPr>
+          <p:cNvPr id="14" name="Rectangle 13"/>
+          <p:cNvSpPr/>
+          <p:nvPr/>
+        </p:nvSpPr>
+        <p:spPr>
+          <a:xfrm>
+            <a:off x="475488" y="2826410"/>
+            <a:ext cx="1965960" cy="481888"/>
+          </a:xfrm>
+          <a:prstGeom prst="rect">
+            <a:avLst/>
+          </a:prstGeom>
+          <a:solidFill>
+            <a:srgbClr val="F5F0FF"/>
+          </a:solidFill>
+          <a:ln>
+            <a:noFill/>
+          </a:ln>
+        </p:spPr>
+        <p:style>
+          <a:lnRef idx="1">
+            <a:schemeClr val="accent1"/>
+          </a:lnRef>
+          <a:fillRef idx="3">
+            <a:schemeClr val="accent1"/>
+          </a:fillRef>
+          <a:effectRef idx="2">
+            <a:schemeClr val="accent1"/>
+          </a:effectRef>
+          <a:fontRef idx="minor">
+            <a:schemeClr val="lt1"/>
+          </a:fontRef>
+        </p:style>
+        <p:txBody>
+          <a:bodyPr rtlCol="0" anchor="ctr"/>
+          <a:lstStyle/>
+          <a:p>
+            <a:pPr algn="ctr"/>
+          </a:p>
+        </p:txBody>
+      </p:sp>
+      <p:sp>
+        <p:nvSpPr>
+          <p:cNvPr id="15" name="TextBox 14"/>
+          <p:cNvSpPr txBox="1"/>
+          <p:nvPr/>
+        </p:nvSpPr>
+        <p:spPr>
+          <a:xfrm>
+            <a:off x="566928" y="2908706"/>
+            <a:ext cx="1828800" cy="372160"/>
+          </a:xfrm>
+          <a:prstGeom prst="rect">
+            <a:avLst/>
+          </a:prstGeom>
+          <a:noFill/>
+        </p:spPr>
+        <p:txBody>
+          <a:bodyPr wrap="square">
+            <a:spAutoFit/>
+          </a:bodyPr>
+          <a:lstStyle/>
+          <a:p>
+            <a:pPr algn="l"/>
+            <a:r>
+              <a:rPr sz="1400" b="0" i="0">
+                <a:solidFill>
+                  <a:srgbClr val="20425A"/>
+                </a:solidFill>
+                <a:latin typeface="Arial"/>
+              </a:rPr>
+              <a:t>10:30 – 10:45</a:t>
+            </a:r>
+          </a:p>
+        </p:txBody>
+      </p:sp>
+      <p:sp>
+        <p:nvSpPr>
+          <p:cNvPr id="16" name="TextBox 15"/>
+          <p:cNvSpPr txBox="1"/>
+          <p:nvPr/>
+        </p:nvSpPr>
+        <p:spPr>
+          <a:xfrm>
+            <a:off x="2606040" y="2908706"/>
+            <a:ext cx="9034272" cy="372160"/>
+          </a:xfrm>
+          <a:prstGeom prst="rect">
+            <a:avLst/>
+          </a:prstGeom>
+          <a:noFill/>
+        </p:spPr>
+        <p:txBody>
+          <a:bodyPr wrap="square">
+            <a:spAutoFit/>
+          </a:bodyPr>
+          <a:lstStyle/>
+          <a:p>
+            <a:pPr algn="l"/>
+            <a:r>
+              <a:rPr sz="1700" b="0" i="0">
                 <a:solidFill>
                   <a:srgbClr val="191919"/>
                 </a:solidFill>
-              </a:rPr>
-              <a:t>A list of concept IDs (that's a concept set — different thing)</a:t>
-            </a:r>
-          </a:p>
-          <a:p>
-            <a:pPr>
-              <a:spcBef>
-                <a:spcPts val="500"/>
-              </a:spcBef>
-            </a:pPr>
-            <a:r>
-              <a:rPr sz="1700">
+                <a:latin typeface="Arial"/>
+              </a:rPr>
+              <a:t>Break</a:t>
+            </a:r>
+          </a:p>
+        </p:txBody>
+      </p:sp>
+      <p:sp>
+        <p:nvSpPr>
+          <p:cNvPr id="17" name="Rectangle 16"/>
+          <p:cNvSpPr/>
+          <p:nvPr/>
+        </p:nvSpPr>
+        <p:spPr>
+          <a:xfrm>
+            <a:off x="475488" y="3381451"/>
+            <a:ext cx="1965960" cy="481888"/>
+          </a:xfrm>
+          <a:prstGeom prst="rect">
+            <a:avLst/>
+          </a:prstGeom>
+          <a:solidFill>
+            <a:srgbClr val="ECDFF3"/>
+          </a:solidFill>
+          <a:ln>
+            <a:noFill/>
+          </a:ln>
+        </p:spPr>
+        <p:style>
+          <a:lnRef idx="1">
+            <a:schemeClr val="accent1"/>
+          </a:lnRef>
+          <a:fillRef idx="3">
+            <a:schemeClr val="accent1"/>
+          </a:fillRef>
+          <a:effectRef idx="2">
+            <a:schemeClr val="accent1"/>
+          </a:effectRef>
+          <a:fontRef idx="minor">
+            <a:schemeClr val="lt1"/>
+          </a:fontRef>
+        </p:style>
+        <p:txBody>
+          <a:bodyPr rtlCol="0" anchor="ctr"/>
+          <a:lstStyle/>
+          <a:p>
+            <a:pPr algn="ctr"/>
+          </a:p>
+        </p:txBody>
+      </p:sp>
+      <p:sp>
+        <p:nvSpPr>
+          <p:cNvPr id="18" name="TextBox 17"/>
+          <p:cNvSpPr txBox="1"/>
+          <p:nvPr/>
+        </p:nvSpPr>
+        <p:spPr>
+          <a:xfrm>
+            <a:off x="566928" y="3463747"/>
+            <a:ext cx="1828800" cy="372160"/>
+          </a:xfrm>
+          <a:prstGeom prst="rect">
+            <a:avLst/>
+          </a:prstGeom>
+          <a:noFill/>
+        </p:spPr>
+        <p:txBody>
+          <a:bodyPr wrap="square">
+            <a:spAutoFit/>
+          </a:bodyPr>
+          <a:lstStyle/>
+          <a:p>
+            <a:pPr algn="l"/>
+            <a:r>
+              <a:rPr sz="1400" b="0" i="0">
+                <a:solidFill>
+                  <a:srgbClr val="20425A"/>
+                </a:solidFill>
+                <a:latin typeface="Arial"/>
+              </a:rPr>
+              <a:t>10:45 – 11:30</a:t>
+            </a:r>
+          </a:p>
+        </p:txBody>
+      </p:sp>
+      <p:sp>
+        <p:nvSpPr>
+          <p:cNvPr id="19" name="TextBox 18"/>
+          <p:cNvSpPr txBox="1"/>
+          <p:nvPr/>
+        </p:nvSpPr>
+        <p:spPr>
+          <a:xfrm>
+            <a:off x="2606040" y="3463747"/>
+            <a:ext cx="9034272" cy="372160"/>
+          </a:xfrm>
+          <a:prstGeom prst="rect">
+            <a:avLst/>
+          </a:prstGeom>
+          <a:noFill/>
+        </p:spPr>
+        <p:txBody>
+          <a:bodyPr wrap="square">
+            <a:spAutoFit/>
+          </a:bodyPr>
+          <a:lstStyle/>
+          <a:p>
+            <a:pPr algn="l"/>
+            <a:r>
+              <a:rPr sz="1700" b="0" i="0">
                 <a:solidFill>
                   <a:srgbClr val="191919"/>
                 </a:solidFill>
-              </a:rPr>
-              <a:t>An un-timestamped set of people who 'have' a condition</a:t>
-            </a:r>
-          </a:p>
-          <a:p>
-            <a:pPr>
-              <a:spcBef>
-                <a:spcPts val="500"/>
-              </a:spcBef>
-            </a:pPr>
-            <a:r>
-              <a:rPr sz="1700">
+                <a:latin typeface="Arial"/>
+              </a:rPr>
+              <a:t>Temporal logic and inclusion criteria deep dive</a:t>
+            </a:r>
+          </a:p>
+        </p:txBody>
+      </p:sp>
+      <p:sp>
+        <p:nvSpPr>
+          <p:cNvPr id="20" name="Rectangle 19"/>
+          <p:cNvSpPr/>
+          <p:nvPr/>
+        </p:nvSpPr>
+        <p:spPr>
+          <a:xfrm>
+            <a:off x="475488" y="3936492"/>
+            <a:ext cx="1965960" cy="481888"/>
+          </a:xfrm>
+          <a:prstGeom prst="rect">
+            <a:avLst/>
+          </a:prstGeom>
+          <a:solidFill>
+            <a:srgbClr val="F5F0FF"/>
+          </a:solidFill>
+          <a:ln>
+            <a:noFill/>
+          </a:ln>
+        </p:spPr>
+        <p:style>
+          <a:lnRef idx="1">
+            <a:schemeClr val="accent1"/>
+          </a:lnRef>
+          <a:fillRef idx="3">
+            <a:schemeClr val="accent1"/>
+          </a:fillRef>
+          <a:effectRef idx="2">
+            <a:schemeClr val="accent1"/>
+          </a:effectRef>
+          <a:fontRef idx="minor">
+            <a:schemeClr val="lt1"/>
+          </a:fontRef>
+        </p:style>
+        <p:txBody>
+          <a:bodyPr rtlCol="0" anchor="ctr"/>
+          <a:lstStyle/>
+          <a:p>
+            <a:pPr algn="ctr"/>
+          </a:p>
+        </p:txBody>
+      </p:sp>
+      <p:sp>
+        <p:nvSpPr>
+          <p:cNvPr id="21" name="TextBox 20"/>
+          <p:cNvSpPr txBox="1"/>
+          <p:nvPr/>
+        </p:nvSpPr>
+        <p:spPr>
+          <a:xfrm>
+            <a:off x="566928" y="4018788"/>
+            <a:ext cx="1828800" cy="372160"/>
+          </a:xfrm>
+          <a:prstGeom prst="rect">
+            <a:avLst/>
+          </a:prstGeom>
+          <a:noFill/>
+        </p:spPr>
+        <p:txBody>
+          <a:bodyPr wrap="square">
+            <a:spAutoFit/>
+          </a:bodyPr>
+          <a:lstStyle/>
+          <a:p>
+            <a:pPr algn="l"/>
+            <a:r>
+              <a:rPr sz="1400" b="0" i="0">
+                <a:solidFill>
+                  <a:srgbClr val="20425A"/>
+                </a:solidFill>
+                <a:latin typeface="Arial"/>
+              </a:rPr>
+              <a:t>11:30 – 12:00</a:t>
+            </a:r>
+          </a:p>
+        </p:txBody>
+      </p:sp>
+      <p:sp>
+        <p:nvSpPr>
+          <p:cNvPr id="22" name="TextBox 21"/>
+          <p:cNvSpPr txBox="1"/>
+          <p:nvPr/>
+        </p:nvSpPr>
+        <p:spPr>
+          <a:xfrm>
+            <a:off x="2606040" y="4018788"/>
+            <a:ext cx="9034272" cy="372160"/>
+          </a:xfrm>
+          <a:prstGeom prst="rect">
+            <a:avLst/>
+          </a:prstGeom>
+          <a:noFill/>
+        </p:spPr>
+        <p:txBody>
+          <a:bodyPr wrap="square">
+            <a:spAutoFit/>
+          </a:bodyPr>
+          <a:lstStyle/>
+          <a:p>
+            <a:pPr algn="l"/>
+            <a:r>
+              <a:rPr sz="1700" b="0" i="0">
                 <a:solidFill>
                   <a:srgbClr val="191919"/>
                 </a:solidFill>
-              </a:rPr>
-              <a:t>A static export that ignores observation period</a:t>
+                <a:latin typeface="Arial"/>
+              </a:rPr>
+              <a:t>Live demo: building new-user metformin cohort in ATLAS</a:t>
+            </a:r>
+          </a:p>
+        </p:txBody>
+      </p:sp>
+      <p:sp>
+        <p:nvSpPr>
+          <p:cNvPr id="23" name="Rectangle 22"/>
+          <p:cNvSpPr/>
+          <p:nvPr/>
+        </p:nvSpPr>
+        <p:spPr>
+          <a:xfrm>
+            <a:off x="475488" y="4491532"/>
+            <a:ext cx="1965960" cy="481888"/>
+          </a:xfrm>
+          <a:prstGeom prst="rect">
+            <a:avLst/>
+          </a:prstGeom>
+          <a:solidFill>
+            <a:srgbClr val="ECDFF3"/>
+          </a:solidFill>
+          <a:ln>
+            <a:noFill/>
+          </a:ln>
+        </p:spPr>
+        <p:style>
+          <a:lnRef idx="1">
+            <a:schemeClr val="accent1"/>
+          </a:lnRef>
+          <a:fillRef idx="3">
+            <a:schemeClr val="accent1"/>
+          </a:fillRef>
+          <a:effectRef idx="2">
+            <a:schemeClr val="accent1"/>
+          </a:effectRef>
+          <a:fontRef idx="minor">
+            <a:schemeClr val="lt1"/>
+          </a:fontRef>
+        </p:style>
+        <p:txBody>
+          <a:bodyPr rtlCol="0" anchor="ctr"/>
+          <a:lstStyle/>
+          <a:p>
+            <a:pPr algn="ctr"/>
+          </a:p>
+        </p:txBody>
+      </p:sp>
+      <p:sp>
+        <p:nvSpPr>
+          <p:cNvPr id="24" name="TextBox 23"/>
+          <p:cNvSpPr txBox="1"/>
+          <p:nvPr/>
+        </p:nvSpPr>
+        <p:spPr>
+          <a:xfrm>
+            <a:off x="566928" y="4573828"/>
+            <a:ext cx="1828800" cy="372160"/>
+          </a:xfrm>
+          <a:prstGeom prst="rect">
+            <a:avLst/>
+          </a:prstGeom>
+          <a:noFill/>
+        </p:spPr>
+        <p:txBody>
+          <a:bodyPr wrap="square">
+            <a:spAutoFit/>
+          </a:bodyPr>
+          <a:lstStyle/>
+          <a:p>
+            <a:pPr algn="l"/>
+            <a:r>
+              <a:rPr sz="1400" b="0" i="0">
+                <a:solidFill>
+                  <a:srgbClr val="20425A"/>
+                </a:solidFill>
+                <a:latin typeface="Arial"/>
+              </a:rPr>
+              <a:t>12:00 – 13:00</a:t>
+            </a:r>
+          </a:p>
+        </p:txBody>
+      </p:sp>
+      <p:sp>
+        <p:nvSpPr>
+          <p:cNvPr id="25" name="TextBox 24"/>
+          <p:cNvSpPr txBox="1"/>
+          <p:nvPr/>
+        </p:nvSpPr>
+        <p:spPr>
+          <a:xfrm>
+            <a:off x="2606040" y="4573828"/>
+            <a:ext cx="9034272" cy="372160"/>
+          </a:xfrm>
+          <a:prstGeom prst="rect">
+            <a:avLst/>
+          </a:prstGeom>
+          <a:noFill/>
+        </p:spPr>
+        <p:txBody>
+          <a:bodyPr wrap="square">
+            <a:spAutoFit/>
+          </a:bodyPr>
+          <a:lstStyle/>
+          <a:p>
+            <a:pPr algn="l"/>
+            <a:r>
+              <a:rPr sz="1700" b="0" i="0">
+                <a:solidFill>
+                  <a:srgbClr val="191919"/>
+                </a:solidFill>
+                <a:latin typeface="Arial"/>
+              </a:rPr>
+              <a:t>Lunch</a:t>
+            </a:r>
+          </a:p>
+        </p:txBody>
+      </p:sp>
+      <p:sp>
+        <p:nvSpPr>
+          <p:cNvPr id="26" name="Rectangle 25"/>
+          <p:cNvSpPr/>
+          <p:nvPr/>
+        </p:nvSpPr>
+        <p:spPr>
+          <a:xfrm>
+            <a:off x="475488" y="5046573"/>
+            <a:ext cx="1965960" cy="481888"/>
+          </a:xfrm>
+          <a:prstGeom prst="rect">
+            <a:avLst/>
+          </a:prstGeom>
+          <a:solidFill>
+            <a:srgbClr val="F5F0FF"/>
+          </a:solidFill>
+          <a:ln>
+            <a:noFill/>
+          </a:ln>
+        </p:spPr>
+        <p:style>
+          <a:lnRef idx="1">
+            <a:schemeClr val="accent1"/>
+          </a:lnRef>
+          <a:fillRef idx="3">
+            <a:schemeClr val="accent1"/>
+          </a:fillRef>
+          <a:effectRef idx="2">
+            <a:schemeClr val="accent1"/>
+          </a:effectRef>
+          <a:fontRef idx="minor">
+            <a:schemeClr val="lt1"/>
+          </a:fontRef>
+        </p:style>
+        <p:txBody>
+          <a:bodyPr rtlCol="0" anchor="ctr"/>
+          <a:lstStyle/>
+          <a:p>
+            <a:pPr algn="ctr"/>
+          </a:p>
+        </p:txBody>
+      </p:sp>
+      <p:sp>
+        <p:nvSpPr>
+          <p:cNvPr id="27" name="TextBox 26"/>
+          <p:cNvSpPr txBox="1"/>
+          <p:nvPr/>
+        </p:nvSpPr>
+        <p:spPr>
+          <a:xfrm>
+            <a:off x="566928" y="5128869"/>
+            <a:ext cx="1828800" cy="372160"/>
+          </a:xfrm>
+          <a:prstGeom prst="rect">
+            <a:avLst/>
+          </a:prstGeom>
+          <a:noFill/>
+        </p:spPr>
+        <p:txBody>
+          <a:bodyPr wrap="square">
+            <a:spAutoFit/>
+          </a:bodyPr>
+          <a:lstStyle/>
+          <a:p>
+            <a:pPr algn="l"/>
+            <a:r>
+              <a:rPr sz="1400" b="0" i="0">
+                <a:solidFill>
+                  <a:srgbClr val="20425A"/>
+                </a:solidFill>
+                <a:latin typeface="Arial"/>
+              </a:rPr>
+              <a:t>13:00 – 14:30</a:t>
+            </a:r>
+          </a:p>
+        </p:txBody>
+      </p:sp>
+      <p:sp>
+        <p:nvSpPr>
+          <p:cNvPr id="28" name="TextBox 27"/>
+          <p:cNvSpPr txBox="1"/>
+          <p:nvPr/>
+        </p:nvSpPr>
+        <p:spPr>
+          <a:xfrm>
+            <a:off x="2606040" y="5128869"/>
+            <a:ext cx="9034272" cy="372160"/>
+          </a:xfrm>
+          <a:prstGeom prst="rect">
+            <a:avLst/>
+          </a:prstGeom>
+          <a:noFill/>
+        </p:spPr>
+        <p:txBody>
+          <a:bodyPr wrap="square">
+            <a:spAutoFit/>
+          </a:bodyPr>
+          <a:lstStyle/>
+          <a:p>
+            <a:pPr algn="l"/>
+            <a:r>
+              <a:rPr sz="1700" b="0" i="0">
+                <a:solidFill>
+                  <a:srgbClr val="191919"/>
+                </a:solidFill>
+                <a:latin typeface="Arial"/>
+              </a:rPr>
+              <a:t>ATLAS lab: build, generate, read attrition, characterize</a:t>
+            </a:r>
+          </a:p>
+        </p:txBody>
+      </p:sp>
+      <p:sp>
+        <p:nvSpPr>
+          <p:cNvPr id="29" name="Rectangle 28"/>
+          <p:cNvSpPr/>
+          <p:nvPr/>
+        </p:nvSpPr>
+        <p:spPr>
+          <a:xfrm>
+            <a:off x="475488" y="5601614"/>
+            <a:ext cx="1965960" cy="481888"/>
+          </a:xfrm>
+          <a:prstGeom prst="rect">
+            <a:avLst/>
+          </a:prstGeom>
+          <a:solidFill>
+            <a:srgbClr val="ECDFF3"/>
+          </a:solidFill>
+          <a:ln>
+            <a:noFill/>
+          </a:ln>
+        </p:spPr>
+        <p:style>
+          <a:lnRef idx="1">
+            <a:schemeClr val="accent1"/>
+          </a:lnRef>
+          <a:fillRef idx="3">
+            <a:schemeClr val="accent1"/>
+          </a:fillRef>
+          <a:effectRef idx="2">
+            <a:schemeClr val="accent1"/>
+          </a:effectRef>
+          <a:fontRef idx="minor">
+            <a:schemeClr val="lt1"/>
+          </a:fontRef>
+        </p:style>
+        <p:txBody>
+          <a:bodyPr rtlCol="0" anchor="ctr"/>
+          <a:lstStyle/>
+          <a:p>
+            <a:pPr algn="ctr"/>
+          </a:p>
+        </p:txBody>
+      </p:sp>
+      <p:sp>
+        <p:nvSpPr>
+          <p:cNvPr id="30" name="TextBox 29"/>
+          <p:cNvSpPr txBox="1"/>
+          <p:nvPr/>
+        </p:nvSpPr>
+        <p:spPr>
+          <a:xfrm>
+            <a:off x="566928" y="5683910"/>
+            <a:ext cx="1828800" cy="372160"/>
+          </a:xfrm>
+          <a:prstGeom prst="rect">
+            <a:avLst/>
+          </a:prstGeom>
+          <a:noFill/>
+        </p:spPr>
+        <p:txBody>
+          <a:bodyPr wrap="square">
+            <a:spAutoFit/>
+          </a:bodyPr>
+          <a:lstStyle/>
+          <a:p>
+            <a:pPr algn="l"/>
+            <a:r>
+              <a:rPr sz="1400" b="0" i="0">
+                <a:solidFill>
+                  <a:srgbClr val="20425A"/>
+                </a:solidFill>
+                <a:latin typeface="Arial"/>
+              </a:rPr>
+              <a:t>14:30 – 15:00</a:t>
+            </a:r>
+          </a:p>
+        </p:txBody>
+      </p:sp>
+      <p:sp>
+        <p:nvSpPr>
+          <p:cNvPr id="31" name="TextBox 30"/>
+          <p:cNvSpPr txBox="1"/>
+          <p:nvPr/>
+        </p:nvSpPr>
+        <p:spPr>
+          <a:xfrm>
+            <a:off x="2606040" y="5683910"/>
+            <a:ext cx="9034272" cy="372160"/>
+          </a:xfrm>
+          <a:prstGeom prst="rect">
+            <a:avLst/>
+          </a:prstGeom>
+          <a:noFill/>
+        </p:spPr>
+        <p:txBody>
+          <a:bodyPr wrap="square">
+            <a:spAutoFit/>
+          </a:bodyPr>
+          <a:lstStyle/>
+          <a:p>
+            <a:pPr algn="l"/>
+            <a:r>
+              <a:rPr sz="1700" b="0" i="0">
+                <a:solidFill>
+                  <a:srgbClr val="191919"/>
+                </a:solidFill>
+                <a:latin typeface="Arial"/>
+              </a:rPr>
+              <a:t>Export cohort SQL and validate counts</a:t>
+            </a:r>
+          </a:p>
+        </p:txBody>
+      </p:sp>
+      <p:sp>
+        <p:nvSpPr>
+          <p:cNvPr id="32" name="Rectangle 31"/>
+          <p:cNvSpPr/>
+          <p:nvPr/>
+        </p:nvSpPr>
+        <p:spPr>
+          <a:xfrm>
+            <a:off x="475488" y="6156655"/>
+            <a:ext cx="1965960" cy="481888"/>
+          </a:xfrm>
+          <a:prstGeom prst="rect">
+            <a:avLst/>
+          </a:prstGeom>
+          <a:solidFill>
+            <a:srgbClr val="F5F0FF"/>
+          </a:solidFill>
+          <a:ln>
+            <a:noFill/>
+          </a:ln>
+        </p:spPr>
+        <p:style>
+          <a:lnRef idx="1">
+            <a:schemeClr val="accent1"/>
+          </a:lnRef>
+          <a:fillRef idx="3">
+            <a:schemeClr val="accent1"/>
+          </a:fillRef>
+          <a:effectRef idx="2">
+            <a:schemeClr val="accent1"/>
+          </a:effectRef>
+          <a:fontRef idx="minor">
+            <a:schemeClr val="lt1"/>
+          </a:fontRef>
+        </p:style>
+        <p:txBody>
+          <a:bodyPr rtlCol="0" anchor="ctr"/>
+          <a:lstStyle/>
+          <a:p>
+            <a:pPr algn="ctr"/>
+          </a:p>
+        </p:txBody>
+      </p:sp>
+      <p:sp>
+        <p:nvSpPr>
+          <p:cNvPr id="33" name="TextBox 32"/>
+          <p:cNvSpPr txBox="1"/>
+          <p:nvPr/>
+        </p:nvSpPr>
+        <p:spPr>
+          <a:xfrm>
+            <a:off x="566928" y="6238951"/>
+            <a:ext cx="1828800" cy="372160"/>
+          </a:xfrm>
+          <a:prstGeom prst="rect">
+            <a:avLst/>
+          </a:prstGeom>
+          <a:noFill/>
+        </p:spPr>
+        <p:txBody>
+          <a:bodyPr wrap="square">
+            <a:spAutoFit/>
+          </a:bodyPr>
+          <a:lstStyle/>
+          <a:p>
+            <a:pPr algn="l"/>
+            <a:r>
+              <a:rPr sz="1400" b="0" i="0">
+                <a:solidFill>
+                  <a:srgbClr val="20425A"/>
+                </a:solidFill>
+                <a:latin typeface="Arial"/>
+              </a:rPr>
+              <a:t>15:00 – 15:30</a:t>
+            </a:r>
+          </a:p>
+        </p:txBody>
+      </p:sp>
+      <p:sp>
+        <p:nvSpPr>
+          <p:cNvPr id="34" name="TextBox 33"/>
+          <p:cNvSpPr txBox="1"/>
+          <p:nvPr/>
+        </p:nvSpPr>
+        <p:spPr>
+          <a:xfrm>
+            <a:off x="2606040" y="6238951"/>
+            <a:ext cx="9034272" cy="372160"/>
+          </a:xfrm>
+          <a:prstGeom prst="rect">
+            <a:avLst/>
+          </a:prstGeom>
+          <a:noFill/>
+        </p:spPr>
+        <p:txBody>
+          <a:bodyPr wrap="square">
+            <a:spAutoFit/>
+          </a:bodyPr>
+          <a:lstStyle/>
+          <a:p>
+            <a:pPr algn="l"/>
+            <a:r>
+              <a:rPr sz="1700" b="0" i="0">
+                <a:solidFill>
+                  <a:srgbClr val="191919"/>
+                </a:solidFill>
+                <a:latin typeface="Arial"/>
+              </a:rPr>
+              <a:t>Recap, homework, Day 4 preview</a:t>
             </a:r>
           </a:p>
         </p:txBody>
@@ -9655,7 +10593,7 @@
             <a:avLst/>
           </a:prstGeom>
           <a:solidFill>
-            <a:srgbClr val="4B2682"/>
+            <a:srgbClr val="904199"/>
           </a:solidFill>
           <a:ln>
             <a:noFill/>
@@ -9698,7 +10636,7 @@
             <a:avLst/>
           </a:prstGeom>
           <a:solidFill>
-            <a:srgbClr val="7B4FA8"/>
+            <a:srgbClr val="20425A"/>
           </a:solidFill>
           <a:ln>
             <a:noFill/>
@@ -9734,14 +10672,14 @@
         </p:nvSpPr>
         <p:spPr>
           <a:xfrm>
-            <a:off x="475488" y="1737360"/>
-            <a:ext cx="822960" cy="822960"/>
+            <a:off x="0" y="6793992"/>
+            <a:ext cx="12188952" cy="64008"/>
           </a:xfrm>
           <a:prstGeom prst="rect">
             <a:avLst/>
           </a:prstGeom>
           <a:solidFill>
-            <a:srgbClr val="7B4FA8"/>
+            <a:srgbClr val="20425A"/>
           </a:solidFill>
           <a:ln>
             <a:noFill/>
@@ -9777,8 +10715,8 @@
         </p:nvSpPr>
         <p:spPr>
           <a:xfrm>
-            <a:off x="475488" y="1801368"/>
-            <a:ext cx="822960" cy="731520"/>
+            <a:off x="475488" y="1828800"/>
+            <a:ext cx="11237976" cy="1463040"/>
           </a:xfrm>
           <a:prstGeom prst="rect">
             <a:avLst/>
@@ -9791,14 +10729,15 @@
           </a:bodyPr>
           <a:lstStyle/>
           <a:p>
-            <a:pPr algn="ctr"/>
-            <a:r>
-              <a:rPr sz="3400" b="1" i="0">
+            <a:pPr algn="l"/>
+            <a:r>
+              <a:rPr sz="6000" b="1" i="0">
                 <a:solidFill>
                   <a:srgbClr val="FFFFFF"/>
                 </a:solidFill>
-              </a:rPr>
-              <a:t>The 4 Parts</a:t>
+                <a:latin typeface="Gotham Narrow"/>
+              </a:rPr>
+              <a:t>Kahoot!</a:t>
             </a:r>
           </a:p>
         </p:txBody>
@@ -9811,8 +10750,8 @@
         </p:nvSpPr>
         <p:spPr>
           <a:xfrm>
-            <a:off x="1737360" y="1828800"/>
-            <a:ext cx="9902952" cy="1005840"/>
+            <a:off x="475488" y="3474720"/>
+            <a:ext cx="11237976" cy="822960"/>
           </a:xfrm>
           <a:prstGeom prst="rect">
             <a:avLst/>
@@ -9827,12 +10766,13 @@
           <a:p>
             <a:pPr algn="l"/>
             <a:r>
-              <a:rPr sz="3600" b="1" i="0">
+              <a:rPr sz="2400" b="0" i="0">
                 <a:solidFill>
                   <a:srgbClr val="FFFFFF"/>
                 </a:solidFill>
-              </a:rPr>
-              <a:t>Every Cohort Definition</a:t>
+                <a:latin typeface="Arial"/>
+              </a:rPr>
+              <a:t>Quick warm-up — let's see what stuck.</a:t>
             </a:r>
           </a:p>
         </p:txBody>
@@ -9845,8 +10785,8 @@
         </p:nvSpPr>
         <p:spPr>
           <a:xfrm>
-            <a:off x="475488" y="3200400"/>
-            <a:ext cx="11237976" cy="1188720"/>
+            <a:off x="475488" y="4389120"/>
+            <a:ext cx="11237976" cy="640080"/>
           </a:xfrm>
           <a:prstGeom prst="rect">
             <a:avLst/>
@@ -9861,12 +10801,13 @@
           <a:p>
             <a:pPr algn="l"/>
             <a:r>
-              <a:rPr sz="2000" b="0" i="0">
-                <a:solidFill>
-                  <a:srgbClr val="C8B4E6"/>
-                </a:solidFill>
-              </a:rPr>
-              <a:t>Entry Event · Concept Sets · Inclusion Criteria · Exit</a:t>
+              <a:rPr sz="1800" b="0" i="0">
+                <a:solidFill>
+                  <a:srgbClr val="F0E3F5"/>
+                </a:solidFill>
+                <a:latin typeface="Arial"/>
+              </a:rPr>
+              <a:t>Join at kahoot.it  ·  enter the game PIN on screen</a:t>
             </a:r>
           </a:p>
         </p:txBody>
@@ -9898,13 +10839,13 @@
         <p:spPr>
           <a:xfrm>
             <a:off x="0" y="0"/>
-            <a:ext cx="12188952" cy="960120"/>
+            <a:ext cx="12188952" cy="6858000"/>
           </a:xfrm>
           <a:prstGeom prst="rect">
             <a:avLst/>
           </a:prstGeom>
           <a:solidFill>
-            <a:srgbClr val="4B2682"/>
+            <a:srgbClr val="F6F6F6"/>
           </a:solidFill>
           <a:ln>
             <a:noFill/>
@@ -9940,14 +10881,14 @@
         </p:nvSpPr>
         <p:spPr>
           <a:xfrm>
-            <a:off x="0" y="923544"/>
-            <a:ext cx="12188952" cy="36576"/>
+            <a:off x="0" y="0"/>
+            <a:ext cx="201168" cy="6858000"/>
           </a:xfrm>
           <a:prstGeom prst="rect">
             <a:avLst/>
           </a:prstGeom>
           <a:solidFill>
-            <a:srgbClr val="7B4FA8"/>
+            <a:srgbClr val="904199"/>
           </a:solidFill>
           <a:ln>
             <a:noFill/>
@@ -9983,8 +10924,8 @@
         </p:nvSpPr>
         <p:spPr>
           <a:xfrm>
-            <a:off x="475488" y="137160"/>
-            <a:ext cx="11713464" cy="777240"/>
+            <a:off x="1097280" y="1920240"/>
+            <a:ext cx="10177272" cy="2560320"/>
           </a:xfrm>
           <a:prstGeom prst="rect">
             <a:avLst/>
@@ -9999,12 +10940,13 @@
           <a:p>
             <a:pPr algn="l"/>
             <a:r>
-              <a:rPr sz="2800" b="1" i="0">
-                <a:solidFill>
-                  <a:srgbClr val="FFFFFF"/>
-                </a:solidFill>
-              </a:rPr>
-              <a:t>Part 1: Cohort Entry Event (Initial Event)</a:t>
+              <a:rPr sz="3200" b="1" i="1">
+                <a:solidFill>
+                  <a:srgbClr val="20425A"/>
+                </a:solidFill>
+                <a:latin typeface="Gotham Narrow"/>
+              </a:rPr>
+              <a:t>“I am always ready to learn although I do not always like being taught.”</a:t>
             </a:r>
           </a:p>
         </p:txBody>
@@ -10017,8 +10959,8 @@
         </p:nvSpPr>
         <p:spPr>
           <a:xfrm>
-            <a:off x="475488" y="1161288"/>
-            <a:ext cx="11237976" cy="5495544"/>
+            <a:off x="1097280" y="4663440"/>
+            <a:ext cx="10177272" cy="640080"/>
           </a:xfrm>
           <a:prstGeom prst="rect">
             <a:avLst/>
@@ -10031,108 +10973,15 @@
           </a:bodyPr>
           <a:lstStyle/>
           <a:p>
-            <a:pPr>
-              <a:spcBef>
-                <a:spcPts val="600"/>
-              </a:spcBef>
-            </a:pPr>
-            <a:r>
-              <a:rPr sz="1800">
-                <a:solidFill>
-                  <a:srgbClr val="191919"/>
-                </a:solidFill>
-              </a:rPr>
-              <a:t>The event that qualifies a person to enter the cohort</a:t>
-            </a:r>
-          </a:p>
-          <a:p>
-            <a:pPr>
-              <a:spcBef>
-                <a:spcPts val="600"/>
-              </a:spcBef>
-            </a:pPr>
-            <a:r>
-              <a:rPr sz="1800">
-                <a:solidFill>
-                  <a:srgbClr val="191919"/>
-                </a:solidFill>
-              </a:rPr>
-              <a:t>Examples: first drug exposure to metformin · first ALS diagnosis · first inpatient hospitalization</a:t>
-            </a:r>
-          </a:p>
-          <a:p>
-            <a:pPr>
-              <a:spcBef>
-                <a:spcPts val="600"/>
-              </a:spcBef>
-            </a:pPr>
-            <a:r>
-              <a:rPr sz="1800">
-                <a:solidFill>
-                  <a:srgbClr val="191919"/>
-                </a:solidFill>
-              </a:rPr>
-              <a:t>Built on a concept set — the concept set defines WHAT the event is</a:t>
-            </a:r>
-          </a:p>
-          <a:p>
-            <a:pPr>
-              <a:spcBef>
-                <a:spcPts val="600"/>
-              </a:spcBef>
-            </a:pPr>
-            <a:r>
-              <a:rPr sz="1800">
-                <a:solidFill>
-                  <a:srgbClr val="191919"/>
-                </a:solidFill>
-              </a:rPr>
-              <a:t>Usually restricted to the FIRST qualifying event per person (new-user design)</a:t>
-            </a:r>
-          </a:p>
-          <a:p>
-            <a:pPr>
-              <a:spcBef>
-                <a:spcPts val="600"/>
-              </a:spcBef>
-            </a:pPr>
-            <a:r>
-              <a:rPr sz="1800">
-                <a:solidFill>
-                  <a:srgbClr val="191919"/>
-                </a:solidFill>
-              </a:rPr>
-              <a:t>Time constraint: the entry event defines 'index date' — the temporal anchor for all inclusion rules</a:t>
-            </a:r>
-          </a:p>
-          <a:p>
-            <a:pPr>
-              <a:spcBef>
-                <a:spcPts val="600"/>
-              </a:spcBef>
-            </a:pPr>
-            <a:r>
-              <a:rPr sz="1800">
-                <a:solidFill>
-                  <a:srgbClr val="191919"/>
-                </a:solidFill>
-              </a:rPr>
-              <a:t>The entry event is the only event where a person can enter — if there are multiple, Atlas picks the first (if you specify that)</a:t>
-            </a:r>
-          </a:p>
-          <a:p>
-            <a:pPr>
-              <a:spcBef>
-                <a:spcPts val="600"/>
-              </a:spcBef>
-            </a:pPr>
-            <a:r>
-              <a:rPr sz="1800">
-                <a:solidFill>
-                  <a:srgbClr val="191919"/>
-                </a:solidFill>
-              </a:rPr>
-              <a:t>Entry event domain: Drug Exposure · Condition Occurrence · Measurement · Visit Occurrence · etc.</a:t>
+            <a:pPr algn="l"/>
+            <a:r>
+              <a:rPr sz="2000" b="0" i="0">
+                <a:solidFill>
+                  <a:srgbClr val="904199"/>
+                </a:solidFill>
+                <a:latin typeface="Arial"/>
+              </a:rPr>
+              <a:t>— Winston Churchill</a:t>
             </a:r>
           </a:p>
         </p:txBody>
@@ -10170,7 +11019,7 @@
             <a:avLst/>
           </a:prstGeom>
           <a:solidFill>
-            <a:srgbClr val="4B2682"/>
+            <a:srgbClr val="20425A"/>
           </a:solidFill>
           <a:ln>
             <a:noFill/>
@@ -10206,14 +11055,14 @@
         </p:nvSpPr>
         <p:spPr>
           <a:xfrm>
-            <a:off x="0" y="923544"/>
-            <a:ext cx="12188952" cy="36576"/>
+            <a:off x="0" y="905256"/>
+            <a:ext cx="12188952" cy="54864"/>
           </a:xfrm>
           <a:prstGeom prst="rect">
             <a:avLst/>
           </a:prstGeom>
           <a:solidFill>
-            <a:srgbClr val="7B4FA8"/>
+            <a:srgbClr val="904199"/>
           </a:solidFill>
           <a:ln>
             <a:noFill/>
@@ -10269,8 +11118,9 @@
                 <a:solidFill>
                   <a:srgbClr val="FFFFFF"/>
                 </a:solidFill>
-              </a:rPr>
-              <a:t>Part 2: Concept Sets — The Day 2 Building Block</a:t>
+                <a:latin typeface="Gotham Narrow"/>
+              </a:rPr>
+              <a:t>Learning Objectives</a:t>
             </a:r>
           </a:p>
         </p:txBody>
@@ -10283,8 +11133,8 @@
         </p:nvSpPr>
         <p:spPr>
           <a:xfrm>
-            <a:off x="475488" y="1161288"/>
-            <a:ext cx="11237976" cy="5495544"/>
+            <a:off x="475488" y="1124712"/>
+            <a:ext cx="11237976" cy="411480"/>
           </a:xfrm>
           <a:prstGeom prst="rect">
             <a:avLst/>
@@ -10297,93 +11147,693 @@
           </a:bodyPr>
           <a:lstStyle/>
           <a:p>
-            <a:pPr>
-              <a:spcBef>
-                <a:spcPts val="600"/>
-              </a:spcBef>
-            </a:pPr>
-            <a:r>
-              <a:rPr sz="1800">
+            <a:pPr algn="l"/>
+            <a:r>
+              <a:rPr sz="1700" b="0" i="1">
+                <a:solidFill>
+                  <a:srgbClr val="5A5A5A"/>
+                </a:solidFill>
+                <a:latin typeface="Arial"/>
+              </a:rPr>
+              <a:t>By the end of this session, you will be able to:</a:t>
+            </a:r>
+          </a:p>
+        </p:txBody>
+      </p:sp>
+      <p:sp>
+        <p:nvSpPr>
+          <p:cNvPr id="6" name="Rectangle 5"/>
+          <p:cNvSpPr/>
+          <p:nvPr/>
+        </p:nvSpPr>
+        <p:spPr>
+          <a:xfrm>
+            <a:off x="475488" y="1581912"/>
+            <a:ext cx="365760" cy="365760"/>
+          </a:xfrm>
+          <a:prstGeom prst="rect">
+            <a:avLst/>
+          </a:prstGeom>
+          <a:solidFill>
+            <a:srgbClr val="904199"/>
+          </a:solidFill>
+          <a:ln>
+            <a:noFill/>
+          </a:ln>
+        </p:spPr>
+        <p:style>
+          <a:lnRef idx="1">
+            <a:schemeClr val="accent1"/>
+          </a:lnRef>
+          <a:fillRef idx="3">
+            <a:schemeClr val="accent1"/>
+          </a:fillRef>
+          <a:effectRef idx="2">
+            <a:schemeClr val="accent1"/>
+          </a:effectRef>
+          <a:fontRef idx="minor">
+            <a:schemeClr val="lt1"/>
+          </a:fontRef>
+        </p:style>
+        <p:txBody>
+          <a:bodyPr rtlCol="0" anchor="ctr"/>
+          <a:lstStyle/>
+          <a:p>
+            <a:pPr algn="ctr"/>
+          </a:p>
+        </p:txBody>
+      </p:sp>
+      <p:sp>
+        <p:nvSpPr>
+          <p:cNvPr id="7" name="TextBox 6"/>
+          <p:cNvSpPr txBox="1"/>
+          <p:nvPr/>
+        </p:nvSpPr>
+        <p:spPr>
+          <a:xfrm>
+            <a:off x="475488" y="1609344"/>
+            <a:ext cx="365760" cy="338328"/>
+          </a:xfrm>
+          <a:prstGeom prst="rect">
+            <a:avLst/>
+          </a:prstGeom>
+          <a:noFill/>
+        </p:spPr>
+        <p:txBody>
+          <a:bodyPr wrap="square">
+            <a:spAutoFit/>
+          </a:bodyPr>
+          <a:lstStyle/>
+          <a:p>
+            <a:pPr algn="ctr"/>
+            <a:r>
+              <a:rPr sz="1500" b="1" i="0">
+                <a:solidFill>
+                  <a:srgbClr val="FFFFFF"/>
+                </a:solidFill>
+                <a:latin typeface="Arial"/>
+              </a:rPr>
+              <a:t>1</a:t>
+            </a:r>
+          </a:p>
+        </p:txBody>
+      </p:sp>
+      <p:sp>
+        <p:nvSpPr>
+          <p:cNvPr id="8" name="TextBox 7"/>
+          <p:cNvSpPr txBox="1"/>
+          <p:nvPr/>
+        </p:nvSpPr>
+        <p:spPr>
+          <a:xfrm>
+            <a:off x="987552" y="1581912"/>
+            <a:ext cx="10680192" cy="594360"/>
+          </a:xfrm>
+          <a:prstGeom prst="rect">
+            <a:avLst/>
+          </a:prstGeom>
+          <a:noFill/>
+        </p:spPr>
+        <p:txBody>
+          <a:bodyPr wrap="square">
+            <a:spAutoFit/>
+          </a:bodyPr>
+          <a:lstStyle/>
+          <a:p>
+            <a:pPr algn="l"/>
+            <a:r>
+              <a:rPr sz="1800" b="0" i="0">
                 <a:solidFill>
                   <a:srgbClr val="191919"/>
                 </a:solidFill>
-              </a:rPr>
-              <a:t>Every cohort entry event and inclusion rule is built on a concept set</a:t>
-            </a:r>
-          </a:p>
-          <a:p>
-            <a:pPr>
-              <a:spcBef>
-                <a:spcPts val="600"/>
-              </a:spcBef>
-            </a:pPr>
-            <a:r>
-              <a:rPr sz="1800">
+                <a:latin typeface="Arial"/>
+              </a:rPr>
+              <a:t>Define an OHDSI cohort and explain how it differs from a simple code list</a:t>
+            </a:r>
+          </a:p>
+        </p:txBody>
+      </p:sp>
+      <p:sp>
+        <p:nvSpPr>
+          <p:cNvPr id="9" name="Rectangle 8"/>
+          <p:cNvSpPr/>
+          <p:nvPr/>
+        </p:nvSpPr>
+        <p:spPr>
+          <a:xfrm>
+            <a:off x="475488" y="2249424"/>
+            <a:ext cx="365760" cy="365760"/>
+          </a:xfrm>
+          <a:prstGeom prst="rect">
+            <a:avLst/>
+          </a:prstGeom>
+          <a:solidFill>
+            <a:srgbClr val="904199"/>
+          </a:solidFill>
+          <a:ln>
+            <a:noFill/>
+          </a:ln>
+        </p:spPr>
+        <p:style>
+          <a:lnRef idx="1">
+            <a:schemeClr val="accent1"/>
+          </a:lnRef>
+          <a:fillRef idx="3">
+            <a:schemeClr val="accent1"/>
+          </a:fillRef>
+          <a:effectRef idx="2">
+            <a:schemeClr val="accent1"/>
+          </a:effectRef>
+          <a:fontRef idx="minor">
+            <a:schemeClr val="lt1"/>
+          </a:fontRef>
+        </p:style>
+        <p:txBody>
+          <a:bodyPr rtlCol="0" anchor="ctr"/>
+          <a:lstStyle/>
+          <a:p>
+            <a:pPr algn="ctr"/>
+          </a:p>
+        </p:txBody>
+      </p:sp>
+      <p:sp>
+        <p:nvSpPr>
+          <p:cNvPr id="10" name="TextBox 9"/>
+          <p:cNvSpPr txBox="1"/>
+          <p:nvPr/>
+        </p:nvSpPr>
+        <p:spPr>
+          <a:xfrm>
+            <a:off x="475488" y="2276856"/>
+            <a:ext cx="365760" cy="338328"/>
+          </a:xfrm>
+          <a:prstGeom prst="rect">
+            <a:avLst/>
+          </a:prstGeom>
+          <a:noFill/>
+        </p:spPr>
+        <p:txBody>
+          <a:bodyPr wrap="square">
+            <a:spAutoFit/>
+          </a:bodyPr>
+          <a:lstStyle/>
+          <a:p>
+            <a:pPr algn="ctr"/>
+            <a:r>
+              <a:rPr sz="1500" b="1" i="0">
+                <a:solidFill>
+                  <a:srgbClr val="FFFFFF"/>
+                </a:solidFill>
+                <a:latin typeface="Arial"/>
+              </a:rPr>
+              <a:t>2</a:t>
+            </a:r>
+          </a:p>
+        </p:txBody>
+      </p:sp>
+      <p:sp>
+        <p:nvSpPr>
+          <p:cNvPr id="11" name="TextBox 10"/>
+          <p:cNvSpPr txBox="1"/>
+          <p:nvPr/>
+        </p:nvSpPr>
+        <p:spPr>
+          <a:xfrm>
+            <a:off x="987552" y="2249424"/>
+            <a:ext cx="10680192" cy="594360"/>
+          </a:xfrm>
+          <a:prstGeom prst="rect">
+            <a:avLst/>
+          </a:prstGeom>
+          <a:noFill/>
+        </p:spPr>
+        <p:txBody>
+          <a:bodyPr wrap="square">
+            <a:spAutoFit/>
+          </a:bodyPr>
+          <a:lstStyle/>
+          <a:p>
+            <a:pPr algn="l"/>
+            <a:r>
+              <a:rPr sz="1800" b="0" i="0">
                 <a:solidFill>
                   <a:srgbClr val="191919"/>
                 </a:solidFill>
-              </a:rPr>
-              <a:t>The concept set defines 'what counts' as the clinical event</a:t>
-            </a:r>
-          </a:p>
-          <a:p>
-            <a:pPr>
-              <a:spcBef>
-                <a:spcPts val="600"/>
-              </a:spcBef>
-            </a:pPr>
-            <a:r>
-              <a:rPr sz="1800">
+                <a:latin typeface="Arial"/>
+              </a:rPr>
+              <a:t>Identify and apply the four parts: entry event, concept sets, inclusion criteria, and exit</a:t>
+            </a:r>
+          </a:p>
+        </p:txBody>
+      </p:sp>
+      <p:sp>
+        <p:nvSpPr>
+          <p:cNvPr id="12" name="Rectangle 11"/>
+          <p:cNvSpPr/>
+          <p:nvPr/>
+        </p:nvSpPr>
+        <p:spPr>
+          <a:xfrm>
+            <a:off x="475488" y="2916936"/>
+            <a:ext cx="365760" cy="365760"/>
+          </a:xfrm>
+          <a:prstGeom prst="rect">
+            <a:avLst/>
+          </a:prstGeom>
+          <a:solidFill>
+            <a:srgbClr val="904199"/>
+          </a:solidFill>
+          <a:ln>
+            <a:noFill/>
+          </a:ln>
+        </p:spPr>
+        <p:style>
+          <a:lnRef idx="1">
+            <a:schemeClr val="accent1"/>
+          </a:lnRef>
+          <a:fillRef idx="3">
+            <a:schemeClr val="accent1"/>
+          </a:fillRef>
+          <a:effectRef idx="2">
+            <a:schemeClr val="accent1"/>
+          </a:effectRef>
+          <a:fontRef idx="minor">
+            <a:schemeClr val="lt1"/>
+          </a:fontRef>
+        </p:style>
+        <p:txBody>
+          <a:bodyPr rtlCol="0" anchor="ctr"/>
+          <a:lstStyle/>
+          <a:p>
+            <a:pPr algn="ctr"/>
+          </a:p>
+        </p:txBody>
+      </p:sp>
+      <p:sp>
+        <p:nvSpPr>
+          <p:cNvPr id="13" name="TextBox 12"/>
+          <p:cNvSpPr txBox="1"/>
+          <p:nvPr/>
+        </p:nvSpPr>
+        <p:spPr>
+          <a:xfrm>
+            <a:off x="475488" y="2944368"/>
+            <a:ext cx="365760" cy="338328"/>
+          </a:xfrm>
+          <a:prstGeom prst="rect">
+            <a:avLst/>
+          </a:prstGeom>
+          <a:noFill/>
+        </p:spPr>
+        <p:txBody>
+          <a:bodyPr wrap="square">
+            <a:spAutoFit/>
+          </a:bodyPr>
+          <a:lstStyle/>
+          <a:p>
+            <a:pPr algn="ctr"/>
+            <a:r>
+              <a:rPr sz="1500" b="1" i="0">
+                <a:solidFill>
+                  <a:srgbClr val="FFFFFF"/>
+                </a:solidFill>
+                <a:latin typeface="Arial"/>
+              </a:rPr>
+              <a:t>3</a:t>
+            </a:r>
+          </a:p>
+        </p:txBody>
+      </p:sp>
+      <p:sp>
+        <p:nvSpPr>
+          <p:cNvPr id="14" name="TextBox 13"/>
+          <p:cNvSpPr txBox="1"/>
+          <p:nvPr/>
+        </p:nvSpPr>
+        <p:spPr>
+          <a:xfrm>
+            <a:off x="987552" y="2916936"/>
+            <a:ext cx="10680192" cy="594360"/>
+          </a:xfrm>
+          <a:prstGeom prst="rect">
+            <a:avLst/>
+          </a:prstGeom>
+          <a:noFill/>
+        </p:spPr>
+        <p:txBody>
+          <a:bodyPr wrap="square">
+            <a:spAutoFit/>
+          </a:bodyPr>
+          <a:lstStyle/>
+          <a:p>
+            <a:pPr algn="l"/>
+            <a:r>
+              <a:rPr sz="1800" b="0" i="0">
                 <a:solidFill>
                   <a:srgbClr val="191919"/>
                 </a:solidFill>
-              </a:rPr>
-              <a:t>Best practice: build and validate concept sets (Day 2) BEFORE building cohorts (Day 3)</a:t>
-            </a:r>
-          </a:p>
-          <a:p>
-            <a:pPr>
-              <a:spcBef>
-                <a:spcPts val="600"/>
-              </a:spcBef>
-            </a:pPr>
-            <a:r>
-              <a:rPr sz="1800">
+                <a:latin typeface="Arial"/>
+              </a:rPr>
+              <a:t>Apply temporal logic correctly in inclusion and exclusion rules</a:t>
+            </a:r>
+          </a:p>
+        </p:txBody>
+      </p:sp>
+      <p:sp>
+        <p:nvSpPr>
+          <p:cNvPr id="15" name="Rectangle 14"/>
+          <p:cNvSpPr/>
+          <p:nvPr/>
+        </p:nvSpPr>
+        <p:spPr>
+          <a:xfrm>
+            <a:off x="475488" y="3584448"/>
+            <a:ext cx="365760" cy="365760"/>
+          </a:xfrm>
+          <a:prstGeom prst="rect">
+            <a:avLst/>
+          </a:prstGeom>
+          <a:solidFill>
+            <a:srgbClr val="904199"/>
+          </a:solidFill>
+          <a:ln>
+            <a:noFill/>
+          </a:ln>
+        </p:spPr>
+        <p:style>
+          <a:lnRef idx="1">
+            <a:schemeClr val="accent1"/>
+          </a:lnRef>
+          <a:fillRef idx="3">
+            <a:schemeClr val="accent1"/>
+          </a:fillRef>
+          <a:effectRef idx="2">
+            <a:schemeClr val="accent1"/>
+          </a:effectRef>
+          <a:fontRef idx="minor">
+            <a:schemeClr val="lt1"/>
+          </a:fontRef>
+        </p:style>
+        <p:txBody>
+          <a:bodyPr rtlCol="0" anchor="ctr"/>
+          <a:lstStyle/>
+          <a:p>
+            <a:pPr algn="ctr"/>
+          </a:p>
+        </p:txBody>
+      </p:sp>
+      <p:sp>
+        <p:nvSpPr>
+          <p:cNvPr id="16" name="TextBox 15"/>
+          <p:cNvSpPr txBox="1"/>
+          <p:nvPr/>
+        </p:nvSpPr>
+        <p:spPr>
+          <a:xfrm>
+            <a:off x="475488" y="3611880"/>
+            <a:ext cx="365760" cy="338328"/>
+          </a:xfrm>
+          <a:prstGeom prst="rect">
+            <a:avLst/>
+          </a:prstGeom>
+          <a:noFill/>
+        </p:spPr>
+        <p:txBody>
+          <a:bodyPr wrap="square">
+            <a:spAutoFit/>
+          </a:bodyPr>
+          <a:lstStyle/>
+          <a:p>
+            <a:pPr algn="ctr"/>
+            <a:r>
+              <a:rPr sz="1500" b="1" i="0">
+                <a:solidFill>
+                  <a:srgbClr val="FFFFFF"/>
+                </a:solidFill>
+                <a:latin typeface="Arial"/>
+              </a:rPr>
+              <a:t>4</a:t>
+            </a:r>
+          </a:p>
+        </p:txBody>
+      </p:sp>
+      <p:sp>
+        <p:nvSpPr>
+          <p:cNvPr id="17" name="TextBox 16"/>
+          <p:cNvSpPr txBox="1"/>
+          <p:nvPr/>
+        </p:nvSpPr>
+        <p:spPr>
+          <a:xfrm>
+            <a:off x="987552" y="3584448"/>
+            <a:ext cx="10680192" cy="594360"/>
+          </a:xfrm>
+          <a:prstGeom prst="rect">
+            <a:avLst/>
+          </a:prstGeom>
+          <a:noFill/>
+        </p:spPr>
+        <p:txBody>
+          <a:bodyPr wrap="square">
+            <a:spAutoFit/>
+          </a:bodyPr>
+          <a:lstStyle/>
+          <a:p>
+            <a:pPr algn="l"/>
+            <a:r>
+              <a:rPr sz="1800" b="0" i="0">
                 <a:solidFill>
                   <a:srgbClr val="191919"/>
                 </a:solidFill>
-              </a:rPr>
-              <a:t>You can reuse the same concept set across multiple cohorts — this ensures consistency</a:t>
-            </a:r>
-          </a:p>
-          <a:p>
-            <a:pPr>
-              <a:spcBef>
-                <a:spcPts val="600"/>
-              </a:spcBef>
-            </a:pPr>
-            <a:r>
-              <a:rPr sz="1800">
+                <a:latin typeface="Arial"/>
+              </a:rPr>
+              <a:t>Build and generate a cohort in ATLAS step by step</a:t>
+            </a:r>
+          </a:p>
+        </p:txBody>
+      </p:sp>
+      <p:sp>
+        <p:nvSpPr>
+          <p:cNvPr id="18" name="Rectangle 17"/>
+          <p:cNvSpPr/>
+          <p:nvPr/>
+        </p:nvSpPr>
+        <p:spPr>
+          <a:xfrm>
+            <a:off x="475488" y="4251960"/>
+            <a:ext cx="365760" cy="365760"/>
+          </a:xfrm>
+          <a:prstGeom prst="rect">
+            <a:avLst/>
+          </a:prstGeom>
+          <a:solidFill>
+            <a:srgbClr val="904199"/>
+          </a:solidFill>
+          <a:ln>
+            <a:noFill/>
+          </a:ln>
+        </p:spPr>
+        <p:style>
+          <a:lnRef idx="1">
+            <a:schemeClr val="accent1"/>
+          </a:lnRef>
+          <a:fillRef idx="3">
+            <a:schemeClr val="accent1"/>
+          </a:fillRef>
+          <a:effectRef idx="2">
+            <a:schemeClr val="accent1"/>
+          </a:effectRef>
+          <a:fontRef idx="minor">
+            <a:schemeClr val="lt1"/>
+          </a:fontRef>
+        </p:style>
+        <p:txBody>
+          <a:bodyPr rtlCol="0" anchor="ctr"/>
+          <a:lstStyle/>
+          <a:p>
+            <a:pPr algn="ctr"/>
+          </a:p>
+        </p:txBody>
+      </p:sp>
+      <p:sp>
+        <p:nvSpPr>
+          <p:cNvPr id="19" name="TextBox 18"/>
+          <p:cNvSpPr txBox="1"/>
+          <p:nvPr/>
+        </p:nvSpPr>
+        <p:spPr>
+          <a:xfrm>
+            <a:off x="475488" y="4279392"/>
+            <a:ext cx="365760" cy="338328"/>
+          </a:xfrm>
+          <a:prstGeom prst="rect">
+            <a:avLst/>
+          </a:prstGeom>
+          <a:noFill/>
+        </p:spPr>
+        <p:txBody>
+          <a:bodyPr wrap="square">
+            <a:spAutoFit/>
+          </a:bodyPr>
+          <a:lstStyle/>
+          <a:p>
+            <a:pPr algn="ctr"/>
+            <a:r>
+              <a:rPr sz="1500" b="1" i="0">
+                <a:solidFill>
+                  <a:srgbClr val="FFFFFF"/>
+                </a:solidFill>
+                <a:latin typeface="Arial"/>
+              </a:rPr>
+              <a:t>5</a:t>
+            </a:r>
+          </a:p>
+        </p:txBody>
+      </p:sp>
+      <p:sp>
+        <p:nvSpPr>
+          <p:cNvPr id="20" name="TextBox 19"/>
+          <p:cNvSpPr txBox="1"/>
+          <p:nvPr/>
+        </p:nvSpPr>
+        <p:spPr>
+          <a:xfrm>
+            <a:off x="987552" y="4251960"/>
+            <a:ext cx="10680192" cy="594360"/>
+          </a:xfrm>
+          <a:prstGeom prst="rect">
+            <a:avLst/>
+          </a:prstGeom>
+          <a:noFill/>
+        </p:spPr>
+        <p:txBody>
+          <a:bodyPr wrap="square">
+            <a:spAutoFit/>
+          </a:bodyPr>
+          <a:lstStyle/>
+          <a:p>
+            <a:pPr algn="l"/>
+            <a:r>
+              <a:rPr sz="1800" b="0" i="0">
                 <a:solidFill>
                   <a:srgbClr val="191919"/>
                 </a:solidFill>
-              </a:rPr>
-              <a:t>Common mistake: modifying a concept set that is already used in a generated cohort — regenerate after any change</a:t>
-            </a:r>
-          </a:p>
-          <a:p>
-            <a:pPr>
-              <a:spcBef>
-                <a:spcPts val="600"/>
-              </a:spcBef>
-            </a:pPr>
-            <a:r>
-              <a:rPr sz="1800">
+                <a:latin typeface="Arial"/>
+              </a:rPr>
+              <a:t>Read an attrition report and identify logic errors from the counts</a:t>
+            </a:r>
+          </a:p>
+        </p:txBody>
+      </p:sp>
+      <p:sp>
+        <p:nvSpPr>
+          <p:cNvPr id="21" name="Rectangle 20"/>
+          <p:cNvSpPr/>
+          <p:nvPr/>
+        </p:nvSpPr>
+        <p:spPr>
+          <a:xfrm>
+            <a:off x="475488" y="4919472"/>
+            <a:ext cx="365760" cy="365760"/>
+          </a:xfrm>
+          <a:prstGeom prst="rect">
+            <a:avLst/>
+          </a:prstGeom>
+          <a:solidFill>
+            <a:srgbClr val="904199"/>
+          </a:solidFill>
+          <a:ln>
+            <a:noFill/>
+          </a:ln>
+        </p:spPr>
+        <p:style>
+          <a:lnRef idx="1">
+            <a:schemeClr val="accent1"/>
+          </a:lnRef>
+          <a:fillRef idx="3">
+            <a:schemeClr val="accent1"/>
+          </a:fillRef>
+          <a:effectRef idx="2">
+            <a:schemeClr val="accent1"/>
+          </a:effectRef>
+          <a:fontRef idx="minor">
+            <a:schemeClr val="lt1"/>
+          </a:fontRef>
+        </p:style>
+        <p:txBody>
+          <a:bodyPr rtlCol="0" anchor="ctr"/>
+          <a:lstStyle/>
+          <a:p>
+            <a:pPr algn="ctr"/>
+          </a:p>
+        </p:txBody>
+      </p:sp>
+      <p:sp>
+        <p:nvSpPr>
+          <p:cNvPr id="22" name="TextBox 21"/>
+          <p:cNvSpPr txBox="1"/>
+          <p:nvPr/>
+        </p:nvSpPr>
+        <p:spPr>
+          <a:xfrm>
+            <a:off x="475488" y="4946904"/>
+            <a:ext cx="365760" cy="338328"/>
+          </a:xfrm>
+          <a:prstGeom prst="rect">
+            <a:avLst/>
+          </a:prstGeom>
+          <a:noFill/>
+        </p:spPr>
+        <p:txBody>
+          <a:bodyPr wrap="square">
+            <a:spAutoFit/>
+          </a:bodyPr>
+          <a:lstStyle/>
+          <a:p>
+            <a:pPr algn="ctr"/>
+            <a:r>
+              <a:rPr sz="1500" b="1" i="0">
+                <a:solidFill>
+                  <a:srgbClr val="FFFFFF"/>
+                </a:solidFill>
+                <a:latin typeface="Arial"/>
+              </a:rPr>
+              <a:t>6</a:t>
+            </a:r>
+          </a:p>
+        </p:txBody>
+      </p:sp>
+      <p:sp>
+        <p:nvSpPr>
+          <p:cNvPr id="23" name="TextBox 22"/>
+          <p:cNvSpPr txBox="1"/>
+          <p:nvPr/>
+        </p:nvSpPr>
+        <p:spPr>
+          <a:xfrm>
+            <a:off x="987552" y="4919472"/>
+            <a:ext cx="10680192" cy="594360"/>
+          </a:xfrm>
+          <a:prstGeom prst="rect">
+            <a:avLst/>
+          </a:prstGeom>
+          <a:noFill/>
+        </p:spPr>
+        <p:txBody>
+          <a:bodyPr wrap="square">
+            <a:spAutoFit/>
+          </a:bodyPr>
+          <a:lstStyle/>
+          <a:p>
+            <a:pPr algn="l"/>
+            <a:r>
+              <a:rPr sz="1800" b="0" i="0">
                 <a:solidFill>
                   <a:srgbClr val="191919"/>
                 </a:solidFill>
-              </a:rPr>
-              <a:t>Export concept sets as JSON alongside your cohort definition JSON for version control</a:t>
+                <a:latin typeface="Arial"/>
+              </a:rPr>
+              <a:t>Characterize a generated cohort and interpret the output</a:t>
             </a:r>
           </a:p>
         </p:txBody>
@@ -10415,13 +11865,13 @@
         <p:spPr>
           <a:xfrm>
             <a:off x="0" y="0"/>
-            <a:ext cx="12188952" cy="960120"/>
+            <a:ext cx="12188952" cy="6858000"/>
           </a:xfrm>
           <a:prstGeom prst="rect">
             <a:avLst/>
           </a:prstGeom>
           <a:solidFill>
-            <a:srgbClr val="4B2682"/>
+            <a:srgbClr val="FFFFFF"/>
           </a:solidFill>
           <a:ln>
             <a:noFill/>
@@ -10457,14 +11907,14 @@
         </p:nvSpPr>
         <p:spPr>
           <a:xfrm>
-            <a:off x="0" y="923544"/>
-            <a:ext cx="12188952" cy="36576"/>
+            <a:off x="0" y="0"/>
+            <a:ext cx="12188952" cy="960120"/>
           </a:xfrm>
           <a:prstGeom prst="rect">
             <a:avLst/>
           </a:prstGeom>
           <a:solidFill>
-            <a:srgbClr val="7B4FA8"/>
+            <a:srgbClr val="20425A"/>
           </a:solidFill>
           <a:ln>
             <a:noFill/>
@@ -10494,7 +11944,50 @@
       </p:sp>
       <p:sp>
         <p:nvSpPr>
-          <p:cNvPr id="4" name="TextBox 3"/>
+          <p:cNvPr id="4" name="Rectangle 3"/>
+          <p:cNvSpPr/>
+          <p:nvPr/>
+        </p:nvSpPr>
+        <p:spPr>
+          <a:xfrm>
+            <a:off x="0" y="905256"/>
+            <a:ext cx="12188952" cy="54864"/>
+          </a:xfrm>
+          <a:prstGeom prst="rect">
+            <a:avLst/>
+          </a:prstGeom>
+          <a:solidFill>
+            <a:srgbClr val="904199"/>
+          </a:solidFill>
+          <a:ln>
+            <a:noFill/>
+          </a:ln>
+        </p:spPr>
+        <p:style>
+          <a:lnRef idx="1">
+            <a:schemeClr val="accent1"/>
+          </a:lnRef>
+          <a:fillRef idx="3">
+            <a:schemeClr val="accent1"/>
+          </a:fillRef>
+          <a:effectRef idx="2">
+            <a:schemeClr val="accent1"/>
+          </a:effectRef>
+          <a:fontRef idx="minor">
+            <a:schemeClr val="lt1"/>
+          </a:fontRef>
+        </p:style>
+        <p:txBody>
+          <a:bodyPr rtlCol="0" anchor="ctr"/>
+          <a:lstStyle/>
+          <a:p>
+            <a:pPr algn="ctr"/>
+          </a:p>
+        </p:txBody>
+      </p:sp>
+      <p:sp>
+        <p:nvSpPr>
+          <p:cNvPr id="5" name="TextBox 4"/>
           <p:cNvSpPr txBox="1"/>
           <p:nvPr/>
         </p:nvSpPr>
@@ -10520,22 +12013,68 @@
                 <a:solidFill>
                   <a:srgbClr val="FFFFFF"/>
                 </a:solidFill>
-              </a:rPr>
-              <a:t>Part 3: Inclusion Criteria</a:t>
-            </a:r>
-          </a:p>
-        </p:txBody>
-      </p:sp>
-      <p:sp>
-        <p:nvSpPr>
-          <p:cNvPr id="5" name="TextBox 4"/>
+                <a:latin typeface="Gotham Narrow"/>
+              </a:rPr>
+              <a:t>Let's discuss</a:t>
+            </a:r>
+          </a:p>
+        </p:txBody>
+      </p:sp>
+      <p:sp>
+        <p:nvSpPr>
+          <p:cNvPr id="6" name="Rectangle 5"/>
+          <p:cNvSpPr/>
+          <p:nvPr/>
+        </p:nvSpPr>
+        <p:spPr>
+          <a:xfrm>
+            <a:off x="475488" y="2377440"/>
+            <a:ext cx="11237976" cy="2194560"/>
+          </a:xfrm>
+          <a:prstGeom prst="rect">
+            <a:avLst/>
+          </a:prstGeom>
+          <a:solidFill>
+            <a:srgbClr val="ECDFF3"/>
+          </a:solidFill>
+          <a:ln w="9525">
+            <a:solidFill>
+              <a:srgbClr val="904199"/>
+            </a:solidFill>
+          </a:ln>
+        </p:spPr>
+        <p:style>
+          <a:lnRef idx="1">
+            <a:schemeClr val="accent1"/>
+          </a:lnRef>
+          <a:fillRef idx="3">
+            <a:schemeClr val="accent1"/>
+          </a:fillRef>
+          <a:effectRef idx="2">
+            <a:schemeClr val="accent1"/>
+          </a:effectRef>
+          <a:fontRef idx="minor">
+            <a:schemeClr val="lt1"/>
+          </a:fontRef>
+        </p:style>
+        <p:txBody>
+          <a:bodyPr rtlCol="0" anchor="ctr"/>
+          <a:lstStyle/>
+          <a:p>
+            <a:pPr algn="ctr"/>
+          </a:p>
+        </p:txBody>
+      </p:sp>
+      <p:sp>
+        <p:nvSpPr>
+          <p:cNvPr id="7" name="TextBox 6"/>
           <p:cNvSpPr txBox="1"/>
           <p:nvPr/>
         </p:nvSpPr>
         <p:spPr>
           <a:xfrm>
-            <a:off x="475488" y="1161288"/>
-            <a:ext cx="11237976" cy="5495544"/>
+            <a:off x="841248" y="2743200"/>
+            <a:ext cx="10506456" cy="1554480"/>
           </a:xfrm>
           <a:prstGeom prst="rect">
             <a:avLst/>
@@ -10548,153 +12087,15 @@
           </a:bodyPr>
           <a:lstStyle/>
           <a:p>
-            <a:pPr>
-              <a:spcBef>
-                <a:spcPts val="600"/>
-              </a:spcBef>
-            </a:pPr>
-            <a:r>
-              <a:rPr sz="1800">
-                <a:solidFill>
-                  <a:srgbClr val="191919"/>
-                </a:solidFill>
-              </a:rPr>
-              <a:t>Additional conditions applied to the entry events</a:t>
-            </a:r>
-          </a:p>
-          <a:p>
-            <a:pPr>
-              <a:spcBef>
-                <a:spcPts val="600"/>
-              </a:spcBef>
-            </a:pPr>
-            <a:r>
-              <a:rPr sz="1800">
-                <a:solidFill>
-                  <a:srgbClr val="191919"/>
-                </a:solidFill>
-              </a:rPr>
-              <a:t>Each criterion is a named, testable rule with a temporal window</a:t>
-            </a:r>
-          </a:p>
-          <a:p>
-            <a:pPr>
-              <a:spcBef>
-                <a:spcPts val="600"/>
-              </a:spcBef>
-            </a:pPr>
-            <a:r>
-              <a:rPr sz="1800">
-                <a:solidFill>
-                  <a:srgbClr val="191919"/>
-                </a:solidFill>
-              </a:rPr>
-              <a:t>Examples:</a:t>
-            </a:r>
-          </a:p>
-          <a:p>
-            <a:pPr lvl="1">
-              <a:spcBef>
-                <a:spcPts val="300"/>
-              </a:spcBef>
-            </a:pPr>
-            <a:r>
-              <a:rPr sz="1600">
-                <a:solidFill>
-                  <a:srgbClr val="191919"/>
-                </a:solidFill>
-              </a:rPr>
-              <a:t>'At least 365 days of continuous prior observation before index'</a:t>
-            </a:r>
-          </a:p>
-          <a:p>
-            <a:pPr lvl="1">
-              <a:spcBef>
-                <a:spcPts val="300"/>
-              </a:spcBef>
-            </a:pPr>
-            <a:r>
-              <a:rPr sz="1600">
-                <a:solidFill>
-                  <a:srgbClr val="191919"/>
-                </a:solidFill>
-              </a:rPr>
-              <a:t>'No prior insulin exposure in the 365 days before index'</a:t>
-            </a:r>
-          </a:p>
-          <a:p>
-            <a:pPr lvl="1">
-              <a:spcBef>
-                <a:spcPts val="300"/>
-              </a:spcBef>
-            </a:pPr>
-            <a:r>
-              <a:rPr sz="1600">
-                <a:solidFill>
-                  <a:srgbClr val="191919"/>
-                </a:solidFill>
-              </a:rPr>
-              <a:t>'Age ≥ 18 at index date'</a:t>
-            </a:r>
-          </a:p>
-          <a:p>
-            <a:pPr lvl="1">
-              <a:spcBef>
-                <a:spcPts val="300"/>
-              </a:spcBef>
-            </a:pPr>
-            <a:r>
-              <a:rPr sz="1600">
-                <a:solidFill>
-                  <a:srgbClr val="191919"/>
-                </a:solidFill>
-              </a:rPr>
-              <a:t>'At least one type 2 diabetes diagnosis in the 365 days before index'</a:t>
-            </a:r>
-          </a:p>
-          <a:p>
-            <a:pPr>
-              <a:spcBef>
-                <a:spcPts val="600"/>
-              </a:spcBef>
-            </a:pPr>
-            <a:r>
-              <a:rPr sz="1800">
-                <a:solidFill>
-                  <a:srgbClr val="191919"/>
-                </a:solidFill>
-              </a:rPr>
-              <a:t>Exclusions are written as inclusions: 'no prior insulin' = 'count of prior insulin exposures = 0'</a:t>
-            </a:r>
-          </a:p>
-          <a:p>
-            <a:pPr>
-              <a:spcBef>
-                <a:spcPts val="600"/>
-              </a:spcBef>
-            </a:pPr>
-            <a:r>
-              <a:rPr sz="1800">
-                <a:solidFill>
-                  <a:srgbClr val="191919"/>
-                </a:solidFill>
-              </a:rPr>
-              <a:t>There is no separate exclusion list in ATLAS — exclusions are inclusion rules that must be false</a:t>
-            </a:r>
-          </a:p>
-          <a:p>
-            <a:pPr>
-              <a:spcBef>
-                <a:spcPts val="600"/>
-              </a:spcBef>
-            </a:pPr>
-            <a:r>
-              <a:rPr sz="1800">
-                <a:solidFill>
-                  <a:srgbClr val="191919"/>
-                </a:solidFill>
-              </a:rPr>
-              <a:t>Each rule removes a subset of the cohort → the attrition report shows how many each rule removed</a:t>
+            <a:pPr algn="ctr"/>
+            <a:r>
+              <a:rPr sz="2800" b="1" i="0">
+                <a:solidFill>
+                  <a:srgbClr val="20425A"/>
+                </a:solidFill>
+                <a:latin typeface="Gotham Narrow"/>
+              </a:rPr>
+              <a:t>Tell me about a time you were asked to create a cohort.</a:t>
             </a:r>
           </a:p>
         </p:txBody>
@@ -10732,7 +12133,7 @@
             <a:avLst/>
           </a:prstGeom>
           <a:solidFill>
-            <a:srgbClr val="4B2682"/>
+            <a:srgbClr val="20425A"/>
           </a:solidFill>
           <a:ln>
             <a:noFill/>
@@ -10768,14 +12169,14 @@
         </p:nvSpPr>
         <p:spPr>
           <a:xfrm>
-            <a:off x="0" y="923544"/>
-            <a:ext cx="12188952" cy="36576"/>
+            <a:off x="0" y="905256"/>
+            <a:ext cx="12188952" cy="54864"/>
           </a:xfrm>
           <a:prstGeom prst="rect">
             <a:avLst/>
           </a:prstGeom>
           <a:solidFill>
-            <a:srgbClr val="7B4FA8"/>
+            <a:srgbClr val="904199"/>
           </a:solidFill>
           <a:ln>
             <a:noFill/>
@@ -10831,22 +12232,66 @@
                 <a:solidFill>
                   <a:srgbClr val="FFFFFF"/>
                 </a:solidFill>
-              </a:rPr>
-              <a:t>Temporal Logic — The Most Common Source of Errors</a:t>
-            </a:r>
-          </a:p>
-        </p:txBody>
-      </p:sp>
-      <p:sp>
-        <p:nvSpPr>
-          <p:cNvPr id="5" name="TextBox 4"/>
+                <a:latin typeface="Gotham Narrow"/>
+              </a:rPr>
+              <a:t>What Is an OHDSI Cohort?</a:t>
+            </a:r>
+          </a:p>
+        </p:txBody>
+      </p:sp>
+      <p:sp>
+        <p:nvSpPr>
+          <p:cNvPr id="5" name="Rectangle 4"/>
+          <p:cNvSpPr/>
+          <p:nvPr/>
+        </p:nvSpPr>
+        <p:spPr>
+          <a:xfrm>
+            <a:off x="475488" y="1124712"/>
+            <a:ext cx="5504688" cy="5532120"/>
+          </a:xfrm>
+          <a:prstGeom prst="rect">
+            <a:avLst/>
+          </a:prstGeom>
+          <a:solidFill>
+            <a:srgbClr val="F6F6F6"/>
+          </a:solidFill>
+          <a:ln>
+            <a:noFill/>
+          </a:ln>
+        </p:spPr>
+        <p:style>
+          <a:lnRef idx="1">
+            <a:schemeClr val="accent1"/>
+          </a:lnRef>
+          <a:fillRef idx="3">
+            <a:schemeClr val="accent1"/>
+          </a:fillRef>
+          <a:effectRef idx="2">
+            <a:schemeClr val="accent1"/>
+          </a:effectRef>
+          <a:fontRef idx="minor">
+            <a:schemeClr val="lt1"/>
+          </a:fontRef>
+        </p:style>
+        <p:txBody>
+          <a:bodyPr rtlCol="0" anchor="ctr"/>
+          <a:lstStyle/>
+          <a:p>
+            <a:pPr algn="ctr"/>
+          </a:p>
+        </p:txBody>
+      </p:sp>
+      <p:sp>
+        <p:nvSpPr>
+          <p:cNvPr id="6" name="TextBox 5"/>
           <p:cNvSpPr txBox="1"/>
           <p:nvPr/>
         </p:nvSpPr>
         <p:spPr>
           <a:xfrm>
-            <a:off x="475488" y="1161288"/>
-            <a:ext cx="11237976" cy="5495544"/>
+            <a:off x="566928" y="1216152"/>
+            <a:ext cx="5321808" cy="457200"/>
           </a:xfrm>
           <a:prstGeom prst="rect">
             <a:avLst/>
@@ -10859,138 +12304,299 @@
           </a:bodyPr>
           <a:lstStyle/>
           <a:p>
+            <a:pPr algn="l"/>
+            <a:r>
+              <a:rPr sz="1800" b="1" i="0">
+                <a:solidFill>
+                  <a:srgbClr val="20425A"/>
+                </a:solidFill>
+                <a:latin typeface="Arial"/>
+              </a:rPr>
+              <a:t>A Cohort IS</a:t>
+            </a:r>
+          </a:p>
+        </p:txBody>
+      </p:sp>
+      <p:sp>
+        <p:nvSpPr>
+          <p:cNvPr id="7" name="TextBox 6"/>
+          <p:cNvSpPr txBox="1"/>
+          <p:nvPr/>
+        </p:nvSpPr>
+        <p:spPr>
+          <a:xfrm>
+            <a:off x="612648" y="1719072"/>
+            <a:ext cx="5230368" cy="4846320"/>
+          </a:xfrm>
+          <a:prstGeom prst="rect">
+            <a:avLst/>
+          </a:prstGeom>
+          <a:noFill/>
+        </p:spPr>
+        <p:txBody>
+          <a:bodyPr wrap="square">
+            <a:spAutoFit/>
+          </a:bodyPr>
+          <a:lstStyle/>
+          <a:p>
             <a:pPr>
               <a:spcBef>
-                <a:spcPts val="600"/>
+                <a:spcPts val="500"/>
               </a:spcBef>
             </a:pPr>
             <a:r>
-              <a:rPr sz="1800">
+              <a:rPr sz="1700">
                 <a:solidFill>
                   <a:srgbClr val="191919"/>
                 </a:solidFill>
-              </a:rPr>
-              <a:t>Every inclusion rule has a time window relative to the index date (entry event)</a:t>
+                <a:latin typeface="Arial"/>
+              </a:rPr>
+              <a:t>A set of persons who satisfy one or more criteria for a duration of time</a:t>
             </a:r>
           </a:p>
           <a:p>
             <a:pPr>
               <a:spcBef>
-                <a:spcPts val="600"/>
+                <a:spcPts val="500"/>
               </a:spcBef>
             </a:pPr>
             <a:r>
-              <a:rPr sz="1800">
+              <a:rPr sz="1700">
                 <a:solidFill>
                   <a:srgbClr val="191919"/>
                 </a:solidFill>
-              </a:rPr>
-              <a:t>Window options: BEFORE index · AFTER index · SURROUNDING index · ANY TIME</a:t>
+                <a:latin typeface="Arial"/>
+              </a:rPr>
+              <a:t>A rule set: who qualifies, under what conditions, and for how long</a:t>
             </a:r>
           </a:p>
           <a:p>
             <a:pPr>
               <a:spcBef>
-                <a:spcPts val="600"/>
+                <a:spcPts val="500"/>
               </a:spcBef>
             </a:pPr>
             <a:r>
-              <a:rPr sz="1800">
+              <a:rPr sz="1700">
                 <a:solidFill>
                   <a:srgbClr val="191919"/>
                 </a:solidFill>
-              </a:rPr>
-              <a:t>Examples of windows:</a:t>
-            </a:r>
-          </a:p>
-          <a:p>
-            <a:pPr lvl="1">
+                <a:latin typeface="Arial"/>
+              </a:rPr>
+              <a:t>Reproducible: the same definition applied to any OMOP CDM produces a comparable result</a:t>
+            </a:r>
+          </a:p>
+          <a:p>
+            <a:pPr>
               <a:spcBef>
-                <a:spcPts val="300"/>
+                <a:spcPts val="500"/>
               </a:spcBef>
             </a:pPr>
             <a:r>
-              <a:rPr sz="1600">
+              <a:rPr sz="1700">
                 <a:solidFill>
                   <a:srgbClr val="191919"/>
                 </a:solidFill>
-              </a:rPr>
-              <a:t>365 days BEFORE index: look back one year from the entry event</a:t>
-            </a:r>
-          </a:p>
-          <a:p>
-            <a:pPr lvl="1">
+                <a:latin typeface="Arial"/>
+              </a:rPr>
+              <a:t>An entry event (initial qualifying event) with optional inclusion rules and an exit strategy</a:t>
+            </a:r>
+          </a:p>
+          <a:p>
+            <a:pPr>
               <a:spcBef>
-                <a:spcPts val="300"/>
+                <a:spcPts val="500"/>
               </a:spcBef>
             </a:pPr>
             <a:r>
-              <a:rPr sz="1600">
+              <a:rPr sz="1700">
                 <a:solidFill>
                   <a:srgbClr val="191919"/>
                 </a:solidFill>
-              </a:rPr>
-              <a:t>0–90 days AFTER index: look forward 3 months from the entry event</a:t>
-            </a:r>
-          </a:p>
-          <a:p>
-            <a:pPr lvl="1">
+                <a:latin typeface="Arial"/>
+              </a:rPr>
+              <a:t>The foundational unit of all OHDSI analysis</a:t>
+            </a:r>
+          </a:p>
+        </p:txBody>
+      </p:sp>
+      <p:sp>
+        <p:nvSpPr>
+          <p:cNvPr id="8" name="Rectangle 7"/>
+          <p:cNvSpPr/>
+          <p:nvPr/>
+        </p:nvSpPr>
+        <p:spPr>
+          <a:xfrm>
+            <a:off x="6208776" y="1124712"/>
+            <a:ext cx="5504688" cy="5532120"/>
+          </a:xfrm>
+          <a:prstGeom prst="rect">
+            <a:avLst/>
+          </a:prstGeom>
+          <a:solidFill>
+            <a:srgbClr val="F0EBFC"/>
+          </a:solidFill>
+          <a:ln>
+            <a:noFill/>
+          </a:ln>
+        </p:spPr>
+        <p:style>
+          <a:lnRef idx="1">
+            <a:schemeClr val="accent1"/>
+          </a:lnRef>
+          <a:fillRef idx="3">
+            <a:schemeClr val="accent1"/>
+          </a:fillRef>
+          <a:effectRef idx="2">
+            <a:schemeClr val="accent1"/>
+          </a:effectRef>
+          <a:fontRef idx="minor">
+            <a:schemeClr val="lt1"/>
+          </a:fontRef>
+        </p:style>
+        <p:txBody>
+          <a:bodyPr rtlCol="0" anchor="ctr"/>
+          <a:lstStyle/>
+          <a:p>
+            <a:pPr algn="ctr"/>
+          </a:p>
+        </p:txBody>
+      </p:sp>
+      <p:sp>
+        <p:nvSpPr>
+          <p:cNvPr id="9" name="TextBox 8"/>
+          <p:cNvSpPr txBox="1"/>
+          <p:nvPr/>
+        </p:nvSpPr>
+        <p:spPr>
+          <a:xfrm>
+            <a:off x="6300216" y="1216152"/>
+            <a:ext cx="5321808" cy="457200"/>
+          </a:xfrm>
+          <a:prstGeom prst="rect">
+            <a:avLst/>
+          </a:prstGeom>
+          <a:noFill/>
+        </p:spPr>
+        <p:txBody>
+          <a:bodyPr wrap="square">
+            <a:spAutoFit/>
+          </a:bodyPr>
+          <a:lstStyle/>
+          <a:p>
+            <a:pPr algn="l"/>
+            <a:r>
+              <a:rPr sz="1800" b="1" i="0">
+                <a:solidFill>
+                  <a:srgbClr val="20425A"/>
+                </a:solidFill>
+                <a:latin typeface="Arial"/>
+              </a:rPr>
+              <a:t>A Cohort IS NOT</a:t>
+            </a:r>
+          </a:p>
+        </p:txBody>
+      </p:sp>
+      <p:sp>
+        <p:nvSpPr>
+          <p:cNvPr id="10" name="TextBox 9"/>
+          <p:cNvSpPr txBox="1"/>
+          <p:nvPr/>
+        </p:nvSpPr>
+        <p:spPr>
+          <a:xfrm>
+            <a:off x="6345936" y="1719072"/>
+            <a:ext cx="5230368" cy="4846320"/>
+          </a:xfrm>
+          <a:prstGeom prst="rect">
+            <a:avLst/>
+          </a:prstGeom>
+          <a:noFill/>
+        </p:spPr>
+        <p:txBody>
+          <a:bodyPr wrap="square">
+            <a:spAutoFit/>
+          </a:bodyPr>
+          <a:lstStyle/>
+          <a:p>
+            <a:pPr>
               <a:spcBef>
-                <a:spcPts val="300"/>
+                <a:spcPts val="500"/>
               </a:spcBef>
             </a:pPr>
             <a:r>
-              <a:rPr sz="1600">
+              <a:rPr sz="1700">
                 <a:solidFill>
                   <a:srgbClr val="191919"/>
                 </a:solidFill>
-              </a:rPr>
-              <a:t>'Any time prior': no lookback limit — captures entire patient history before entry</a:t>
+                <a:latin typeface="Arial"/>
+              </a:rPr>
+              <a:t>A simple list of patients with a diagnosis code</a:t>
             </a:r>
           </a:p>
           <a:p>
             <a:pPr>
               <a:spcBef>
-                <a:spcPts val="600"/>
+                <a:spcPts val="500"/>
               </a:spcBef>
             </a:pPr>
             <a:r>
-              <a:rPr sz="1800">
+              <a:rPr sz="1700">
                 <a:solidFill>
                   <a:srgbClr val="191919"/>
                 </a:solidFill>
-              </a:rPr>
-              <a:t>The window defines what 'counts' as prior vs. subsequent exposure</a:t>
+                <a:latin typeface="Arial"/>
+              </a:rPr>
+              <a:t>An ad-hoc SQL query without formal definition</a:t>
             </a:r>
           </a:p>
           <a:p>
             <a:pPr>
               <a:spcBef>
-                <a:spcPts val="600"/>
+                <a:spcPts val="500"/>
               </a:spcBef>
             </a:pPr>
             <a:r>
-              <a:rPr sz="1800">
+              <a:rPr sz="1700">
                 <a:solidFill>
                   <a:srgbClr val="191919"/>
                 </a:solidFill>
-              </a:rPr>
-              <a:t>Wrong temporal logic is the most common cause of unexpectedly large or small cohorts</a:t>
+                <a:latin typeface="Arial"/>
+              </a:rPr>
+              <a:t>A list of concept IDs (that's a concept set — different thing)</a:t>
             </a:r>
           </a:p>
           <a:p>
             <a:pPr>
               <a:spcBef>
-                <a:spcPts val="600"/>
+                <a:spcPts val="500"/>
               </a:spcBef>
             </a:pPr>
             <a:r>
-              <a:rPr sz="1800">
+              <a:rPr sz="1700">
                 <a:solidFill>
                   <a:srgbClr val="191919"/>
                 </a:solidFill>
-              </a:rPr>
-              <a:t>Always review the attrition report BEFORE using a cohort for analysis</a:t>
+                <a:latin typeface="Arial"/>
+              </a:rPr>
+              <a:t>An un-timestamped set of people who 'have' a condition</a:t>
+            </a:r>
+          </a:p>
+          <a:p>
+            <a:pPr>
+              <a:spcBef>
+                <a:spcPts val="500"/>
+              </a:spcBef>
+            </a:pPr>
+            <a:r>
+              <a:rPr sz="1700">
+                <a:solidFill>
+                  <a:srgbClr val="191919"/>
+                </a:solidFill>
+                <a:latin typeface="Arial"/>
+              </a:rPr>
+              <a:t>A static export that ignores observation period</a:t>
             </a:r>
           </a:p>
         </p:txBody>
